--- a/lecons/USA/Population Geography/17_USA_POP_L13_Migration_Characteristics_Laws_and_Models.pptx
+++ b/lecons/USA/Population Geography/17_USA_POP_L13_Migration_Characteristics_Laws_and_Models.pptx
@@ -67,11 +67,9 @@
     <p:sldId id="315" r:id="rId61"/>
     <p:sldId id="316" r:id="rId62"/>
     <p:sldId id="317" r:id="rId63"/>
-    <p:sldId id="318" r:id="rId64"/>
-    <p:sldId id="319" r:id="rId65"/>
   </p:sldIdLst>
   <p:notesMasterIdLst>
-    <p:notesMasterId r:id="rId66"/>
+    <p:notesMasterId r:id="rId64"/>
   </p:notesMasterIdLst>
   <p:sldSz cx="12192000" cy="6858000"/>
   <p:notesSz cx="6858000" cy="12192000"/>
@@ -3205,7 +3203,7 @@
           <a:p>
             <a:r>
               <a:rPr lang="en-US" dirty="0"/>
-              <a:t>We continue with the definitions. On this slide we have Selectivity of migration and Chain migration. Write each point on a new line, with the key term first, and explain it in your own words when we revise. When you finish, we go to the next slide.</a:t>
+              <a:t>We continue with the definitions. On this slide we have Selectivity of migration and Laws of migration. Write each point on a new line, with the key term first, and explain it in your own words when we revise. When you finish, we go to the next slide.</a:t>
             </a:r>
             <a:endParaRPr lang="en-US" dirty="0"/>
           </a:p>
@@ -3381,7 +3379,7 @@
           <a:p>
             <a:r>
               <a:rPr lang="en-US" dirty="0"/>
-              <a:t>Let us copy Characteristics (Differentials) of Migration. The characteristics of migrants are the following. Copy the point on Age on the left, then draw the diagram on the right: who migrates. Give it a title and label it clearly.</a:t>
+              <a:t>Let us copy Meaning and Volume of Migration. Migration and its volume are explained as follows. Copy the point on Meaning: write the key term first, then its explanation.</a:t>
             </a:r>
             <a:endParaRPr lang="en-US" dirty="0"/>
           </a:p>
@@ -3557,7 +3555,7 @@
           <a:p>
             <a:r>
               <a:rPr lang="en-US" dirty="0"/>
-              <a:t>We continue with Characteristics (Differentials) of Migration. On this slide we have Sex. Write each point on a new line, with the key term first, and explain it in your own words when we revise. When you finish, we go to the next slide.</a:t>
+              <a:t>We continue with Meaning and Volume of Migration. Copy the point on Volume of migration: write the key term first, then its explanation.</a:t>
             </a:r>
             <a:endParaRPr lang="en-US" dirty="0"/>
           </a:p>
@@ -3645,7 +3643,7 @@
           <a:p>
             <a:r>
               <a:rPr lang="en-US" dirty="0"/>
-              <a:t>We continue with Characteristics (Differentials) of Migration. On this slide we have Skills and education and Marital status. Write each point on a new line, with the key term first, and explain it in your own words when we revise. When you finish, we go to the next slide.</a:t>
+              <a:t>Let us copy Characteristics (Differentials) of Migration. Migrants are selected by the following characteristics. Copy the point on Age on the left, then draw the diagram on the right: the selectivity of migration. Give it a title and label it clearly.</a:t>
             </a:r>
             <a:endParaRPr lang="en-US" dirty="0"/>
           </a:p>
@@ -3733,7 +3731,7 @@
           <a:p>
             <a:r>
               <a:rPr lang="en-US" dirty="0"/>
-              <a:t>We continue with Characteristics (Differentials) of Migration. On this slide we have Ethnic or national group. Write each point on a new line, with the key term first, and explain it in your own words when we revise.</a:t>
+              <a:t>We continue with Characteristics (Differentials) of Migration. Copy the point on Sex: write the key term first, then its explanation.</a:t>
             </a:r>
             <a:endParaRPr lang="en-US" dirty="0"/>
           </a:p>
@@ -3821,7 +3819,7 @@
           <a:p>
             <a:r>
               <a:rPr lang="en-US" dirty="0"/>
-              <a:t>Let us copy Zipf and the Gravity Model. Zipf's law and the gravity model are presented as follows. Copy the point on Zipf's inverse distance law on the left, then draw the diagram on the right: migrants and distance. Give it a title and label it clearly.</a:t>
+              <a:t>We continue with Characteristics (Differentials) of Migration. Copy the point on Skills and education: write the key term first, then its explanation.</a:t>
             </a:r>
             <a:endParaRPr lang="en-US" dirty="0"/>
           </a:p>
@@ -3909,7 +3907,7 @@
           <a:p>
             <a:r>
               <a:rPr lang="en-US" dirty="0"/>
-              <a:t>We continue with Zipf and the Gravity Model. On this slide we have Meaning. Write each point on a new line, with the key term first, and explain it in your own words when we revise.</a:t>
+              <a:t>We continue with Characteristics (Differentials) of Migration. Copy the point on Marital status and group: write the key term first, then its explanation.</a:t>
             </a:r>
             <a:endParaRPr lang="en-US" dirty="0"/>
           </a:p>
@@ -3997,7 +3995,7 @@
           <a:p>
             <a:r>
               <a:rPr lang="en-US" dirty="0"/>
-              <a:t>Copy the point on The gravity model on the left, then draw the diagram on the right: the gravity model. Give it a title and label it clearly.</a:t>
+              <a:t>Let us copy Zipf's Law and the Gravity Model. Distance and size explain migration in the following models. Copy the point on Zipf's inverse distance law on the left, then draw the diagram on the right: zipf's law. Give it a title and label it clearly.</a:t>
             </a:r>
             <a:endParaRPr lang="en-US" dirty="0"/>
           </a:p>
@@ -4085,7 +4083,7 @@
           <a:p>
             <a:r>
               <a:rPr lang="en-US" dirty="0"/>
-              <a:t>We continue with Zipf and the Gravity Model. On this slide we have Meaning. Write each point on a new line, with the key term first, and explain it in your own words when we revise.</a:t>
+              <a:t>Copy the point on The gravity model on the left, then draw the diagram on the right: the gravity model. Give it a title and label it clearly.</a:t>
             </a:r>
             <a:endParaRPr lang="en-US" dirty="0"/>
           </a:p>
@@ -4173,7 +4171,7 @@
           <a:p>
             <a:r>
               <a:rPr lang="en-US" dirty="0"/>
-              <a:t>Let us copy Stouffer's Intervening Opportunities. Stouffer's model is presented as follows. Copy the point on Principle on the left, then draw the diagram on the right: intervening opportunities. Give it a title and label it clearly.</a:t>
+              <a:t>Let us copy Stouffer's Intervening Opportunities Model. Stouffer's model explains migration as follows. Copy the point on Principle on the left, then draw the diagram on the right: stouffer's model. Give it a title and label it clearly.</a:t>
             </a:r>
             <a:endParaRPr lang="en-US" dirty="0"/>
           </a:p>
@@ -4261,7 +4259,7 @@
           <a:p>
             <a:r>
               <a:rPr lang="en-US" dirty="0"/>
-              <a:t>We continue with Stouffer's Intervening Opportunities. On this slide we have Simplified formula and Example. Write each point on a new line, with the key term first, and explain it in your own words when we revise.</a:t>
+              <a:t>We continue with Stouffer's Intervening Opportunities Model. Copy the point on Formula and example: write the key term first, then its explanation.</a:t>
             </a:r>
             <a:endParaRPr lang="en-US" dirty="0"/>
           </a:p>
@@ -4349,7 +4347,7 @@
           <a:p>
             <a:r>
               <a:rPr lang="en-US" dirty="0"/>
-              <a:t>Let us copy Calculations with the Models. The models are applied as in the following examples. Copy the point on Gravity model on the left, then draw the diagram on the right: a worked example. Give it a title and label it clearly.</a:t>
+              <a:t>Let us copy Calculations Based on the Models. The models are applied as in the following examples. Copy the point on Gravity model on the left, then draw the diagram on the right: a gravity calculation. Give it a title and label it clearly.</a:t>
             </a:r>
             <a:endParaRPr lang="en-US" dirty="0"/>
           </a:p>
@@ -4525,7 +4523,7 @@
           <a:p>
             <a:r>
               <a:rPr lang="en-US" dirty="0"/>
-              <a:t>We continue with Calculations with the Models. On this slide we have Interpretation. Write each point on a new line, with the key term first, and explain it in your own words when we revise.</a:t>
+              <a:t>Copy the point on Stouffer's model on the left, then draw the diagram on the right: a Stouffer calculation. Give it a title and label it clearly.</a:t>
             </a:r>
             <a:endParaRPr lang="en-US" dirty="0"/>
           </a:p>
@@ -4613,7 +4611,7 @@
           <a:p>
             <a:r>
               <a:rPr lang="en-US" dirty="0"/>
-              <a:t>Copy the point on Stouffer's model on the left, then draw the diagram on the right: stouffer's example. Give it a title and label it clearly.</a:t>
+              <a:t>Now let us check what you have understood. Question 1: Give two characteristics of migrants. Answer in your exercise book.</a:t>
             </a:r>
             <a:endParaRPr lang="en-US" dirty="0"/>
           </a:p>
@@ -4701,7 +4699,7 @@
           <a:p>
             <a:r>
               <a:rPr lang="en-US" dirty="0"/>
-              <a:t>We continue with Calculations with the Models. On this slide we have Interpretation. Write each point on a new line, with the key term first, and explain it in your own words when we revise.</a:t>
+              <a:t>The expected answer is: they are mostly young adults, often single, and skilled people migrate more (brain drain) (any two). If you got it right, well done.</a:t>
             </a:r>
             <a:endParaRPr lang="en-US" dirty="0"/>
           </a:p>
@@ -4789,7 +4787,7 @@
           <a:p>
             <a:r>
               <a:rPr lang="en-US" dirty="0"/>
-              <a:t>Now let us check what you have understood. Question 1: Give two characteristics of migrants. Answer in your exercise book.</a:t>
+              <a:t>Now let us check what you have understood. Question 2: State the main difference between the gravity model and Stouffer's model. Answer in your exercise book.</a:t>
             </a:r>
             <a:endParaRPr lang="en-US" dirty="0"/>
           </a:p>
@@ -4877,7 +4875,7 @@
           <a:p>
             <a:r>
               <a:rPr lang="en-US" dirty="0"/>
-              <a:t>The expected answer is: they are mostly young adults, often single, and skilled people migrate more (brain drain) (any two). If you got it right, well done.</a:t>
+              <a:t>The expected answer is: the gravity model uses population and distance; Stouffer uses the opportunities at the destination and on the way. If you got it right, well done.</a:t>
             </a:r>
             <a:endParaRPr lang="en-US" dirty="0"/>
           </a:p>
@@ -4965,7 +4963,7 @@
           <a:p>
             <a:r>
               <a:rPr lang="en-US" dirty="0"/>
-              <a:t>Now let us check what you have understood. Question 2: State the main difference between the gravity model and Stouffer's model. Answer in your exercise book.</a:t>
+              <a:t>For those who need more practice, fill in the blanks in your exercise book. The answers are: number 1, distance; number 2, squared; number 3, intervening.</a:t>
             </a:r>
             <a:endParaRPr lang="en-US" dirty="0"/>
           </a:p>
@@ -5053,7 +5051,7 @@
           <a:p>
             <a:r>
               <a:rPr lang="en-US" dirty="0"/>
-              <a:t>The expected answer is: the gravity model uses population and distance; Stouffer uses the opportunities at the destination and on the way. If you got it right, well done.</a:t>
+              <a:t>For your homework: Define spatial interaction. We shall correct it at the beginning of our next lesson.</a:t>
             </a:r>
             <a:endParaRPr lang="en-US" dirty="0"/>
           </a:p>
@@ -5141,7 +5139,7 @@
           <a:p>
             <a:r>
               <a:rPr lang="en-US" dirty="0"/>
-              <a:t>For those who need more practice, fill in the blanks in your exercise book. The answers are: number 1, distance; number 2, squared; number 3, intervening.</a:t>
+              <a:t>Our next lesson will be on Lesson 14: Spatial Interaction. Thank you for your attention, and see you next time.</a:t>
             </a:r>
             <a:endParaRPr lang="en-US" dirty="0"/>
           </a:p>
@@ -5229,7 +5227,7 @@
           <a:p>
             <a:r>
               <a:rPr lang="en-US" dirty="0"/>
-              <a:t>For your homework: Define spatial interaction. We shall correct it at the beginning of our next lesson.</a:t>
+              <a:t>Let us play the bilingual game. I say a word in English, and you give me the French word. Then we do the reverse.</a:t>
             </a:r>
             <a:endParaRPr lang="en-US" dirty="0"/>
           </a:p>
@@ -5317,7 +5315,7 @@
           <a:p>
             <a:r>
               <a:rPr lang="en-US" dirty="0"/>
-              <a:t>Our next lesson will be on Lesson 14: Spatial Interaction. Thank you for your attention, and see you next time.</a:t>
+              <a:t>I record this information in the official logbook of the class after the lesson.</a:t>
             </a:r>
             <a:endParaRPr lang="en-US" dirty="0"/>
           </a:p>
@@ -5493,7 +5491,7 @@
           <a:p>
             <a:r>
               <a:rPr lang="en-US" dirty="0"/>
-              <a:t>Let us play the bilingual game. I say a word in English, and you give me the French word. Then we do the reverse.</a:t>
+              <a:t>I complete the second page of the logbook: the matter taught, the evaluation, the homework and the attendance.</a:t>
             </a:r>
             <a:endParaRPr lang="en-US" dirty="0"/>
           </a:p>
@@ -5581,7 +5579,7 @@
           <a:p>
             <a:r>
               <a:rPr lang="en-US" dirty="0"/>
-              <a:t>I record this information in the official logbook of the class after the lesson.</a:t>
+              <a:t>This slide is for me, the teacher: it gives the timing of the lesson and what to do if the projector is not available.</a:t>
             </a:r>
             <a:endParaRPr lang="en-US" dirty="0"/>
           </a:p>
@@ -5669,7 +5667,7 @@
           <a:p>
             <a:r>
               <a:rPr lang="en-US" dirty="0"/>
-              <a:t>I complete the second page of the logbook: the matter taught, the evaluation, the homework and the attendance.</a:t>
+              <a:t>These are the references and picture credits used to prepare this lesson.</a:t>
             </a:r>
             <a:endParaRPr lang="en-US" dirty="0"/>
           </a:p>
@@ -5693,182 +5691,6 @@
             <a:fld id="{F7021451-1387-4CA6-816F-3879F97B5CBC}" type="slidenum">
               <a:rPr lang="en-US"/>
               <a:t>62</a:t>
-            </a:fld>
-            <a:endParaRPr lang="en-US"/>
-          </a:p>
-        </p:txBody>
-      </p:sp>
-    </p:spTree>
-    <p:extLst>
-      <p:ext uri="{BB962C8B-B14F-4D97-AF65-F5344CB8AC3E}">
-        <p14:creationId xmlns:p14="http://schemas.microsoft.com/office/powerpoint/2010/main" val="1024086991"/>
-      </p:ext>
-    </p:extLst>
-  </p:cSld>
-  <p:clrMapOvr>
-    <a:masterClrMapping/>
-  </p:clrMapOvr>
-</p:notes>
-</file>
-
-<file path=ppt/notesSlides/notesSlide63.xml><?xml version="1.0" encoding="utf-8"?>
-<p:notes xmlns:a="http://schemas.openxmlformats.org/drawingml/2006/main" xmlns:r="http://schemas.openxmlformats.org/officeDocument/2006/relationships" xmlns:p="http://schemas.openxmlformats.org/presentationml/2006/main">
-  <p:cSld>
-    <p:spTree>
-      <p:nvGrpSpPr>
-        <p:cNvPr id="1" name=""/>
-        <p:cNvGrpSpPr/>
-        <p:nvPr/>
-      </p:nvGrpSpPr>
-      <p:grpSpPr>
-        <a:xfrm>
-          <a:off x="0" y="0"/>
-          <a:ext cx="0" cy="0"/>
-          <a:chOff x="0" y="0"/>
-          <a:chExt cx="0" cy="0"/>
-        </a:xfrm>
-      </p:grpSpPr>
-      <p:sp>
-        <p:nvSpPr>
-          <p:cNvPr id="2" name="Slide Image Placeholder 1"/>
-          <p:cNvSpPr>
-            <a:spLocks noGrp="1" noRot="1" noChangeAspect="1"/>
-          </p:cNvSpPr>
-          <p:nvPr>
-            <p:ph type="sldImg"/>
-          </p:nvPr>
-        </p:nvSpPr>
-        <p:spPr/>
-      </p:sp>
-      <p:sp>
-        <p:nvSpPr>
-          <p:cNvPr id="3" name="Notes Placeholder 2"/>
-          <p:cNvSpPr>
-            <a:spLocks noGrp="1"/>
-          </p:cNvSpPr>
-          <p:nvPr>
-            <p:ph type="body" idx="1"/>
-          </p:nvPr>
-        </p:nvSpPr>
-        <p:spPr/>
-        <p:txBody>
-          <a:bodyPr/>
-          <a:lstStyle/>
-          <a:p>
-            <a:r>
-              <a:rPr lang="en-US" dirty="0"/>
-              <a:t>This slide is for me, the teacher: it gives the timing of the lesson and what to do if the projector is not available.</a:t>
-            </a:r>
-            <a:endParaRPr lang="en-US" dirty="0"/>
-          </a:p>
-        </p:txBody>
-      </p:sp>
-      <p:sp>
-        <p:nvSpPr>
-          <p:cNvPr id="4" name="Slide Number Placeholder 3"/>
-          <p:cNvSpPr>
-            <a:spLocks noGrp="1"/>
-          </p:cNvSpPr>
-          <p:nvPr>
-            <p:ph type="sldNum" sz="quarter" idx="10"/>
-          </p:nvPr>
-        </p:nvSpPr>
-        <p:spPr/>
-        <p:txBody>
-          <a:bodyPr/>
-          <a:lstStyle/>
-          <a:p>
-            <a:fld id="{F7021451-1387-4CA6-816F-3879F97B5CBC}" type="slidenum">
-              <a:rPr lang="en-US"/>
-              <a:t>63</a:t>
-            </a:fld>
-            <a:endParaRPr lang="en-US"/>
-          </a:p>
-        </p:txBody>
-      </p:sp>
-    </p:spTree>
-    <p:extLst>
-      <p:ext uri="{BB962C8B-B14F-4D97-AF65-F5344CB8AC3E}">
-        <p14:creationId xmlns:p14="http://schemas.microsoft.com/office/powerpoint/2010/main" val="1024086991"/>
-      </p:ext>
-    </p:extLst>
-  </p:cSld>
-  <p:clrMapOvr>
-    <a:masterClrMapping/>
-  </p:clrMapOvr>
-</p:notes>
-</file>
-
-<file path=ppt/notesSlides/notesSlide64.xml><?xml version="1.0" encoding="utf-8"?>
-<p:notes xmlns:a="http://schemas.openxmlformats.org/drawingml/2006/main" xmlns:r="http://schemas.openxmlformats.org/officeDocument/2006/relationships" xmlns:p="http://schemas.openxmlformats.org/presentationml/2006/main">
-  <p:cSld>
-    <p:spTree>
-      <p:nvGrpSpPr>
-        <p:cNvPr id="1" name=""/>
-        <p:cNvGrpSpPr/>
-        <p:nvPr/>
-      </p:nvGrpSpPr>
-      <p:grpSpPr>
-        <a:xfrm>
-          <a:off x="0" y="0"/>
-          <a:ext cx="0" cy="0"/>
-          <a:chOff x="0" y="0"/>
-          <a:chExt cx="0" cy="0"/>
-        </a:xfrm>
-      </p:grpSpPr>
-      <p:sp>
-        <p:nvSpPr>
-          <p:cNvPr id="2" name="Slide Image Placeholder 1"/>
-          <p:cNvSpPr>
-            <a:spLocks noGrp="1" noRot="1" noChangeAspect="1"/>
-          </p:cNvSpPr>
-          <p:nvPr>
-            <p:ph type="sldImg"/>
-          </p:nvPr>
-        </p:nvSpPr>
-        <p:spPr/>
-      </p:sp>
-      <p:sp>
-        <p:nvSpPr>
-          <p:cNvPr id="3" name="Notes Placeholder 2"/>
-          <p:cNvSpPr>
-            <a:spLocks noGrp="1"/>
-          </p:cNvSpPr>
-          <p:nvPr>
-            <p:ph type="body" idx="1"/>
-          </p:nvPr>
-        </p:nvSpPr>
-        <p:spPr/>
-        <p:txBody>
-          <a:bodyPr/>
-          <a:lstStyle/>
-          <a:p>
-            <a:r>
-              <a:rPr lang="en-US" dirty="0"/>
-              <a:t>These are the references and picture credits used to prepare this lesson.</a:t>
-            </a:r>
-            <a:endParaRPr lang="en-US" dirty="0"/>
-          </a:p>
-        </p:txBody>
-      </p:sp>
-      <p:sp>
-        <p:nvSpPr>
-          <p:cNvPr id="4" name="Slide Number Placeholder 3"/>
-          <p:cNvSpPr>
-            <a:spLocks noGrp="1"/>
-          </p:cNvSpPr>
-          <p:nvPr>
-            <p:ph type="sldNum" sz="quarter" idx="10"/>
-          </p:nvPr>
-        </p:nvSpPr>
-        <p:spPr/>
-        <p:txBody>
-          <a:bodyPr/>
-          <a:lstStyle/>
-          <a:p>
-            <a:fld id="{F7021451-1387-4CA6-816F-3879F97B5CBC}" type="slidenum">
-              <a:rPr lang="en-US"/>
-              <a:t>64</a:t>
             </a:fld>
             <a:endParaRPr lang="en-US"/>
           </a:p>
@@ -15098,7 +14920,7 @@
         <p:spPr>
           <a:xfrm>
             <a:off x="0" y="658368"/>
-            <a:ext cx="1463040" cy="5833872"/>
+            <a:ext cx="2468880" cy="5833872"/>
           </a:xfrm>
           <a:prstGeom prst="rect">
             <a:avLst/>
@@ -15113,8 +14935,8 @@
         </p:nvSpPr>
         <p:spPr>
           <a:xfrm>
-            <a:off x="1691640" y="1005840"/>
-            <a:ext cx="10180015" cy="731520"/>
+            <a:off x="2697480" y="1005840"/>
+            <a:ext cx="9174175" cy="731520"/>
           </a:xfrm>
           <a:prstGeom prst="rect">
             <a:avLst/>
@@ -15154,8 +14976,8 @@
         </p:nvSpPr>
         <p:spPr>
           <a:xfrm>
-            <a:off x="1691640" y="1783080"/>
-            <a:ext cx="10180015" cy="4663440"/>
+            <a:off x="2697480" y="1783080"/>
+            <a:ext cx="9174175" cy="4663440"/>
           </a:xfrm>
           <a:prstGeom prst="rect">
             <a:avLst/>
@@ -15219,7 +15041,7 @@
                 <a:ea typeface="Times New Roman" pitchFamily="34" charset="-122"/>
                 <a:cs typeface="Times New Roman" pitchFamily="34" charset="-120"/>
               </a:rPr>
-              <a:t>Chain migration: </a:t>
+              <a:t>Laws of migration: </a:t>
             </a:r>
             <a:pPr algn="l" indent="0" marL="0">
               <a:spcAft>
@@ -15236,7 +15058,7 @@
                 <a:ea typeface="Times New Roman" pitchFamily="34" charset="-122"/>
                 <a:cs typeface="Times New Roman" pitchFamily="34" charset="-120"/>
               </a:rPr>
-              <a:t>It is the movement of people to a place where relatives or people of their community are already settled.</a:t>
+              <a:t>They are general rules that describe and predict the volume and direction of migration.</a:t>
             </a:r>
             <a:endParaRPr lang="en-US" sz="4000" dirty="0"/>
           </a:p>
@@ -15590,129 +15412,9 @@
           </a:p>
         </p:txBody>
       </p:sp>
-      <p:sp>
-        <p:nvSpPr>
-          <p:cNvPr id="3" name="Text 1"/>
-          <p:cNvSpPr/>
-          <p:nvPr/>
-        </p:nvSpPr>
-        <p:spPr>
-          <a:xfrm>
-            <a:off x="365760" y="1005840"/>
-            <a:ext cx="11460175" cy="731520"/>
-          </a:xfrm>
-          <a:prstGeom prst="rect">
-            <a:avLst/>
-          </a:prstGeom>
-          <a:noFill/>
-          <a:ln/>
-        </p:spPr>
-        <p:txBody>
-          <a:bodyPr wrap="square" lIns="0" tIns="0" rIns="0" bIns="0" rtlCol="0" anchor="ctr">
-            <a:normAutofit/>
-          </a:bodyPr>
-          <a:lstStyle/>
-          <a:p>
-            <a:pPr algn="ctr" indent="0" marL="0">
-              <a:buNone/>
-            </a:pPr>
-            <a:r>
-              <a:rPr lang="en-US" sz="3600" b="1" dirty="0">
-                <a:solidFill>
-                  <a:srgbClr val="990011"/>
-                </a:solidFill>
-                <a:latin typeface="Times New Roman" pitchFamily="34" charset="0"/>
-                <a:ea typeface="Times New Roman" pitchFamily="34" charset="-122"/>
-                <a:cs typeface="Times New Roman" pitchFamily="34" charset="-120"/>
-              </a:rPr>
-              <a:t>1. Characteristics (Differentials) of Migration</a:t>
-            </a:r>
-            <a:endParaRPr lang="en-US" sz="3600" dirty="0"/>
-          </a:p>
-        </p:txBody>
-      </p:sp>
-      <p:sp>
-        <p:nvSpPr>
-          <p:cNvPr id="4" name="Text 2"/>
-          <p:cNvSpPr/>
-          <p:nvPr/>
-        </p:nvSpPr>
-        <p:spPr>
-          <a:xfrm>
-            <a:off x="365760" y="1783080"/>
-            <a:ext cx="4846320" cy="4617720"/>
-          </a:xfrm>
-          <a:prstGeom prst="rect">
-            <a:avLst/>
-          </a:prstGeom>
-          <a:noFill/>
-          <a:ln/>
-        </p:spPr>
-        <p:txBody>
-          <a:bodyPr wrap="square" lIns="0" tIns="0" rIns="0" bIns="0" rtlCol="0" anchor="t"/>
-          <a:lstStyle/>
-          <a:p>
-            <a:pPr algn="l" indent="0" marL="0">
-              <a:spcAft>
-                <a:spcPts val="800"/>
-              </a:spcAft>
-              <a:buNone/>
-            </a:pPr>
-            <a:r>
-              <a:rPr lang="en-US" sz="3400" i="1" dirty="0">
-                <a:solidFill>
-                  <a:srgbClr val="111111"/>
-                </a:solidFill>
-                <a:latin typeface="Times New Roman" pitchFamily="34" charset="0"/>
-                <a:ea typeface="Times New Roman" pitchFamily="34" charset="-122"/>
-                <a:cs typeface="Times New Roman" pitchFamily="34" charset="-120"/>
-              </a:rPr>
-              <a:t>The characteristics of migrants are the following:</a:t>
-            </a:r>
-            <a:endParaRPr lang="en-US" sz="3400" dirty="0"/>
-          </a:p>
-          <a:p>
-            <a:pPr algn="l" indent="0" marL="0">
-              <a:spcAft>
-                <a:spcPts val="800"/>
-              </a:spcAft>
-              <a:buNone/>
-            </a:pPr>
-            <a:r>
-              <a:rPr lang="en-US" sz="3400" b="1" dirty="0">
-                <a:solidFill>
-                  <a:srgbClr val="111111"/>
-                </a:solidFill>
-                <a:latin typeface="Times New Roman" pitchFamily="34" charset="0"/>
-                <a:ea typeface="Times New Roman" pitchFamily="34" charset="-122"/>
-                <a:cs typeface="Times New Roman" pitchFamily="34" charset="-120"/>
-              </a:rPr>
-              <a:t>Age: </a:t>
-            </a:r>
-            <a:pPr algn="l" indent="0" marL="0">
-              <a:spcAft>
-                <a:spcPts val="800"/>
-              </a:spcAft>
-              <a:buNone/>
-            </a:pPr>
-            <a:r>
-              <a:rPr lang="en-US" sz="3400" dirty="0">
-                <a:solidFill>
-                  <a:srgbClr val="111111"/>
-                </a:solidFill>
-                <a:latin typeface="Times New Roman" pitchFamily="34" charset="0"/>
-                <a:ea typeface="Times New Roman" pitchFamily="34" charset="-122"/>
-                <a:cs typeface="Times New Roman" pitchFamily="34" charset="-120"/>
-              </a:rPr>
-              <a:t>Young adults (18–35 years) migrate most, for studies, first jobs and because they have few family responsibilities.</a:t>
-            </a:r>
-            <a:endParaRPr lang="en-US" sz="3400" dirty="0"/>
-          </a:p>
-        </p:txBody>
-      </p:sp>
       <p:pic>
         <p:nvPicPr>
-          <p:cNvPr id="5" name="Image 0" descr="/home/claude/f4/img/v2/pop2_selectivity.png">    </p:cNvPr>
+          <p:cNvPr id="3" name="Image 0" descr="/home/claude/f4/img/minesec_sheet.png">    </p:cNvPr>
           <p:cNvPicPr>
             <a:picLocks noChangeAspect="1"/>
           </p:cNvPicPr>
@@ -15726,8 +15428,8 @@
         </p:blipFill>
         <p:spPr>
           <a:xfrm>
-            <a:off x="5349240" y="2617506"/>
-            <a:ext cx="6659575" cy="2601397"/>
+            <a:off x="0" y="658368"/>
+            <a:ext cx="1463040" cy="5833872"/>
           </a:xfrm>
           <a:prstGeom prst="rect">
             <a:avLst/>
@@ -15736,14 +15438,14 @@
       </p:pic>
       <p:sp>
         <p:nvSpPr>
-          <p:cNvPr id="6" name="Text 3"/>
+          <p:cNvPr id="4" name="Text 1"/>
           <p:cNvSpPr/>
           <p:nvPr/>
         </p:nvSpPr>
         <p:spPr>
           <a:xfrm>
-            <a:off x="5349240" y="6089904"/>
-            <a:ext cx="6659575" cy="347472"/>
+            <a:off x="1691640" y="1005840"/>
+            <a:ext cx="10180015" cy="731520"/>
           </a:xfrm>
           <a:prstGeom prst="rect">
             <a:avLst/>
@@ -15752,24 +15454,105 @@
           <a:ln/>
         </p:spPr>
         <p:txBody>
-          <a:bodyPr wrap="square" lIns="0" tIns="0" rIns="0" bIns="0" rtlCol="0" anchor="ctr"/>
+          <a:bodyPr wrap="square" lIns="0" tIns="0" rIns="0" bIns="0" rtlCol="0" anchor="ctr">
+            <a:normAutofit/>
+          </a:bodyPr>
           <a:lstStyle/>
           <a:p>
             <a:pPr algn="ctr" indent="0" marL="0">
               <a:buNone/>
             </a:pPr>
             <a:r>
-              <a:rPr lang="en-US" sz="1600" i="1" dirty="0">
-                <a:solidFill>
-                  <a:srgbClr val="555555"/>
+              <a:rPr lang="en-US" sz="3600" b="1" dirty="0">
+                <a:solidFill>
+                  <a:srgbClr val="990011"/>
                 </a:solidFill>
                 <a:latin typeface="Times New Roman" pitchFamily="34" charset="0"/>
                 <a:ea typeface="Times New Roman" pitchFamily="34" charset="-122"/>
                 <a:cs typeface="Times New Roman" pitchFamily="34" charset="-120"/>
               </a:rPr>
-              <a:t>Illustration: who migrates</a:t>
-            </a:r>
-            <a:endParaRPr lang="en-US" sz="1600" dirty="0"/>
+              <a:t>1. Meaning and Volume of Migration</a:t>
+            </a:r>
+            <a:endParaRPr lang="en-US" sz="3600" dirty="0"/>
+          </a:p>
+        </p:txBody>
+      </p:sp>
+      <p:sp>
+        <p:nvSpPr>
+          <p:cNvPr id="5" name="Text 2"/>
+          <p:cNvSpPr/>
+          <p:nvPr/>
+        </p:nvSpPr>
+        <p:spPr>
+          <a:xfrm>
+            <a:off x="1691640" y="1783080"/>
+            <a:ext cx="10180015" cy="4663440"/>
+          </a:xfrm>
+          <a:prstGeom prst="rect">
+            <a:avLst/>
+          </a:prstGeom>
+          <a:noFill/>
+          <a:ln/>
+        </p:spPr>
+        <p:txBody>
+          <a:bodyPr wrap="square" lIns="0" tIns="0" rIns="0" bIns="0" rtlCol="0" anchor="t"/>
+          <a:lstStyle/>
+          <a:p>
+            <a:pPr algn="l" indent="0" marL="0">
+              <a:spcAft>
+                <a:spcPts val="800"/>
+              </a:spcAft>
+              <a:buNone/>
+            </a:pPr>
+            <a:r>
+              <a:rPr lang="en-US" sz="4000" i="1" dirty="0">
+                <a:solidFill>
+                  <a:srgbClr val="111111"/>
+                </a:solidFill>
+                <a:latin typeface="Times New Roman" pitchFamily="34" charset="0"/>
+                <a:ea typeface="Times New Roman" pitchFamily="34" charset="-122"/>
+                <a:cs typeface="Times New Roman" pitchFamily="34" charset="-120"/>
+              </a:rPr>
+              <a:t>Migration and its volume are explained as follows:</a:t>
+            </a:r>
+            <a:endParaRPr lang="en-US" sz="4000" dirty="0"/>
+          </a:p>
+          <a:p>
+            <a:pPr algn="l" indent="0" marL="0">
+              <a:spcAft>
+                <a:spcPts val="800"/>
+              </a:spcAft>
+              <a:buNone/>
+            </a:pPr>
+            <a:r>
+              <a:rPr lang="en-US" sz="4000" b="1" dirty="0">
+                <a:solidFill>
+                  <a:srgbClr val="111111"/>
+                </a:solidFill>
+                <a:latin typeface="Times New Roman" pitchFamily="34" charset="0"/>
+                <a:ea typeface="Times New Roman" pitchFamily="34" charset="-122"/>
+                <a:cs typeface="Times New Roman" pitchFamily="34" charset="-120"/>
+              </a:rPr>
+              <a:t>Meaning: </a:t>
+            </a:r>
+            <a:pPr algn="l" indent="0" marL="0">
+              <a:spcAft>
+                <a:spcPts val="800"/>
+              </a:spcAft>
+              <a:buNone/>
+            </a:pPr>
+            <a:r>
+              <a:rPr lang="en-US" sz="4000" dirty="0">
+                <a:solidFill>
+                  <a:srgbClr val="111111"/>
+                </a:solidFill>
+                <a:latin typeface="Times New Roman" pitchFamily="34" charset="0"/>
+                <a:ea typeface="Times New Roman" pitchFamily="34" charset="-122"/>
+                <a:cs typeface="Times New Roman" pitchFamily="34" charset="-120"/>
+              </a:rPr>
+              <a:t>Migration is a change of residence from one place to another, inside a country or across a border. Short trips, such as visits or commuting, are not migration because people do not change their home.</a:t>
+            </a:r>
+            <a:endParaRPr lang="en-US" sz="4000" dirty="0"/>
           </a:p>
         </p:txBody>
       </p:sp>
@@ -16141,7 +15924,7 @@
         <p:spPr>
           <a:xfrm>
             <a:off x="0" y="658368"/>
-            <a:ext cx="5120640" cy="5833872"/>
+            <a:ext cx="2468880" cy="5833872"/>
           </a:xfrm>
           <a:prstGeom prst="rect">
             <a:avLst/>
@@ -16156,8 +15939,8 @@
         </p:nvSpPr>
         <p:spPr>
           <a:xfrm>
-            <a:off x="5349240" y="1005840"/>
-            <a:ext cx="6522415" cy="731520"/>
+            <a:off x="2697480" y="1005840"/>
+            <a:ext cx="9174175" cy="731520"/>
           </a:xfrm>
           <a:prstGeom prst="rect">
             <a:avLst/>
@@ -16183,7 +15966,7 @@
                 <a:ea typeface="Times New Roman" pitchFamily="34" charset="-122"/>
                 <a:cs typeface="Times New Roman" pitchFamily="34" charset="-120"/>
               </a:rPr>
-              <a:t>1. Characteristics (Differentials) of Migration</a:t>
+              <a:t>1. Meaning and Volume of Migration</a:t>
             </a:r>
             <a:endParaRPr lang="en-US" sz="3600" dirty="0"/>
           </a:p>
@@ -16197,8 +15980,8 @@
         </p:nvSpPr>
         <p:spPr>
           <a:xfrm>
-            <a:off x="5349240" y="1783080"/>
-            <a:ext cx="6522415" cy="4663440"/>
+            <a:off x="2697480" y="1783080"/>
+            <a:ext cx="9174175" cy="4663440"/>
           </a:xfrm>
           <a:prstGeom prst="rect">
             <a:avLst/>
@@ -16225,7 +16008,7 @@
                 <a:ea typeface="Times New Roman" pitchFamily="34" charset="-122"/>
                 <a:cs typeface="Times New Roman" pitchFamily="34" charset="-120"/>
               </a:rPr>
-              <a:t>Sex: </a:t>
+              <a:t>Volume of migration: </a:t>
             </a:r>
             <a:pPr algn="l" indent="0" marL="0">
               <a:spcAft>
@@ -16242,7 +16025,7 @@
                 <a:ea typeface="Times New Roman" pitchFamily="34" charset="-122"/>
                 <a:cs typeface="Times New Roman" pitchFamily="34" charset="-120"/>
               </a:rPr>
-              <a:t>Men often migrate for manual work, as South Asian workers in the Gulf, while many women migrate as professionals, like Filipino nurses in the UK and Canada.</a:t>
+              <a:t>The volume is the number of people who move between two places in a given period. It is large when the differences in jobs and wages between places are great and when the obstacles, such as distance and borders, are small.</a:t>
             </a:r>
             <a:endParaRPr lang="en-US" sz="4000" dirty="0"/>
           </a:p>
@@ -16360,9 +16143,129 @@
           </a:p>
         </p:txBody>
       </p:sp>
+      <p:sp>
+        <p:nvSpPr>
+          <p:cNvPr id="3" name="Text 1"/>
+          <p:cNvSpPr/>
+          <p:nvPr/>
+        </p:nvSpPr>
+        <p:spPr>
+          <a:xfrm>
+            <a:off x="365760" y="1005840"/>
+            <a:ext cx="11460175" cy="731520"/>
+          </a:xfrm>
+          <a:prstGeom prst="rect">
+            <a:avLst/>
+          </a:prstGeom>
+          <a:noFill/>
+          <a:ln/>
+        </p:spPr>
+        <p:txBody>
+          <a:bodyPr wrap="square" lIns="0" tIns="0" rIns="0" bIns="0" rtlCol="0" anchor="ctr">
+            <a:normAutofit/>
+          </a:bodyPr>
+          <a:lstStyle/>
+          <a:p>
+            <a:pPr algn="ctr" indent="0" marL="0">
+              <a:buNone/>
+            </a:pPr>
+            <a:r>
+              <a:rPr lang="en-US" sz="3600" b="1" dirty="0">
+                <a:solidFill>
+                  <a:srgbClr val="990011"/>
+                </a:solidFill>
+                <a:latin typeface="Times New Roman" pitchFamily="34" charset="0"/>
+                <a:ea typeface="Times New Roman" pitchFamily="34" charset="-122"/>
+                <a:cs typeface="Times New Roman" pitchFamily="34" charset="-120"/>
+              </a:rPr>
+              <a:t>2. Characteristics (Differentials) of Migration</a:t>
+            </a:r>
+            <a:endParaRPr lang="en-US" sz="3600" dirty="0"/>
+          </a:p>
+        </p:txBody>
+      </p:sp>
+      <p:sp>
+        <p:nvSpPr>
+          <p:cNvPr id="4" name="Text 2"/>
+          <p:cNvSpPr/>
+          <p:nvPr/>
+        </p:nvSpPr>
+        <p:spPr>
+          <a:xfrm>
+            <a:off x="365760" y="1783080"/>
+            <a:ext cx="6035040" cy="4617720"/>
+          </a:xfrm>
+          <a:prstGeom prst="rect">
+            <a:avLst/>
+          </a:prstGeom>
+          <a:noFill/>
+          <a:ln/>
+        </p:spPr>
+        <p:txBody>
+          <a:bodyPr wrap="square" lIns="0" tIns="0" rIns="0" bIns="0" rtlCol="0" anchor="t"/>
+          <a:lstStyle/>
+          <a:p>
+            <a:pPr algn="l" indent="0" marL="0">
+              <a:spcAft>
+                <a:spcPts val="800"/>
+              </a:spcAft>
+              <a:buNone/>
+            </a:pPr>
+            <a:r>
+              <a:rPr lang="en-US" sz="3600" i="1" dirty="0">
+                <a:solidFill>
+                  <a:srgbClr val="111111"/>
+                </a:solidFill>
+                <a:latin typeface="Times New Roman" pitchFamily="34" charset="0"/>
+                <a:ea typeface="Times New Roman" pitchFamily="34" charset="-122"/>
+                <a:cs typeface="Times New Roman" pitchFamily="34" charset="-120"/>
+              </a:rPr>
+              <a:t>Migrants are selected by the following characteristics:</a:t>
+            </a:r>
+            <a:endParaRPr lang="en-US" sz="3600" dirty="0"/>
+          </a:p>
+          <a:p>
+            <a:pPr algn="l" indent="0" marL="0">
+              <a:spcAft>
+                <a:spcPts val="800"/>
+              </a:spcAft>
+              <a:buNone/>
+            </a:pPr>
+            <a:r>
+              <a:rPr lang="en-US" sz="3600" b="1" dirty="0">
+                <a:solidFill>
+                  <a:srgbClr val="111111"/>
+                </a:solidFill>
+                <a:latin typeface="Times New Roman" pitchFamily="34" charset="0"/>
+                <a:ea typeface="Times New Roman" pitchFamily="34" charset="-122"/>
+                <a:cs typeface="Times New Roman" pitchFamily="34" charset="-120"/>
+              </a:rPr>
+              <a:t>Age: </a:t>
+            </a:r>
+            <a:pPr algn="l" indent="0" marL="0">
+              <a:spcAft>
+                <a:spcPts val="800"/>
+              </a:spcAft>
+              <a:buNone/>
+            </a:pPr>
+            <a:r>
+              <a:rPr lang="en-US" sz="3600" dirty="0">
+                <a:solidFill>
+                  <a:srgbClr val="111111"/>
+                </a:solidFill>
+                <a:latin typeface="Times New Roman" pitchFamily="34" charset="0"/>
+                <a:ea typeface="Times New Roman" pitchFamily="34" charset="-122"/>
+                <a:cs typeface="Times New Roman" pitchFamily="34" charset="-120"/>
+              </a:rPr>
+              <a:t>Young adults of 18 to 35 years migrate most, for studies and first jobs. They also have few family responsibilities.</a:t>
+            </a:r>
+            <a:endParaRPr lang="en-US" sz="3600" dirty="0"/>
+          </a:p>
+        </p:txBody>
+      </p:sp>
       <p:pic>
         <p:nvPicPr>
-          <p:cNvPr id="3" name="Image 0" descr="/home/claude/f4/img/minesec_sheet.png">    </p:cNvPr>
+          <p:cNvPr id="5" name="Image 0" descr="/home/claude/f4/img/v2/pop2_selectivity.png">    </p:cNvPr>
           <p:cNvPicPr>
             <a:picLocks noChangeAspect="1"/>
           </p:cNvPicPr>
@@ -16376,8 +16279,8 @@
         </p:blipFill>
         <p:spPr>
           <a:xfrm>
-            <a:off x="0" y="658368"/>
-            <a:ext cx="1463040" cy="5833872"/>
+            <a:off x="6537960" y="2849678"/>
+            <a:ext cx="5470855" cy="2137053"/>
           </a:xfrm>
           <a:prstGeom prst="rect">
             <a:avLst/>
@@ -16386,14 +16289,14 @@
       </p:pic>
       <p:sp>
         <p:nvSpPr>
-          <p:cNvPr id="4" name="Text 1"/>
+          <p:cNvPr id="6" name="Text 3"/>
           <p:cNvSpPr/>
           <p:nvPr/>
         </p:nvSpPr>
         <p:spPr>
           <a:xfrm>
-            <a:off x="1691640" y="1005840"/>
-            <a:ext cx="10180015" cy="731520"/>
+            <a:off x="6537960" y="6089904"/>
+            <a:ext cx="5470855" cy="347472"/>
           </a:xfrm>
           <a:prstGeom prst="rect">
             <a:avLst/>
@@ -16402,122 +16305,24 @@
           <a:ln/>
         </p:spPr>
         <p:txBody>
-          <a:bodyPr wrap="square" lIns="0" tIns="0" rIns="0" bIns="0" rtlCol="0" anchor="ctr">
-            <a:normAutofit/>
-          </a:bodyPr>
+          <a:bodyPr wrap="square" lIns="0" tIns="0" rIns="0" bIns="0" rtlCol="0" anchor="ctr"/>
           <a:lstStyle/>
           <a:p>
             <a:pPr algn="ctr" indent="0" marL="0">
               <a:buNone/>
             </a:pPr>
             <a:r>
-              <a:rPr lang="en-US" sz="3600" b="1" dirty="0">
-                <a:solidFill>
-                  <a:srgbClr val="990011"/>
+              <a:rPr lang="en-US" sz="1600" i="1" dirty="0">
+                <a:solidFill>
+                  <a:srgbClr val="555555"/>
                 </a:solidFill>
                 <a:latin typeface="Times New Roman" pitchFamily="34" charset="0"/>
                 <a:ea typeface="Times New Roman" pitchFamily="34" charset="-122"/>
                 <a:cs typeface="Times New Roman" pitchFamily="34" charset="-120"/>
               </a:rPr>
-              <a:t>1. Characteristics (Differentials) of Migration (continued)</a:t>
-            </a:r>
-            <a:endParaRPr lang="en-US" sz="3600" dirty="0"/>
-          </a:p>
-        </p:txBody>
-      </p:sp>
-      <p:sp>
-        <p:nvSpPr>
-          <p:cNvPr id="5" name="Text 2"/>
-          <p:cNvSpPr/>
-          <p:nvPr/>
-        </p:nvSpPr>
-        <p:spPr>
-          <a:xfrm>
-            <a:off x="1691640" y="1783080"/>
-            <a:ext cx="10180015" cy="4663440"/>
-          </a:xfrm>
-          <a:prstGeom prst="rect">
-            <a:avLst/>
-          </a:prstGeom>
-          <a:noFill/>
-          <a:ln/>
-        </p:spPr>
-        <p:txBody>
-          <a:bodyPr wrap="square" lIns="0" tIns="0" rIns="0" bIns="0" rtlCol="0" anchor="t"/>
-          <a:lstStyle/>
-          <a:p>
-            <a:pPr algn="l" indent="0" marL="0">
-              <a:spcAft>
-                <a:spcPts val="800"/>
-              </a:spcAft>
-              <a:buNone/>
-            </a:pPr>
-            <a:r>
-              <a:rPr lang="en-US" sz="4000" b="1" dirty="0">
-                <a:solidFill>
-                  <a:srgbClr val="111111"/>
-                </a:solidFill>
-                <a:latin typeface="Times New Roman" pitchFamily="34" charset="0"/>
-                <a:ea typeface="Times New Roman" pitchFamily="34" charset="-122"/>
-                <a:cs typeface="Times New Roman" pitchFamily="34" charset="-120"/>
-              </a:rPr>
-              <a:t>Skills and education: </a:t>
-            </a:r>
-            <a:pPr algn="l" indent="0" marL="0">
-              <a:spcAft>
-                <a:spcPts val="800"/>
-              </a:spcAft>
-              <a:buNone/>
-            </a:pPr>
-            <a:r>
-              <a:rPr lang="en-US" sz="4000" dirty="0">
-                <a:solidFill>
-                  <a:srgbClr val="111111"/>
-                </a:solidFill>
-                <a:latin typeface="Times New Roman" pitchFamily="34" charset="0"/>
-                <a:ea typeface="Times New Roman" pitchFamily="34" charset="-122"/>
-                <a:cs typeface="Times New Roman" pitchFamily="34" charset="-120"/>
-              </a:rPr>
-              <a:t>Doctors and engineers leave poor countries for rich ones (brain drain), while unskilled workers fill jobs in farming and building.</a:t>
-            </a:r>
-            <a:endParaRPr lang="en-US" sz="4000" dirty="0"/>
-          </a:p>
-          <a:p>
-            <a:pPr algn="l" indent="0" marL="0">
-              <a:spcAft>
-                <a:spcPts val="800"/>
-              </a:spcAft>
-              <a:buNone/>
-            </a:pPr>
-            <a:r>
-              <a:rPr lang="en-US" sz="4000" b="1" dirty="0">
-                <a:solidFill>
-                  <a:srgbClr val="111111"/>
-                </a:solidFill>
-                <a:latin typeface="Times New Roman" pitchFamily="34" charset="0"/>
-                <a:ea typeface="Times New Roman" pitchFamily="34" charset="-122"/>
-                <a:cs typeface="Times New Roman" pitchFamily="34" charset="-120"/>
-              </a:rPr>
-              <a:t>Marital status: </a:t>
-            </a:r>
-            <a:pPr algn="l" indent="0" marL="0">
-              <a:spcAft>
-                <a:spcPts val="800"/>
-              </a:spcAft>
-              <a:buNone/>
-            </a:pPr>
-            <a:r>
-              <a:rPr lang="en-US" sz="4000" dirty="0">
-                <a:solidFill>
-                  <a:srgbClr val="111111"/>
-                </a:solidFill>
-                <a:latin typeface="Times New Roman" pitchFamily="34" charset="0"/>
-                <a:ea typeface="Times New Roman" pitchFamily="34" charset="-122"/>
-                <a:cs typeface="Times New Roman" pitchFamily="34" charset="-120"/>
-              </a:rPr>
-              <a:t>Single people move more easily than married people with children.</a:t>
-            </a:r>
-            <a:endParaRPr lang="en-US" sz="4000" dirty="0"/>
+              <a:t>Illustration: the selectivity of migration</a:t>
+            </a:r>
+            <a:endParaRPr lang="en-US" sz="1600" dirty="0"/>
           </a:p>
         </p:txBody>
       </p:sp>
@@ -16692,7 +16497,7 @@
                 <a:ea typeface="Times New Roman" pitchFamily="34" charset="-122"/>
                 <a:cs typeface="Times New Roman" pitchFamily="34" charset="-120"/>
               </a:rPr>
-              <a:t>1. Characteristics (Differentials) of Migration (continued)</a:t>
+              <a:t>2. Characteristics (Differentials) of Migration</a:t>
             </a:r>
             <a:endParaRPr lang="en-US" sz="3600" dirty="0"/>
           </a:p>
@@ -16734,7 +16539,7 @@
                 <a:ea typeface="Times New Roman" pitchFamily="34" charset="-122"/>
                 <a:cs typeface="Times New Roman" pitchFamily="34" charset="-120"/>
               </a:rPr>
-              <a:t>Ethnic or national group: </a:t>
+              <a:t>Sex: </a:t>
             </a:r>
             <a:pPr algn="l" indent="0" marL="0">
               <a:spcAft>
@@ -16751,7 +16556,7 @@
                 <a:ea typeface="Times New Roman" pitchFamily="34" charset="-122"/>
                 <a:cs typeface="Times New Roman" pitchFamily="34" charset="-120"/>
               </a:rPr>
-              <a:t>Chain migration leads people to their own community, like the Turks in Germany, and whole groups may flee as refugees.</a:t>
+              <a:t>Men often migrate for manual work, as South Asian workers in the Gulf countries. Many women migrate as professionals, like Filipino nurses in the United Kingdom and Canada.</a:t>
             </a:r>
             <a:endParaRPr lang="en-US" sz="4000" dirty="0"/>
           </a:p>
@@ -16869,170 +16674,9 @@
           </a:p>
         </p:txBody>
       </p:sp>
-      <p:sp>
-        <p:nvSpPr>
-          <p:cNvPr id="3" name="Text 1"/>
-          <p:cNvSpPr/>
-          <p:nvPr/>
-        </p:nvSpPr>
-        <p:spPr>
-          <a:xfrm>
-            <a:off x="365760" y="1005840"/>
-            <a:ext cx="11460175" cy="731520"/>
-          </a:xfrm>
-          <a:prstGeom prst="rect">
-            <a:avLst/>
-          </a:prstGeom>
-          <a:noFill/>
-          <a:ln/>
-        </p:spPr>
-        <p:txBody>
-          <a:bodyPr wrap="square" lIns="0" tIns="0" rIns="0" bIns="0" rtlCol="0" anchor="ctr">
-            <a:normAutofit/>
-          </a:bodyPr>
-          <a:lstStyle/>
-          <a:p>
-            <a:pPr algn="ctr" indent="0" marL="0">
-              <a:buNone/>
-            </a:pPr>
-            <a:r>
-              <a:rPr lang="en-US" sz="3600" b="1" dirty="0">
-                <a:solidFill>
-                  <a:srgbClr val="990011"/>
-                </a:solidFill>
-                <a:latin typeface="Times New Roman" pitchFamily="34" charset="0"/>
-                <a:ea typeface="Times New Roman" pitchFamily="34" charset="-122"/>
-                <a:cs typeface="Times New Roman" pitchFamily="34" charset="-120"/>
-              </a:rPr>
-              <a:t>2. Laws and Models of Migration</a:t>
-            </a:r>
-            <a:endParaRPr lang="en-US" sz="3600" dirty="0"/>
-          </a:p>
-        </p:txBody>
-      </p:sp>
-      <p:sp>
-        <p:nvSpPr>
-          <p:cNvPr id="4" name="Text 2"/>
-          <p:cNvSpPr/>
-          <p:nvPr/>
-        </p:nvSpPr>
-        <p:spPr>
-          <a:xfrm>
-            <a:off x="365760" y="1737360"/>
-            <a:ext cx="5120640" cy="457200"/>
-          </a:xfrm>
-          <a:prstGeom prst="rect">
-            <a:avLst/>
-          </a:prstGeom>
-          <a:noFill/>
-          <a:ln/>
-        </p:spPr>
-        <p:txBody>
-          <a:bodyPr wrap="square" lIns="0" tIns="0" rIns="0" bIns="0" rtlCol="0" anchor="ctr">
-            <a:normAutofit/>
-          </a:bodyPr>
-          <a:lstStyle/>
-          <a:p>
-            <a:pPr algn="l" indent="0" marL="0">
-              <a:buNone/>
-            </a:pPr>
-            <a:r>
-              <a:rPr lang="en-US" sz="3000" b="1" dirty="0">
-                <a:solidFill>
-                  <a:srgbClr val="990011"/>
-                </a:solidFill>
-                <a:latin typeface="Times New Roman" pitchFamily="34" charset="0"/>
-                <a:ea typeface="Times New Roman" pitchFamily="34" charset="-122"/>
-                <a:cs typeface="Times New Roman" pitchFamily="34" charset="-120"/>
-              </a:rPr>
-              <a:t>A) Zipf and the Gravity Model</a:t>
-            </a:r>
-            <a:endParaRPr lang="en-US" sz="3000" dirty="0"/>
-          </a:p>
-        </p:txBody>
-      </p:sp>
-      <p:sp>
-        <p:nvSpPr>
-          <p:cNvPr id="5" name="Text 3"/>
-          <p:cNvSpPr/>
-          <p:nvPr/>
-        </p:nvSpPr>
-        <p:spPr>
-          <a:xfrm>
-            <a:off x="365760" y="2240280"/>
-            <a:ext cx="4846320" cy="4160520"/>
-          </a:xfrm>
-          <a:prstGeom prst="rect">
-            <a:avLst/>
-          </a:prstGeom>
-          <a:noFill/>
-          <a:ln/>
-        </p:spPr>
-        <p:txBody>
-          <a:bodyPr wrap="square" lIns="0" tIns="0" rIns="0" bIns="0" rtlCol="0" anchor="t"/>
-          <a:lstStyle/>
-          <a:p>
-            <a:pPr algn="l" indent="0" marL="0">
-              <a:spcAft>
-                <a:spcPts val="800"/>
-              </a:spcAft>
-              <a:buNone/>
-            </a:pPr>
-            <a:r>
-              <a:rPr lang="en-US" sz="2800" i="1" dirty="0">
-                <a:solidFill>
-                  <a:srgbClr val="111111"/>
-                </a:solidFill>
-                <a:latin typeface="Times New Roman" pitchFamily="34" charset="0"/>
-                <a:ea typeface="Times New Roman" pitchFamily="34" charset="-122"/>
-                <a:cs typeface="Times New Roman" pitchFamily="34" charset="-120"/>
-              </a:rPr>
-              <a:t>Zipf's law and the gravity model are presented as follows:</a:t>
-            </a:r>
-            <a:endParaRPr lang="en-US" sz="2800" dirty="0"/>
-          </a:p>
-          <a:p>
-            <a:pPr algn="l" indent="0" marL="0">
-              <a:spcAft>
-                <a:spcPts val="800"/>
-              </a:spcAft>
-              <a:buNone/>
-            </a:pPr>
-            <a:r>
-              <a:rPr lang="en-US" sz="2800" b="1" dirty="0">
-                <a:solidFill>
-                  <a:srgbClr val="111111"/>
-                </a:solidFill>
-                <a:latin typeface="Times New Roman" pitchFamily="34" charset="0"/>
-                <a:ea typeface="Times New Roman" pitchFamily="34" charset="-122"/>
-                <a:cs typeface="Times New Roman" pitchFamily="34" charset="-120"/>
-              </a:rPr>
-              <a:t>Zipf's inverse distance law: </a:t>
-            </a:r>
-            <a:pPr algn="l" indent="0" marL="0">
-              <a:spcAft>
-                <a:spcPts val="800"/>
-              </a:spcAft>
-              <a:buNone/>
-            </a:pPr>
-            <a:r>
-              <a:rPr lang="en-US" sz="2800" dirty="0">
-                <a:solidFill>
-                  <a:srgbClr val="111111"/>
-                </a:solidFill>
-                <a:latin typeface="Times New Roman" pitchFamily="34" charset="0"/>
-                <a:ea typeface="Times New Roman" pitchFamily="34" charset="-122"/>
-                <a:cs typeface="Times New Roman" pitchFamily="34" charset="-120"/>
-              </a:rPr>
-              <a:t>The number of migrants between two places is inversely proportional to the distance between them: M ∝ 1 ÷ d.</a:t>
-            </a:r>
-            <a:endParaRPr lang="en-US" sz="2800" dirty="0"/>
-          </a:p>
-        </p:txBody>
-      </p:sp>
       <p:pic>
         <p:nvPicPr>
-          <p:cNvPr id="6" name="Image 0" descr="/home/claude/f4/img/v2/zipf_big.png">    </p:cNvPr>
+          <p:cNvPr id="3" name="Image 0" descr="/home/claude/f4/img/minesec_sheet.png">    </p:cNvPr>
           <p:cNvPicPr>
             <a:picLocks noChangeAspect="1"/>
           </p:cNvPicPr>
@@ -17046,8 +16690,8 @@
         </p:blipFill>
         <p:spPr>
           <a:xfrm>
-            <a:off x="5349240" y="2461422"/>
-            <a:ext cx="6659575" cy="2913564"/>
+            <a:off x="0" y="658368"/>
+            <a:ext cx="5120640" cy="5833872"/>
           </a:xfrm>
           <a:prstGeom prst="rect">
             <a:avLst/>
@@ -17056,14 +16700,14 @@
       </p:pic>
       <p:sp>
         <p:nvSpPr>
-          <p:cNvPr id="7" name="Text 4"/>
+          <p:cNvPr id="4" name="Text 1"/>
           <p:cNvSpPr/>
           <p:nvPr/>
         </p:nvSpPr>
         <p:spPr>
           <a:xfrm>
-            <a:off x="5349240" y="6089904"/>
-            <a:ext cx="6659575" cy="347472"/>
+            <a:off x="5349240" y="1005840"/>
+            <a:ext cx="6522415" cy="731520"/>
           </a:xfrm>
           <a:prstGeom prst="rect">
             <a:avLst/>
@@ -17072,24 +16716,85 @@
           <a:ln/>
         </p:spPr>
         <p:txBody>
-          <a:bodyPr wrap="square" lIns="0" tIns="0" rIns="0" bIns="0" rtlCol="0" anchor="ctr"/>
+          <a:bodyPr wrap="square" lIns="0" tIns="0" rIns="0" bIns="0" rtlCol="0" anchor="ctr">
+            <a:normAutofit/>
+          </a:bodyPr>
           <a:lstStyle/>
           <a:p>
             <a:pPr algn="ctr" indent="0" marL="0">
               <a:buNone/>
             </a:pPr>
             <a:r>
-              <a:rPr lang="en-US" sz="1600" i="1" dirty="0">
-                <a:solidFill>
-                  <a:srgbClr val="555555"/>
+              <a:rPr lang="en-US" sz="3600" b="1" dirty="0">
+                <a:solidFill>
+                  <a:srgbClr val="990011"/>
                 </a:solidFill>
                 <a:latin typeface="Times New Roman" pitchFamily="34" charset="0"/>
                 <a:ea typeface="Times New Roman" pitchFamily="34" charset="-122"/>
                 <a:cs typeface="Times New Roman" pitchFamily="34" charset="-120"/>
               </a:rPr>
-              <a:t>Illustration: migrants and distance</a:t>
-            </a:r>
-            <a:endParaRPr lang="en-US" sz="1600" dirty="0"/>
+              <a:t>2. Characteristics (Differentials) of Migration</a:t>
+            </a:r>
+            <a:endParaRPr lang="en-US" sz="3600" dirty="0"/>
+          </a:p>
+        </p:txBody>
+      </p:sp>
+      <p:sp>
+        <p:nvSpPr>
+          <p:cNvPr id="5" name="Text 2"/>
+          <p:cNvSpPr/>
+          <p:nvPr/>
+        </p:nvSpPr>
+        <p:spPr>
+          <a:xfrm>
+            <a:off x="5349240" y="1783080"/>
+            <a:ext cx="6522415" cy="4663440"/>
+          </a:xfrm>
+          <a:prstGeom prst="rect">
+            <a:avLst/>
+          </a:prstGeom>
+          <a:noFill/>
+          <a:ln/>
+        </p:spPr>
+        <p:txBody>
+          <a:bodyPr wrap="square" lIns="0" tIns="0" rIns="0" bIns="0" rtlCol="0" anchor="t"/>
+          <a:lstStyle/>
+          <a:p>
+            <a:pPr algn="l" indent="0" marL="0">
+              <a:spcAft>
+                <a:spcPts val="800"/>
+              </a:spcAft>
+              <a:buNone/>
+            </a:pPr>
+            <a:r>
+              <a:rPr lang="en-US" sz="4000" b="1" dirty="0">
+                <a:solidFill>
+                  <a:srgbClr val="111111"/>
+                </a:solidFill>
+                <a:latin typeface="Times New Roman" pitchFamily="34" charset="0"/>
+                <a:ea typeface="Times New Roman" pitchFamily="34" charset="-122"/>
+                <a:cs typeface="Times New Roman" pitchFamily="34" charset="-120"/>
+              </a:rPr>
+              <a:t>Skills and education: </a:t>
+            </a:r>
+            <a:pPr algn="l" indent="0" marL="0">
+              <a:spcAft>
+                <a:spcPts val="800"/>
+              </a:spcAft>
+              <a:buNone/>
+            </a:pPr>
+            <a:r>
+              <a:rPr lang="en-US" sz="4000" dirty="0">
+                <a:solidFill>
+                  <a:srgbClr val="111111"/>
+                </a:solidFill>
+                <a:latin typeface="Times New Roman" pitchFamily="34" charset="0"/>
+                <a:ea typeface="Times New Roman" pitchFamily="34" charset="-122"/>
+                <a:cs typeface="Times New Roman" pitchFamily="34" charset="-120"/>
+              </a:rPr>
+              <a:t>Doctors and engineers leave poor countries for rich ones, which is called brain drain. Unskilled workers fill jobs in farming and building.</a:t>
+            </a:r>
+            <a:endParaRPr lang="en-US" sz="4000" dirty="0"/>
           </a:p>
         </p:txBody>
       </p:sp>
@@ -17222,7 +16927,7 @@
         <p:spPr>
           <a:xfrm>
             <a:off x="0" y="658368"/>
-            <a:ext cx="5120640" cy="5833872"/>
+            <a:ext cx="3840480" cy="5833872"/>
           </a:xfrm>
           <a:prstGeom prst="rect">
             <a:avLst/>
@@ -17237,8 +16942,8 @@
         </p:nvSpPr>
         <p:spPr>
           <a:xfrm>
-            <a:off x="5349240" y="1005840"/>
-            <a:ext cx="6522415" cy="731520"/>
+            <a:off x="4069080" y="1005840"/>
+            <a:ext cx="7802575" cy="731520"/>
           </a:xfrm>
           <a:prstGeom prst="rect">
             <a:avLst/>
@@ -17264,7 +16969,7 @@
                 <a:ea typeface="Times New Roman" pitchFamily="34" charset="-122"/>
                 <a:cs typeface="Times New Roman" pitchFamily="34" charset="-120"/>
               </a:rPr>
-              <a:t>2. Laws and Models of Migration</a:t>
+              <a:t>2. Characteristics (Differentials) of Migration</a:t>
             </a:r>
             <a:endParaRPr lang="en-US" sz="3600" dirty="0"/>
           </a:p>
@@ -17278,47 +16983,8 @@
         </p:nvSpPr>
         <p:spPr>
           <a:xfrm>
-            <a:off x="5349240" y="1737360"/>
-            <a:ext cx="6522415" cy="457200"/>
-          </a:xfrm>
-          <a:prstGeom prst="rect">
-            <a:avLst/>
-          </a:prstGeom>
-          <a:noFill/>
-          <a:ln/>
-        </p:spPr>
-        <p:txBody>
-          <a:bodyPr wrap="square" lIns="0" tIns="0" rIns="0" bIns="0" rtlCol="0" anchor="ctr"/>
-          <a:lstStyle/>
-          <a:p>
-            <a:pPr algn="l" indent="0" marL="0">
-              <a:buNone/>
-            </a:pPr>
-            <a:r>
-              <a:rPr lang="en-US" sz="3200" b="1" dirty="0">
-                <a:solidFill>
-                  <a:srgbClr val="990011"/>
-                </a:solidFill>
-                <a:latin typeface="Times New Roman" pitchFamily="34" charset="0"/>
-                <a:ea typeface="Times New Roman" pitchFamily="34" charset="-122"/>
-                <a:cs typeface="Times New Roman" pitchFamily="34" charset="-120"/>
-              </a:rPr>
-              <a:t>A) Zipf and the Gravity Model</a:t>
-            </a:r>
-            <a:endParaRPr lang="en-US" sz="3200" dirty="0"/>
-          </a:p>
-        </p:txBody>
-      </p:sp>
-      <p:sp>
-        <p:nvSpPr>
-          <p:cNvPr id="6" name="Text 3"/>
-          <p:cNvSpPr/>
-          <p:nvPr/>
-        </p:nvSpPr>
-        <p:spPr>
-          <a:xfrm>
-            <a:off x="5349240" y="2240280"/>
-            <a:ext cx="6522415" cy="4206240"/>
+            <a:off x="4069080" y="1783080"/>
+            <a:ext cx="7802575" cy="4663440"/>
           </a:xfrm>
           <a:prstGeom prst="rect">
             <a:avLst/>
@@ -17345,7 +17011,7 @@
                 <a:ea typeface="Times New Roman" pitchFamily="34" charset="-122"/>
                 <a:cs typeface="Times New Roman" pitchFamily="34" charset="-120"/>
               </a:rPr>
-              <a:t>Meaning: </a:t>
+              <a:t>Marital status and group: </a:t>
             </a:r>
             <a:pPr algn="l" indent="0" marL="0">
               <a:spcAft>
@@ -17362,7 +17028,7 @@
                 <a:ea typeface="Times New Roman" pitchFamily="34" charset="-122"/>
                 <a:cs typeface="Times New Roman" pitchFamily="34" charset="-120"/>
               </a:rPr>
-              <a:t>Many people move short distances, and few move far.</a:t>
+              <a:t>Single people move more easily than married people with children. People also follow members of their own community, which is called chain migration, like the Turks in Germany.</a:t>
             </a:r>
             <a:endParaRPr lang="en-US" sz="4000" dirty="0"/>
           </a:p>
@@ -17515,7 +17181,7 @@
                 <a:ea typeface="Times New Roman" pitchFamily="34" charset="-122"/>
                 <a:cs typeface="Times New Roman" pitchFamily="34" charset="-120"/>
               </a:rPr>
-              <a:t>2. Laws and Models of Migration</a:t>
+              <a:t>3. Laws and Theories of Migration</a:t>
             </a:r>
             <a:endParaRPr lang="en-US" sz="3600" dirty="0"/>
           </a:p>
@@ -17530,7 +17196,7 @@
         <p:spPr>
           <a:xfrm>
             <a:off x="365760" y="1737360"/>
-            <a:ext cx="5120640" cy="457200"/>
+            <a:ext cx="6035040" cy="457200"/>
           </a:xfrm>
           <a:prstGeom prst="rect">
             <a:avLst/>
@@ -17556,7 +17222,7 @@
                 <a:ea typeface="Times New Roman" pitchFamily="34" charset="-122"/>
                 <a:cs typeface="Times New Roman" pitchFamily="34" charset="-120"/>
               </a:rPr>
-              <a:t>A) Zipf and the Gravity Model</a:t>
+              <a:t>A) Zipf's Law and the Gravity Model</a:t>
             </a:r>
             <a:endParaRPr lang="en-US" sz="3000" dirty="0"/>
           </a:p>
@@ -17571,7 +17237,7 @@
         <p:spPr>
           <a:xfrm>
             <a:off x="365760" y="2240280"/>
-            <a:ext cx="4846320" cy="4160520"/>
+            <a:ext cx="6035040" cy="4160520"/>
           </a:xfrm>
           <a:prstGeom prst="rect">
             <a:avLst/>
@@ -17590,7 +17256,7 @@
               <a:buNone/>
             </a:pPr>
             <a:r>
-              <a:rPr lang="en-US" sz="3200" b="1" dirty="0">
+              <a:rPr lang="en-US" sz="3000" i="1" dirty="0">
                 <a:solidFill>
                   <a:srgbClr val="111111"/>
                 </a:solidFill>
@@ -17598,8 +17264,11 @@
                 <a:ea typeface="Times New Roman" pitchFamily="34" charset="-122"/>
                 <a:cs typeface="Times New Roman" pitchFamily="34" charset="-120"/>
               </a:rPr>
-              <a:t>The gravity model: </a:t>
-            </a:r>
+              <a:t>Distance and size explain migration in the following models:</a:t>
+            </a:r>
+            <a:endParaRPr lang="en-US" sz="3000" dirty="0"/>
+          </a:p>
+          <a:p>
             <a:pPr algn="l" indent="0" marL="0">
               <a:spcAft>
                 <a:spcPts val="800"/>
@@ -17607,7 +17276,7 @@
               <a:buNone/>
             </a:pPr>
             <a:r>
-              <a:rPr lang="en-US" sz="3200" dirty="0">
+              <a:rPr lang="en-US" sz="3000" b="1" dirty="0">
                 <a:solidFill>
                   <a:srgbClr val="111111"/>
                 </a:solidFill>
@@ -17615,15 +17284,32 @@
                 <a:ea typeface="Times New Roman" pitchFamily="34" charset="-122"/>
                 <a:cs typeface="Times New Roman" pitchFamily="34" charset="-120"/>
               </a:rPr>
-              <a:t>Migration is proportional to the product of the populations and inversely proportional to the square of the distance: M = k × Pi × Pj ÷ d².</a:t>
-            </a:r>
-            <a:endParaRPr lang="en-US" sz="3200" dirty="0"/>
+              <a:t>Zipf's inverse distance law: </a:t>
+            </a:r>
+            <a:pPr algn="l" indent="0" marL="0">
+              <a:spcAft>
+                <a:spcPts val="800"/>
+              </a:spcAft>
+              <a:buNone/>
+            </a:pPr>
+            <a:r>
+              <a:rPr lang="en-US" sz="3000" dirty="0">
+                <a:solidFill>
+                  <a:srgbClr val="111111"/>
+                </a:solidFill>
+                <a:latin typeface="Times New Roman" pitchFamily="34" charset="0"/>
+                <a:ea typeface="Times New Roman" pitchFamily="34" charset="-122"/>
+                <a:cs typeface="Times New Roman" pitchFamily="34" charset="-120"/>
+              </a:rPr>
+              <a:t>The number of migrants between two places is inversely proportional to the distance between them: M ∝ 1 ÷ d. Many people move short distances, and few move far.</a:t>
+            </a:r>
+            <a:endParaRPr lang="en-US" sz="3000" dirty="0"/>
           </a:p>
         </p:txBody>
       </p:sp>
       <p:pic>
         <p:nvPicPr>
-          <p:cNvPr id="6" name="Image 0" descr="/home/claude/f4/img/v2/gravity_big.png">    </p:cNvPr>
+          <p:cNvPr id="6" name="Image 0" descr="/home/claude/f4/img/v2/zipf_big.png">    </p:cNvPr>
           <p:cNvPicPr>
             <a:picLocks noChangeAspect="1"/>
           </p:cNvPicPr>
@@ -17637,8 +17323,8 @@
         </p:blipFill>
         <p:spPr>
           <a:xfrm>
-            <a:off x="5349240" y="2617506"/>
-            <a:ext cx="6659575" cy="2601397"/>
+            <a:off x="6537960" y="2721454"/>
+            <a:ext cx="5470855" cy="2393499"/>
           </a:xfrm>
           <a:prstGeom prst="rect">
             <a:avLst/>
@@ -17653,8 +17339,8 @@
         </p:nvSpPr>
         <p:spPr>
           <a:xfrm>
-            <a:off x="5349240" y="6089904"/>
-            <a:ext cx="6659575" cy="347472"/>
+            <a:off x="6537960" y="6089904"/>
+            <a:ext cx="5470855" cy="347472"/>
           </a:xfrm>
           <a:prstGeom prst="rect">
             <a:avLst/>
@@ -17678,7 +17364,7 @@
                 <a:ea typeface="Times New Roman" pitchFamily="34" charset="-122"/>
                 <a:cs typeface="Times New Roman" pitchFamily="34" charset="-120"/>
               </a:rPr>
-              <a:t>Illustration: the gravity model</a:t>
+              <a:t>Illustration: Zipf's law</a:t>
             </a:r>
             <a:endParaRPr lang="en-US" sz="1600" dirty="0"/>
           </a:p>
@@ -17796,9 +17482,150 @@
           </a:p>
         </p:txBody>
       </p:sp>
+      <p:sp>
+        <p:nvSpPr>
+          <p:cNvPr id="3" name="Text 1"/>
+          <p:cNvSpPr/>
+          <p:nvPr/>
+        </p:nvSpPr>
+        <p:spPr>
+          <a:xfrm>
+            <a:off x="365760" y="1005840"/>
+            <a:ext cx="11460175" cy="731520"/>
+          </a:xfrm>
+          <a:prstGeom prst="rect">
+            <a:avLst/>
+          </a:prstGeom>
+          <a:noFill/>
+          <a:ln/>
+        </p:spPr>
+        <p:txBody>
+          <a:bodyPr wrap="square" lIns="0" tIns="0" rIns="0" bIns="0" rtlCol="0" anchor="ctr">
+            <a:normAutofit/>
+          </a:bodyPr>
+          <a:lstStyle/>
+          <a:p>
+            <a:pPr algn="ctr" indent="0" marL="0">
+              <a:buNone/>
+            </a:pPr>
+            <a:r>
+              <a:rPr lang="en-US" sz="3600" b="1" dirty="0">
+                <a:solidFill>
+                  <a:srgbClr val="990011"/>
+                </a:solidFill>
+                <a:latin typeface="Times New Roman" pitchFamily="34" charset="0"/>
+                <a:ea typeface="Times New Roman" pitchFamily="34" charset="-122"/>
+                <a:cs typeface="Times New Roman" pitchFamily="34" charset="-120"/>
+              </a:rPr>
+              <a:t>3. Laws and Theories of Migration</a:t>
+            </a:r>
+            <a:endParaRPr lang="en-US" sz="3600" dirty="0"/>
+          </a:p>
+        </p:txBody>
+      </p:sp>
+      <p:sp>
+        <p:nvSpPr>
+          <p:cNvPr id="4" name="Text 2"/>
+          <p:cNvSpPr/>
+          <p:nvPr/>
+        </p:nvSpPr>
+        <p:spPr>
+          <a:xfrm>
+            <a:off x="365760" y="1737360"/>
+            <a:ext cx="6035040" cy="457200"/>
+          </a:xfrm>
+          <a:prstGeom prst="rect">
+            <a:avLst/>
+          </a:prstGeom>
+          <a:noFill/>
+          <a:ln/>
+        </p:spPr>
+        <p:txBody>
+          <a:bodyPr wrap="square" lIns="0" tIns="0" rIns="0" bIns="0" rtlCol="0" anchor="ctr">
+            <a:normAutofit/>
+          </a:bodyPr>
+          <a:lstStyle/>
+          <a:p>
+            <a:pPr algn="l" indent="0" marL="0">
+              <a:buNone/>
+            </a:pPr>
+            <a:r>
+              <a:rPr lang="en-US" sz="3000" b="1" dirty="0">
+                <a:solidFill>
+                  <a:srgbClr val="990011"/>
+                </a:solidFill>
+                <a:latin typeface="Times New Roman" pitchFamily="34" charset="0"/>
+                <a:ea typeface="Times New Roman" pitchFamily="34" charset="-122"/>
+                <a:cs typeface="Times New Roman" pitchFamily="34" charset="-120"/>
+              </a:rPr>
+              <a:t>A) Zipf's Law and the Gravity Model</a:t>
+            </a:r>
+            <a:endParaRPr lang="en-US" sz="3000" dirty="0"/>
+          </a:p>
+        </p:txBody>
+      </p:sp>
+      <p:sp>
+        <p:nvSpPr>
+          <p:cNvPr id="5" name="Text 3"/>
+          <p:cNvSpPr/>
+          <p:nvPr/>
+        </p:nvSpPr>
+        <p:spPr>
+          <a:xfrm>
+            <a:off x="365760" y="2240280"/>
+            <a:ext cx="6035040" cy="4160520"/>
+          </a:xfrm>
+          <a:prstGeom prst="rect">
+            <a:avLst/>
+          </a:prstGeom>
+          <a:noFill/>
+          <a:ln/>
+        </p:spPr>
+        <p:txBody>
+          <a:bodyPr wrap="square" lIns="0" tIns="0" rIns="0" bIns="0" rtlCol="0" anchor="t"/>
+          <a:lstStyle/>
+          <a:p>
+            <a:pPr algn="l" indent="0" marL="0">
+              <a:spcAft>
+                <a:spcPts val="800"/>
+              </a:spcAft>
+              <a:buNone/>
+            </a:pPr>
+            <a:r>
+              <a:rPr lang="en-US" sz="2800" b="1" dirty="0">
+                <a:solidFill>
+                  <a:srgbClr val="111111"/>
+                </a:solidFill>
+                <a:latin typeface="Times New Roman" pitchFamily="34" charset="0"/>
+                <a:ea typeface="Times New Roman" pitchFamily="34" charset="-122"/>
+                <a:cs typeface="Times New Roman" pitchFamily="34" charset="-120"/>
+              </a:rPr>
+              <a:t>The gravity model: </a:t>
+            </a:r>
+            <a:pPr algn="l" indent="0" marL="0">
+              <a:spcAft>
+                <a:spcPts val="800"/>
+              </a:spcAft>
+              <a:buNone/>
+            </a:pPr>
+            <a:r>
+              <a:rPr lang="en-US" sz="2800" dirty="0">
+                <a:solidFill>
+                  <a:srgbClr val="111111"/>
+                </a:solidFill>
+                <a:latin typeface="Times New Roman" pitchFamily="34" charset="0"/>
+                <a:ea typeface="Times New Roman" pitchFamily="34" charset="-122"/>
+                <a:cs typeface="Times New Roman" pitchFamily="34" charset="-120"/>
+              </a:rPr>
+              <a:t>Migration between two places is proportional to the product of their populations and inversely proportional to the square of the distance: M = k × Pi × Pj ÷ d². Large cities therefore exert a strong pull, even from far away, as Douala does on the whole country.</a:t>
+            </a:r>
+            <a:endParaRPr lang="en-US" sz="2800" dirty="0"/>
+          </a:p>
+        </p:txBody>
+      </p:sp>
       <p:pic>
         <p:nvPicPr>
-          <p:cNvPr id="3" name="Image 0" descr="/home/claude/f4/img/minesec_sheet.png">    </p:cNvPr>
+          <p:cNvPr id="6" name="Image 0" descr="/home/claude/f4/img/v2/gravity_big.png">    </p:cNvPr>
           <p:cNvPicPr>
             <a:picLocks noChangeAspect="1"/>
           </p:cNvPicPr>
@@ -17812,8 +17639,8 @@
         </p:blipFill>
         <p:spPr>
           <a:xfrm>
-            <a:off x="0" y="658368"/>
-            <a:ext cx="5120640" cy="5833872"/>
+            <a:off x="6537960" y="2849678"/>
+            <a:ext cx="5470855" cy="2137053"/>
           </a:xfrm>
           <a:prstGeom prst="rect">
             <a:avLst/>
@@ -17822,14 +17649,14 @@
       </p:pic>
       <p:sp>
         <p:nvSpPr>
-          <p:cNvPr id="4" name="Text 1"/>
+          <p:cNvPr id="7" name="Text 4"/>
           <p:cNvSpPr/>
           <p:nvPr/>
         </p:nvSpPr>
         <p:spPr>
           <a:xfrm>
-            <a:off x="5349240" y="1005840"/>
-            <a:ext cx="6522415" cy="731520"/>
+            <a:off x="6537960" y="6089904"/>
+            <a:ext cx="5470855" cy="347472"/>
           </a:xfrm>
           <a:prstGeom prst="rect">
             <a:avLst/>
@@ -17838,124 +17665,24 @@
           <a:ln/>
         </p:spPr>
         <p:txBody>
-          <a:bodyPr wrap="square" lIns="0" tIns="0" rIns="0" bIns="0" rtlCol="0" anchor="ctr">
-            <a:normAutofit/>
-          </a:bodyPr>
+          <a:bodyPr wrap="square" lIns="0" tIns="0" rIns="0" bIns="0" rtlCol="0" anchor="ctr"/>
           <a:lstStyle/>
           <a:p>
             <a:pPr algn="ctr" indent="0" marL="0">
               <a:buNone/>
             </a:pPr>
             <a:r>
-              <a:rPr lang="en-US" sz="3600" b="1" dirty="0">
-                <a:solidFill>
-                  <a:srgbClr val="990011"/>
+              <a:rPr lang="en-US" sz="1600" i="1" dirty="0">
+                <a:solidFill>
+                  <a:srgbClr val="555555"/>
                 </a:solidFill>
                 <a:latin typeface="Times New Roman" pitchFamily="34" charset="0"/>
                 <a:ea typeface="Times New Roman" pitchFamily="34" charset="-122"/>
                 <a:cs typeface="Times New Roman" pitchFamily="34" charset="-120"/>
               </a:rPr>
-              <a:t>2. Laws and Models of Migration</a:t>
-            </a:r>
-            <a:endParaRPr lang="en-US" sz="3600" dirty="0"/>
-          </a:p>
-        </p:txBody>
-      </p:sp>
-      <p:sp>
-        <p:nvSpPr>
-          <p:cNvPr id="5" name="Text 2"/>
-          <p:cNvSpPr/>
-          <p:nvPr/>
-        </p:nvSpPr>
-        <p:spPr>
-          <a:xfrm>
-            <a:off x="5349240" y="1737360"/>
-            <a:ext cx="6522415" cy="457200"/>
-          </a:xfrm>
-          <a:prstGeom prst="rect">
-            <a:avLst/>
-          </a:prstGeom>
-          <a:noFill/>
-          <a:ln/>
-        </p:spPr>
-        <p:txBody>
-          <a:bodyPr wrap="square" lIns="0" tIns="0" rIns="0" bIns="0" rtlCol="0" anchor="ctr"/>
-          <a:lstStyle/>
-          <a:p>
-            <a:pPr algn="l" indent="0" marL="0">
-              <a:buNone/>
-            </a:pPr>
-            <a:r>
-              <a:rPr lang="en-US" sz="3200" b="1" dirty="0">
-                <a:solidFill>
-                  <a:srgbClr val="990011"/>
-                </a:solidFill>
-                <a:latin typeface="Times New Roman" pitchFamily="34" charset="0"/>
-                <a:ea typeface="Times New Roman" pitchFamily="34" charset="-122"/>
-                <a:cs typeface="Times New Roman" pitchFamily="34" charset="-120"/>
-              </a:rPr>
-              <a:t>A) Zipf and the Gravity Model</a:t>
-            </a:r>
-            <a:endParaRPr lang="en-US" sz="3200" dirty="0"/>
-          </a:p>
-        </p:txBody>
-      </p:sp>
-      <p:sp>
-        <p:nvSpPr>
-          <p:cNvPr id="6" name="Text 3"/>
-          <p:cNvSpPr/>
-          <p:nvPr/>
-        </p:nvSpPr>
-        <p:spPr>
-          <a:xfrm>
-            <a:off x="5349240" y="2240280"/>
-            <a:ext cx="6522415" cy="4206240"/>
-          </a:xfrm>
-          <a:prstGeom prst="rect">
-            <a:avLst/>
-          </a:prstGeom>
-          <a:noFill/>
-          <a:ln/>
-        </p:spPr>
-        <p:txBody>
-          <a:bodyPr wrap="square" lIns="0" tIns="0" rIns="0" bIns="0" rtlCol="0" anchor="t"/>
-          <a:lstStyle/>
-          <a:p>
-            <a:pPr algn="l" indent="0" marL="0">
-              <a:spcAft>
-                <a:spcPts val="800"/>
-              </a:spcAft>
-              <a:buNone/>
-            </a:pPr>
-            <a:r>
-              <a:rPr lang="en-US" sz="4000" b="1" dirty="0">
-                <a:solidFill>
-                  <a:srgbClr val="111111"/>
-                </a:solidFill>
-                <a:latin typeface="Times New Roman" pitchFamily="34" charset="0"/>
-                <a:ea typeface="Times New Roman" pitchFamily="34" charset="-122"/>
-                <a:cs typeface="Times New Roman" pitchFamily="34" charset="-120"/>
-              </a:rPr>
-              <a:t>Meaning: </a:t>
-            </a:r>
-            <a:pPr algn="l" indent="0" marL="0">
-              <a:spcAft>
-                <a:spcPts val="800"/>
-              </a:spcAft>
-              <a:buNone/>
-            </a:pPr>
-            <a:r>
-              <a:rPr lang="en-US" sz="4000" dirty="0">
-                <a:solidFill>
-                  <a:srgbClr val="111111"/>
-                </a:solidFill>
-                <a:latin typeface="Times New Roman" pitchFamily="34" charset="0"/>
-                <a:ea typeface="Times New Roman" pitchFamily="34" charset="-122"/>
-                <a:cs typeface="Times New Roman" pitchFamily="34" charset="-120"/>
-              </a:rPr>
-              <a:t>Large cities exert a strong "pull", even from far away, as Douala does on the whole country.</a:t>
-            </a:r>
-            <a:endParaRPr lang="en-US" sz="4000" dirty="0"/>
+              <a:t>Illustration: the gravity model</a:t>
+            </a:r>
+            <a:endParaRPr lang="en-US" sz="1600" dirty="0"/>
           </a:p>
         </p:txBody>
       </p:sp>
@@ -18106,7 +17833,7 @@
                 <a:ea typeface="Times New Roman" pitchFamily="34" charset="-122"/>
                 <a:cs typeface="Times New Roman" pitchFamily="34" charset="-120"/>
               </a:rPr>
-              <a:t>2. Laws and Models of Migration</a:t>
+              <a:t>3. Laws and Theories of Migration</a:t>
             </a:r>
             <a:endParaRPr lang="en-US" sz="3600" dirty="0"/>
           </a:p>
@@ -18121,7 +17848,7 @@
         <p:spPr>
           <a:xfrm>
             <a:off x="365760" y="1737360"/>
-            <a:ext cx="5120640" cy="457200"/>
+            <a:ext cx="6035040" cy="457200"/>
           </a:xfrm>
           <a:prstGeom prst="rect">
             <a:avLst/>
@@ -18147,7 +17874,7 @@
                 <a:ea typeface="Times New Roman" pitchFamily="34" charset="-122"/>
                 <a:cs typeface="Times New Roman" pitchFamily="34" charset="-120"/>
               </a:rPr>
-              <a:t>B) Stouffer's Intervening Opportunities</a:t>
+              <a:t>B) Stouffer's Intervening Opportunities Model</a:t>
             </a:r>
             <a:endParaRPr lang="en-US" sz="3000" dirty="0"/>
           </a:p>
@@ -18162,7 +17889,7 @@
         <p:spPr>
           <a:xfrm>
             <a:off x="365760" y="2240280"/>
-            <a:ext cx="4846320" cy="4160520"/>
+            <a:ext cx="6035040" cy="4160520"/>
           </a:xfrm>
           <a:prstGeom prst="rect">
             <a:avLst/>
@@ -18181,7 +17908,7 @@
               <a:buNone/>
             </a:pPr>
             <a:r>
-              <a:rPr lang="en-US" sz="3600" i="1" dirty="0">
+              <a:rPr lang="en-US" sz="3000" i="1" dirty="0">
                 <a:solidFill>
                   <a:srgbClr val="111111"/>
                 </a:solidFill>
@@ -18189,9 +17916,9 @@
                 <a:ea typeface="Times New Roman" pitchFamily="34" charset="-122"/>
                 <a:cs typeface="Times New Roman" pitchFamily="34" charset="-120"/>
               </a:rPr>
-              <a:t>Stouffer's model is presented as follows:</a:t>
-            </a:r>
-            <a:endParaRPr lang="en-US" sz="3600" dirty="0"/>
+              <a:t>Stouffer's model explains migration as follows:</a:t>
+            </a:r>
+            <a:endParaRPr lang="en-US" sz="3000" dirty="0"/>
           </a:p>
           <a:p>
             <a:pPr algn="l" indent="0" marL="0">
@@ -18201,7 +17928,7 @@
               <a:buNone/>
             </a:pPr>
             <a:r>
-              <a:rPr lang="en-US" sz="3600" b="1" dirty="0">
+              <a:rPr lang="en-US" sz="3000" b="1" dirty="0">
                 <a:solidFill>
                   <a:srgbClr val="111111"/>
                 </a:solidFill>
@@ -18218,7 +17945,7 @@
               <a:buNone/>
             </a:pPr>
             <a:r>
-              <a:rPr lang="en-US" sz="3600" dirty="0">
+              <a:rPr lang="en-US" sz="3000" dirty="0">
                 <a:solidFill>
                   <a:srgbClr val="111111"/>
                 </a:solidFill>
@@ -18226,9 +17953,9 @@
                 <a:ea typeface="Times New Roman" pitchFamily="34" charset="-122"/>
                 <a:cs typeface="Times New Roman" pitchFamily="34" charset="-120"/>
               </a:rPr>
-              <a:t>The number of migrants depends less on distance than on the opportunities found on the way.</a:t>
-            </a:r>
-            <a:endParaRPr lang="en-US" sz="3600" dirty="0"/>
+              <a:t>The number of migrants depends less on distance than on the opportunities found on the way. An opportunity between the origin and the destination can stop the migrant before he arrives.</a:t>
+            </a:r>
+            <a:endParaRPr lang="en-US" sz="3000" dirty="0"/>
           </a:p>
         </p:txBody>
       </p:sp>
@@ -18248,8 +17975,8 @@
         </p:blipFill>
         <p:spPr>
           <a:xfrm>
-            <a:off x="5349240" y="2617506"/>
-            <a:ext cx="6659575" cy="2601397"/>
+            <a:off x="6537960" y="2849678"/>
+            <a:ext cx="5470855" cy="2137053"/>
           </a:xfrm>
           <a:prstGeom prst="rect">
             <a:avLst/>
@@ -18264,8 +17991,8 @@
         </p:nvSpPr>
         <p:spPr>
           <a:xfrm>
-            <a:off x="5349240" y="6089904"/>
-            <a:ext cx="6659575" cy="347472"/>
+            <a:off x="6537960" y="6089904"/>
+            <a:ext cx="5470855" cy="347472"/>
           </a:xfrm>
           <a:prstGeom prst="rect">
             <a:avLst/>
@@ -18289,7 +18016,7 @@
                 <a:ea typeface="Times New Roman" pitchFamily="34" charset="-122"/>
                 <a:cs typeface="Times New Roman" pitchFamily="34" charset="-120"/>
               </a:rPr>
-              <a:t>Illustration: intervening opportunities</a:t>
+              <a:t>Illustration: Stouffer's model</a:t>
             </a:r>
             <a:endParaRPr lang="en-US" sz="1600" dirty="0"/>
           </a:p>
@@ -18466,7 +18193,7 @@
                 <a:ea typeface="Times New Roman" pitchFamily="34" charset="-122"/>
                 <a:cs typeface="Times New Roman" pitchFamily="34" charset="-120"/>
               </a:rPr>
-              <a:t>2. Laws and Models of Migration</a:t>
+              <a:t>3. Laws and Theories of Migration</a:t>
             </a:r>
             <a:endParaRPr lang="en-US" sz="3600" dirty="0"/>
           </a:p>
@@ -18505,7 +18232,7 @@
                 <a:ea typeface="Times New Roman" pitchFamily="34" charset="-122"/>
                 <a:cs typeface="Times New Roman" pitchFamily="34" charset="-120"/>
               </a:rPr>
-              <a:t>B) Stouffer's Intervening Opportunities</a:t>
+              <a:t>B) Stouffer's Intervening Opportunities Model</a:t>
             </a:r>
             <a:endParaRPr lang="en-US" sz="3200" dirty="0"/>
           </a:p>
@@ -18547,7 +18274,7 @@
                 <a:ea typeface="Times New Roman" pitchFamily="34" charset="-122"/>
                 <a:cs typeface="Times New Roman" pitchFamily="34" charset="-120"/>
               </a:rPr>
-              <a:t>Simplified formula: </a:t>
+              <a:t>Formula and example: </a:t>
             </a:r>
             <a:pPr algn="l" indent="0" marL="0">
               <a:spcAft>
@@ -18564,44 +18291,7 @@
                 <a:ea typeface="Times New Roman" pitchFamily="34" charset="-122"/>
                 <a:cs typeface="Times New Roman" pitchFamily="34" charset="-120"/>
               </a:rPr>
-              <a:t>M = k × Oj ÷ Oint, where Oj is the opportunities at the destination and Oint the intervening opportunities.</a:t>
-            </a:r>
-            <a:endParaRPr lang="en-US" sz="4000" dirty="0"/>
-          </a:p>
-          <a:p>
-            <a:pPr algn="l" indent="0" marL="0">
-              <a:spcAft>
-                <a:spcPts val="800"/>
-              </a:spcAft>
-              <a:buNone/>
-            </a:pPr>
-            <a:r>
-              <a:rPr lang="en-US" sz="4000" b="1" dirty="0">
-                <a:solidFill>
-                  <a:srgbClr val="111111"/>
-                </a:solidFill>
-                <a:latin typeface="Times New Roman" pitchFamily="34" charset="0"/>
-                <a:ea typeface="Times New Roman" pitchFamily="34" charset="-122"/>
-                <a:cs typeface="Times New Roman" pitchFamily="34" charset="-120"/>
-              </a:rPr>
-              <a:t>Example: </a:t>
-            </a:r>
-            <a:pPr algn="l" indent="0" marL="0">
-              <a:spcAft>
-                <a:spcPts val="800"/>
-              </a:spcAft>
-              <a:buNone/>
-            </a:pPr>
-            <a:r>
-              <a:rPr lang="en-US" sz="4000" dirty="0">
-                <a:solidFill>
-                  <a:srgbClr val="111111"/>
-                </a:solidFill>
-                <a:latin typeface="Times New Roman" pitchFamily="34" charset="0"/>
-                <a:ea typeface="Times New Roman" pitchFamily="34" charset="-122"/>
-                <a:cs typeface="Times New Roman" pitchFamily="34" charset="-120"/>
-              </a:rPr>
-              <a:t>A migrant from Garoua may settle in Ngaoundéré or Yaoundé instead of continuing to Douala.</a:t>
+              <a:t>In a simplified form, M = k × Oj ÷ Oint, where Oj is the opportunities at the destination and Oint the opportunities on the way. For example, a migrant from Garoua may settle in Ngaoundéré or Yaoundé instead of continuing to Douala.</a:t>
             </a:r>
             <a:endParaRPr lang="en-US" sz="4000" dirty="0"/>
           </a:p>
@@ -18754,7 +18444,7 @@
                 <a:ea typeface="Times New Roman" pitchFamily="34" charset="-122"/>
                 <a:cs typeface="Times New Roman" pitchFamily="34" charset="-120"/>
               </a:rPr>
-              <a:t>3. Calculations with the Models</a:t>
+              <a:t>4. Calculations Based on the Models</a:t>
             </a:r>
             <a:endParaRPr lang="en-US" sz="3600" dirty="0"/>
           </a:p>
@@ -18769,7 +18459,7 @@
         <p:spPr>
           <a:xfrm>
             <a:off x="365760" y="1783080"/>
-            <a:ext cx="4846320" cy="4617720"/>
+            <a:ext cx="6035040" cy="4617720"/>
           </a:xfrm>
           <a:prstGeom prst="rect">
             <a:avLst/>
@@ -18788,7 +18478,7 @@
               <a:buNone/>
             </a:pPr>
             <a:r>
-              <a:rPr lang="en-US" sz="3400" i="1" dirty="0">
+              <a:rPr lang="en-US" sz="3200" i="1" dirty="0">
                 <a:solidFill>
                   <a:srgbClr val="111111"/>
                 </a:solidFill>
@@ -18798,7 +18488,7 @@
               </a:rPr>
               <a:t>The models are applied as in the following examples:</a:t>
             </a:r>
-            <a:endParaRPr lang="en-US" sz="3400" dirty="0"/>
+            <a:endParaRPr lang="en-US" sz="3200" dirty="0"/>
           </a:p>
           <a:p>
             <a:pPr algn="l" indent="0" marL="0">
@@ -18808,7 +18498,7 @@
               <a:buNone/>
             </a:pPr>
             <a:r>
-              <a:rPr lang="en-US" sz="3400" b="1" dirty="0">
+              <a:rPr lang="en-US" sz="3200" b="1" dirty="0">
                 <a:solidFill>
                   <a:srgbClr val="111111"/>
                 </a:solidFill>
@@ -18825,7 +18515,7 @@
               <a:buNone/>
             </a:pPr>
             <a:r>
-              <a:rPr lang="en-US" sz="3400" dirty="0">
+              <a:rPr lang="en-US" sz="3200" dirty="0">
                 <a:solidFill>
                   <a:srgbClr val="111111"/>
                 </a:solidFill>
@@ -18833,9 +18523,9 @@
                 <a:ea typeface="Times New Roman" pitchFamily="34" charset="-122"/>
                 <a:cs typeface="Times New Roman" pitchFamily="34" charset="-120"/>
               </a:rPr>
-              <a:t>City A (500,000) and City B (100,000), 150 km apart, k = 1: 500,000 × 100,000 ÷ 150² ≈ 2,222,222.</a:t>
-            </a:r>
-            <a:endParaRPr lang="en-US" sz="3400" dirty="0"/>
+              <a:t>City A has 500,000 people and City B 100,000, and they are 150 km apart, with k = 1. The interaction is 500,000 × 100,000 ÷ 150² ≈ 2,222,222, an index used to compare pairs of towns and not a number of people.</a:t>
+            </a:r>
+            <a:endParaRPr lang="en-US" sz="3200" dirty="0"/>
           </a:p>
         </p:txBody>
       </p:sp>
@@ -18855,8 +18545,8 @@
         </p:blipFill>
         <p:spPr>
           <a:xfrm>
-            <a:off x="5349240" y="2617506"/>
-            <a:ext cx="6659575" cy="2601397"/>
+            <a:off x="6537960" y="2849678"/>
+            <a:ext cx="5470855" cy="2137053"/>
           </a:xfrm>
           <a:prstGeom prst="rect">
             <a:avLst/>
@@ -18871,8 +18561,8 @@
         </p:nvSpPr>
         <p:spPr>
           <a:xfrm>
-            <a:off x="5349240" y="6089904"/>
-            <a:ext cx="6659575" cy="347472"/>
+            <a:off x="6537960" y="6089904"/>
+            <a:ext cx="5470855" cy="347472"/>
           </a:xfrm>
           <a:prstGeom prst="rect">
             <a:avLst/>
@@ -18896,7 +18586,7 @@
                 <a:ea typeface="Times New Roman" pitchFamily="34" charset="-122"/>
                 <a:cs typeface="Times New Roman" pitchFamily="34" charset="-120"/>
               </a:rPr>
-              <a:t>Illustration: a worked example</a:t>
+              <a:t>Illustration: a gravity calculation</a:t>
             </a:r>
             <a:endParaRPr lang="en-US" sz="1600" dirty="0"/>
           </a:p>
@@ -19233,9 +18923,109 @@
           </a:p>
         </p:txBody>
       </p:sp>
+      <p:sp>
+        <p:nvSpPr>
+          <p:cNvPr id="3" name="Text 1"/>
+          <p:cNvSpPr/>
+          <p:nvPr/>
+        </p:nvSpPr>
+        <p:spPr>
+          <a:xfrm>
+            <a:off x="365760" y="1005840"/>
+            <a:ext cx="11460175" cy="731520"/>
+          </a:xfrm>
+          <a:prstGeom prst="rect">
+            <a:avLst/>
+          </a:prstGeom>
+          <a:noFill/>
+          <a:ln/>
+        </p:spPr>
+        <p:txBody>
+          <a:bodyPr wrap="square" lIns="0" tIns="0" rIns="0" bIns="0" rtlCol="0" anchor="ctr">
+            <a:normAutofit/>
+          </a:bodyPr>
+          <a:lstStyle/>
+          <a:p>
+            <a:pPr algn="ctr" indent="0" marL="0">
+              <a:buNone/>
+            </a:pPr>
+            <a:r>
+              <a:rPr lang="en-US" sz="3600" b="1" dirty="0">
+                <a:solidFill>
+                  <a:srgbClr val="990011"/>
+                </a:solidFill>
+                <a:latin typeface="Times New Roman" pitchFamily="34" charset="0"/>
+                <a:ea typeface="Times New Roman" pitchFamily="34" charset="-122"/>
+                <a:cs typeface="Times New Roman" pitchFamily="34" charset="-120"/>
+              </a:rPr>
+              <a:t>4. Calculations Based on the Models</a:t>
+            </a:r>
+            <a:endParaRPr lang="en-US" sz="3600" dirty="0"/>
+          </a:p>
+        </p:txBody>
+      </p:sp>
+      <p:sp>
+        <p:nvSpPr>
+          <p:cNvPr id="4" name="Text 2"/>
+          <p:cNvSpPr/>
+          <p:nvPr/>
+        </p:nvSpPr>
+        <p:spPr>
+          <a:xfrm>
+            <a:off x="365760" y="1783080"/>
+            <a:ext cx="6035040" cy="4617720"/>
+          </a:xfrm>
+          <a:prstGeom prst="rect">
+            <a:avLst/>
+          </a:prstGeom>
+          <a:noFill/>
+          <a:ln/>
+        </p:spPr>
+        <p:txBody>
+          <a:bodyPr wrap="square" lIns="0" tIns="0" rIns="0" bIns="0" rtlCol="0" anchor="t"/>
+          <a:lstStyle/>
+          <a:p>
+            <a:pPr algn="l" indent="0" marL="0">
+              <a:spcAft>
+                <a:spcPts val="800"/>
+              </a:spcAft>
+              <a:buNone/>
+            </a:pPr>
+            <a:r>
+              <a:rPr lang="en-US" sz="3400" b="1" dirty="0">
+                <a:solidFill>
+                  <a:srgbClr val="111111"/>
+                </a:solidFill>
+                <a:latin typeface="Times New Roman" pitchFamily="34" charset="0"/>
+                <a:ea typeface="Times New Roman" pitchFamily="34" charset="-122"/>
+                <a:cs typeface="Times New Roman" pitchFamily="34" charset="-120"/>
+              </a:rPr>
+              <a:t>Stouffer's model: </a:t>
+            </a:r>
+            <a:pPr algn="l" indent="0" marL="0">
+              <a:spcAft>
+                <a:spcPts val="800"/>
+              </a:spcAft>
+              <a:buNone/>
+            </a:pPr>
+            <a:r>
+              <a:rPr lang="en-US" sz="3400" dirty="0">
+                <a:solidFill>
+                  <a:srgbClr val="111111"/>
+                </a:solidFill>
+                <a:latin typeface="Times New Roman" pitchFamily="34" charset="0"/>
+                <a:ea typeface="Times New Roman" pitchFamily="34" charset="-122"/>
+                <a:cs typeface="Times New Roman" pitchFamily="34" charset="-120"/>
+              </a:rPr>
+              <a:t>Douala offers 50,000 jobs and the towns on the way offer 20,000, so the ratio is 50,000 ÷ 20,000 = 2.5. A ratio above 1 shows that the final destination pulls more strongly than the towns on the way.</a:t>
+            </a:r>
+            <a:endParaRPr lang="en-US" sz="3400" dirty="0"/>
+          </a:p>
+        </p:txBody>
+      </p:sp>
       <p:pic>
         <p:nvPicPr>
-          <p:cNvPr id="3" name="Image 0" descr="/home/claude/f4/img/minesec_sheet.png">    </p:cNvPr>
+          <p:cNvPr id="5" name="Image 0" descr="/home/claude/f4/img/v2/pop2_stouffer_calc.png">    </p:cNvPr>
           <p:cNvPicPr>
             <a:picLocks noChangeAspect="1"/>
           </p:cNvPicPr>
@@ -19249,8 +19039,8 @@
         </p:blipFill>
         <p:spPr>
           <a:xfrm>
-            <a:off x="0" y="658368"/>
-            <a:ext cx="5120640" cy="5833872"/>
+            <a:off x="6537960" y="2849678"/>
+            <a:ext cx="5470855" cy="2137053"/>
           </a:xfrm>
           <a:prstGeom prst="rect">
             <a:avLst/>
@@ -19259,14 +19049,14 @@
       </p:pic>
       <p:sp>
         <p:nvSpPr>
-          <p:cNvPr id="4" name="Text 1"/>
+          <p:cNvPr id="6" name="Text 3"/>
           <p:cNvSpPr/>
           <p:nvPr/>
         </p:nvSpPr>
         <p:spPr>
           <a:xfrm>
-            <a:off x="5349240" y="1005840"/>
-            <a:ext cx="6522415" cy="731520"/>
+            <a:off x="6537960" y="6089904"/>
+            <a:ext cx="5470855" cy="347472"/>
           </a:xfrm>
           <a:prstGeom prst="rect">
             <a:avLst/>
@@ -19275,85 +19065,24 @@
           <a:ln/>
         </p:spPr>
         <p:txBody>
-          <a:bodyPr wrap="square" lIns="0" tIns="0" rIns="0" bIns="0" rtlCol="0" anchor="ctr">
-            <a:normAutofit/>
-          </a:bodyPr>
+          <a:bodyPr wrap="square" lIns="0" tIns="0" rIns="0" bIns="0" rtlCol="0" anchor="ctr"/>
           <a:lstStyle/>
           <a:p>
             <a:pPr algn="ctr" indent="0" marL="0">
               <a:buNone/>
             </a:pPr>
             <a:r>
-              <a:rPr lang="en-US" sz="3600" b="1" dirty="0">
-                <a:solidFill>
-                  <a:srgbClr val="990011"/>
+              <a:rPr lang="en-US" sz="1600" i="1" dirty="0">
+                <a:solidFill>
+                  <a:srgbClr val="555555"/>
                 </a:solidFill>
                 <a:latin typeface="Times New Roman" pitchFamily="34" charset="0"/>
                 <a:ea typeface="Times New Roman" pitchFamily="34" charset="-122"/>
                 <a:cs typeface="Times New Roman" pitchFamily="34" charset="-120"/>
               </a:rPr>
-              <a:t>3. Calculations with the Models</a:t>
-            </a:r>
-            <a:endParaRPr lang="en-US" sz="3600" dirty="0"/>
-          </a:p>
-        </p:txBody>
-      </p:sp>
-      <p:sp>
-        <p:nvSpPr>
-          <p:cNvPr id="5" name="Text 2"/>
-          <p:cNvSpPr/>
-          <p:nvPr/>
-        </p:nvSpPr>
-        <p:spPr>
-          <a:xfrm>
-            <a:off x="5349240" y="1783080"/>
-            <a:ext cx="6522415" cy="4663440"/>
-          </a:xfrm>
-          <a:prstGeom prst="rect">
-            <a:avLst/>
-          </a:prstGeom>
-          <a:noFill/>
-          <a:ln/>
-        </p:spPr>
-        <p:txBody>
-          <a:bodyPr wrap="square" lIns="0" tIns="0" rIns="0" bIns="0" rtlCol="0" anchor="t"/>
-          <a:lstStyle/>
-          <a:p>
-            <a:pPr algn="l" indent="0" marL="0">
-              <a:spcAft>
-                <a:spcPts val="800"/>
-              </a:spcAft>
-              <a:buNone/>
-            </a:pPr>
-            <a:r>
-              <a:rPr lang="en-US" sz="4000" b="1" dirty="0">
-                <a:solidFill>
-                  <a:srgbClr val="111111"/>
-                </a:solidFill>
-                <a:latin typeface="Times New Roman" pitchFamily="34" charset="0"/>
-                <a:ea typeface="Times New Roman" pitchFamily="34" charset="-122"/>
-                <a:cs typeface="Times New Roman" pitchFamily="34" charset="-120"/>
-              </a:rPr>
-              <a:t>Interpretation: </a:t>
-            </a:r>
-            <a:pPr algn="l" indent="0" marL="0">
-              <a:spcAft>
-                <a:spcPts val="800"/>
-              </a:spcAft>
-              <a:buNone/>
-            </a:pPr>
-            <a:r>
-              <a:rPr lang="en-US" sz="4000" dirty="0">
-                <a:solidFill>
-                  <a:srgbClr val="111111"/>
-                </a:solidFill>
-                <a:latin typeface="Times New Roman" pitchFamily="34" charset="0"/>
-                <a:ea typeface="Times New Roman" pitchFamily="34" charset="-122"/>
-                <a:cs typeface="Times New Roman" pitchFamily="34" charset="-120"/>
-              </a:rPr>
-              <a:t>The result is an index of interaction used to compare pairs of towns, not a number of people.</a:t>
-            </a:r>
-            <a:endParaRPr lang="en-US" sz="4000" dirty="0"/>
+              <a:t>Illustration: a Stouffer calculation</a:t>
+            </a:r>
+            <a:endParaRPr lang="en-US" sz="1600" dirty="0"/>
           </a:p>
         </p:txBody>
       </p:sp>
@@ -19463,115 +19192,15 @@
                 <a:ea typeface="Calibri" pitchFamily="34" charset="-122"/>
                 <a:cs typeface="Calibri" pitchFamily="34" charset="-120"/>
               </a:rPr>
-              <a:t>BOARD SUMMARY</a:t>
+              <a:t>FORMATIVE EVALUATION</a:t>
             </a:r>
             <a:endParaRPr lang="en-US" sz="1400" dirty="0"/>
-          </a:p>
-        </p:txBody>
-      </p:sp>
-      <p:sp>
-        <p:nvSpPr>
-          <p:cNvPr id="3" name="Text 1"/>
-          <p:cNvSpPr/>
-          <p:nvPr/>
-        </p:nvSpPr>
-        <p:spPr>
-          <a:xfrm>
-            <a:off x="365760" y="1005840"/>
-            <a:ext cx="11460175" cy="731520"/>
-          </a:xfrm>
-          <a:prstGeom prst="rect">
-            <a:avLst/>
-          </a:prstGeom>
-          <a:noFill/>
-          <a:ln/>
-        </p:spPr>
-        <p:txBody>
-          <a:bodyPr wrap="square" lIns="0" tIns="0" rIns="0" bIns="0" rtlCol="0" anchor="ctr">
-            <a:normAutofit/>
-          </a:bodyPr>
-          <a:lstStyle/>
-          <a:p>
-            <a:pPr algn="ctr" indent="0" marL="0">
-              <a:buNone/>
-            </a:pPr>
-            <a:r>
-              <a:rPr lang="en-US" sz="3600" b="1" dirty="0">
-                <a:solidFill>
-                  <a:srgbClr val="990011"/>
-                </a:solidFill>
-                <a:latin typeface="Times New Roman" pitchFamily="34" charset="0"/>
-                <a:ea typeface="Times New Roman" pitchFamily="34" charset="-122"/>
-                <a:cs typeface="Times New Roman" pitchFamily="34" charset="-120"/>
-              </a:rPr>
-              <a:t>3. Calculations with the Models</a:t>
-            </a:r>
-            <a:endParaRPr lang="en-US" sz="3600" dirty="0"/>
-          </a:p>
-        </p:txBody>
-      </p:sp>
-      <p:sp>
-        <p:nvSpPr>
-          <p:cNvPr id="4" name="Text 2"/>
-          <p:cNvSpPr/>
-          <p:nvPr/>
-        </p:nvSpPr>
-        <p:spPr>
-          <a:xfrm>
-            <a:off x="365760" y="1783080"/>
-            <a:ext cx="4846320" cy="4617720"/>
-          </a:xfrm>
-          <a:prstGeom prst="rect">
-            <a:avLst/>
-          </a:prstGeom>
-          <a:noFill/>
-          <a:ln/>
-        </p:spPr>
-        <p:txBody>
-          <a:bodyPr wrap="square" lIns="0" tIns="0" rIns="0" bIns="0" rtlCol="0" anchor="t"/>
-          <a:lstStyle/>
-          <a:p>
-            <a:pPr algn="l" indent="0" marL="0">
-              <a:spcAft>
-                <a:spcPts val="800"/>
-              </a:spcAft>
-              <a:buNone/>
-            </a:pPr>
-            <a:r>
-              <a:rPr lang="en-US" sz="3600" b="1" dirty="0">
-                <a:solidFill>
-                  <a:srgbClr val="111111"/>
-                </a:solidFill>
-                <a:latin typeface="Times New Roman" pitchFamily="34" charset="0"/>
-                <a:ea typeface="Times New Roman" pitchFamily="34" charset="-122"/>
-                <a:cs typeface="Times New Roman" pitchFamily="34" charset="-120"/>
-              </a:rPr>
-              <a:t>Stouffer's model: </a:t>
-            </a:r>
-            <a:pPr algn="l" indent="0" marL="0">
-              <a:spcAft>
-                <a:spcPts val="800"/>
-              </a:spcAft>
-              <a:buNone/>
-            </a:pPr>
-            <a:r>
-              <a:rPr lang="en-US" sz="3600" dirty="0">
-                <a:solidFill>
-                  <a:srgbClr val="111111"/>
-                </a:solidFill>
-                <a:latin typeface="Times New Roman" pitchFamily="34" charset="0"/>
-                <a:ea typeface="Times New Roman" pitchFamily="34" charset="-122"/>
-                <a:cs typeface="Times New Roman" pitchFamily="34" charset="-120"/>
-              </a:rPr>
-              <a:t>Douala offers 50,000 jobs and the towns on the way 20,000: 50,000 ÷ 20,000 = 2.5.</a:t>
-            </a:r>
-            <a:endParaRPr lang="en-US" sz="3600" dirty="0"/>
           </a:p>
         </p:txBody>
       </p:sp>
       <p:pic>
         <p:nvPicPr>
-          <p:cNvPr id="5" name="Image 0" descr="/home/claude/f4/img/v2/pop2_stouffer_calc.png">    </p:cNvPr>
+          <p:cNvPr id="3" name="Image 0" descr="/home/claude/f4/img/minesec_sheet.png">    </p:cNvPr>
           <p:cNvPicPr>
             <a:picLocks noChangeAspect="1"/>
           </p:cNvPicPr>
@@ -19585,8 +19214,8 @@
         </p:blipFill>
         <p:spPr>
           <a:xfrm>
-            <a:off x="5349240" y="2617506"/>
-            <a:ext cx="6659575" cy="2601397"/>
+            <a:off x="0" y="658368"/>
+            <a:ext cx="5120640" cy="5833872"/>
           </a:xfrm>
           <a:prstGeom prst="rect">
             <a:avLst/>
@@ -19595,14 +19224,14 @@
       </p:pic>
       <p:sp>
         <p:nvSpPr>
-          <p:cNvPr id="6" name="Text 3"/>
+          <p:cNvPr id="4" name="Text 1"/>
           <p:cNvSpPr/>
           <p:nvPr/>
         </p:nvSpPr>
         <p:spPr>
           <a:xfrm>
-            <a:off x="5349240" y="6089904"/>
-            <a:ext cx="6659575" cy="347472"/>
+            <a:off x="5349240" y="1005840"/>
+            <a:ext cx="6522415" cy="731520"/>
           </a:xfrm>
           <a:prstGeom prst="rect">
             <a:avLst/>
@@ -19611,24 +19240,68 @@
           <a:ln/>
         </p:spPr>
         <p:txBody>
-          <a:bodyPr wrap="square" lIns="0" tIns="0" rIns="0" bIns="0" rtlCol="0" anchor="ctr"/>
+          <a:bodyPr wrap="square" lIns="0" tIns="0" rIns="0" bIns="0" rtlCol="0" anchor="ctr">
+            <a:normAutofit/>
+          </a:bodyPr>
           <a:lstStyle/>
           <a:p>
             <a:pPr algn="ctr" indent="0" marL="0">
               <a:buNone/>
             </a:pPr>
             <a:r>
-              <a:rPr lang="en-US" sz="1600" i="1" dirty="0">
-                <a:solidFill>
-                  <a:srgbClr val="555555"/>
+              <a:rPr lang="en-US" sz="3600" b="1" dirty="0">
+                <a:solidFill>
+                  <a:srgbClr val="990011"/>
                 </a:solidFill>
                 <a:latin typeface="Times New Roman" pitchFamily="34" charset="0"/>
                 <a:ea typeface="Times New Roman" pitchFamily="34" charset="-122"/>
                 <a:cs typeface="Times New Roman" pitchFamily="34" charset="-120"/>
               </a:rPr>
-              <a:t>Illustration: Stouffer's example</a:t>
-            </a:r>
-            <a:endParaRPr lang="en-US" sz="1600" dirty="0"/>
+              <a:t>Evaluation 1</a:t>
+            </a:r>
+            <a:endParaRPr lang="en-US" sz="3600" dirty="0"/>
+          </a:p>
+        </p:txBody>
+      </p:sp>
+      <p:sp>
+        <p:nvSpPr>
+          <p:cNvPr id="5" name="Text 2"/>
+          <p:cNvSpPr/>
+          <p:nvPr/>
+        </p:nvSpPr>
+        <p:spPr>
+          <a:xfrm>
+            <a:off x="5349240" y="1783080"/>
+            <a:ext cx="6522415" cy="4663440"/>
+          </a:xfrm>
+          <a:prstGeom prst="rect">
+            <a:avLst/>
+          </a:prstGeom>
+          <a:noFill/>
+          <a:ln/>
+        </p:spPr>
+        <p:txBody>
+          <a:bodyPr wrap="square" lIns="0" tIns="0" rIns="0" bIns="0" rtlCol="0" anchor="t"/>
+          <a:lstStyle/>
+          <a:p>
+            <a:pPr algn="l" indent="0" marL="0">
+              <a:spcAft>
+                <a:spcPts val="800"/>
+              </a:spcAft>
+              <a:buNone/>
+            </a:pPr>
+            <a:r>
+              <a:rPr lang="en-US" sz="4000" dirty="0">
+                <a:solidFill>
+                  <a:srgbClr val="111111"/>
+                </a:solidFill>
+                <a:latin typeface="Times New Roman" pitchFamily="34" charset="0"/>
+                <a:ea typeface="Times New Roman" pitchFamily="34" charset="-122"/>
+                <a:cs typeface="Times New Roman" pitchFamily="34" charset="-120"/>
+              </a:rPr>
+              <a:t>Give two characteristics of migrants.</a:t>
+            </a:r>
+            <a:endParaRPr lang="en-US" sz="4000" dirty="0"/>
           </a:p>
         </p:txBody>
       </p:sp>
@@ -19738,7 +19411,7 @@
                 <a:ea typeface="Calibri" pitchFamily="34" charset="-122"/>
                 <a:cs typeface="Calibri" pitchFamily="34" charset="-120"/>
               </a:rPr>
-              <a:t>BOARD SUMMARY</a:t>
+              <a:t>FORMATIVE EVALUATION</a:t>
             </a:r>
             <a:endParaRPr lang="en-US" sz="1400" dirty="0"/>
           </a:p>
@@ -19803,7 +19476,7 @@
                 <a:ea typeface="Times New Roman" pitchFamily="34" charset="-122"/>
                 <a:cs typeface="Times New Roman" pitchFamily="34" charset="-120"/>
               </a:rPr>
-              <a:t>3. Calculations with the Models</a:t>
+              <a:t>Expected Answer</a:t>
             </a:r>
             <a:endParaRPr lang="en-US" sz="3600" dirty="0"/>
           </a:p>
@@ -19837,7 +19510,7 @@
               <a:buNone/>
             </a:pPr>
             <a:r>
-              <a:rPr lang="en-US" sz="4000" b="1" dirty="0">
+              <a:rPr lang="en-US" sz="4000" dirty="0">
                 <a:solidFill>
                   <a:srgbClr val="111111"/>
                 </a:solidFill>
@@ -19845,24 +19518,7 @@
                 <a:ea typeface="Times New Roman" pitchFamily="34" charset="-122"/>
                 <a:cs typeface="Times New Roman" pitchFamily="34" charset="-120"/>
               </a:rPr>
-              <a:t>Interpretation: </a:t>
-            </a:r>
-            <a:pPr algn="l" indent="0" marL="0">
-              <a:spcAft>
-                <a:spcPts val="800"/>
-              </a:spcAft>
-              <a:buNone/>
-            </a:pPr>
-            <a:r>
-              <a:rPr lang="en-US" sz="4000" dirty="0">
-                <a:solidFill>
-                  <a:srgbClr val="111111"/>
-                </a:solidFill>
-                <a:latin typeface="Times New Roman" pitchFamily="34" charset="0"/>
-                <a:ea typeface="Times New Roman" pitchFamily="34" charset="-122"/>
-                <a:cs typeface="Times New Roman" pitchFamily="34" charset="-120"/>
-              </a:rPr>
-              <a:t>A ratio above 1 shows a strong pull of the final destination compared with the towns on the way.</a:t>
+              <a:t>They are mostly young adults, often single, and skilled people migrate more (brain drain) (any two).</a:t>
             </a:r>
             <a:endParaRPr lang="en-US" sz="4000" dirty="0"/>
           </a:p>
@@ -20039,7 +19695,7 @@
                 <a:ea typeface="Times New Roman" pitchFamily="34" charset="-122"/>
                 <a:cs typeface="Times New Roman" pitchFamily="34" charset="-120"/>
               </a:rPr>
-              <a:t>Evaluation 1</a:t>
+              <a:t>Evaluation 2</a:t>
             </a:r>
             <a:endParaRPr lang="en-US" sz="3600" dirty="0"/>
           </a:p>
@@ -20081,7 +19737,7 @@
                 <a:ea typeface="Times New Roman" pitchFamily="34" charset="-122"/>
                 <a:cs typeface="Times New Roman" pitchFamily="34" charset="-120"/>
               </a:rPr>
-              <a:t>Give two characteristics of migrants.</a:t>
+              <a:t>State the main difference between the gravity model and Stouffer's model.</a:t>
             </a:r>
             <a:endParaRPr lang="en-US" sz="4000" dirty="0"/>
           </a:p>
@@ -20300,7 +19956,7 @@
                 <a:ea typeface="Times New Roman" pitchFamily="34" charset="-122"/>
                 <a:cs typeface="Times New Roman" pitchFamily="34" charset="-120"/>
               </a:rPr>
-              <a:t>They are mostly young adults, often single, and skilled people migrate more (brain drain) (any two).</a:t>
+              <a:t>The gravity model uses population and distance; Stouffer uses the opportunities at the destination and on the way.</a:t>
             </a:r>
             <a:endParaRPr lang="en-US" sz="4000" dirty="0"/>
           </a:p>
@@ -20412,7 +20068,7 @@
                 <a:ea typeface="Calibri" pitchFamily="34" charset="-122"/>
                 <a:cs typeface="Calibri" pitchFamily="34" charset="-120"/>
               </a:rPr>
-              <a:t>FORMATIVE EVALUATION</a:t>
+              <a:t>REMEDIATION</a:t>
             </a:r>
             <a:endParaRPr lang="en-US" sz="1400" dirty="0"/>
           </a:p>
@@ -20435,7 +20091,7 @@
         <p:spPr>
           <a:xfrm>
             <a:off x="0" y="658368"/>
-            <a:ext cx="5120640" cy="5833872"/>
+            <a:ext cx="1463040" cy="5833872"/>
           </a:xfrm>
           <a:prstGeom prst="rect">
             <a:avLst/>
@@ -20450,8 +20106,8 @@
         </p:nvSpPr>
         <p:spPr>
           <a:xfrm>
-            <a:off x="5349240" y="1005840"/>
-            <a:ext cx="6522415" cy="731520"/>
+            <a:off x="1691640" y="1005840"/>
+            <a:ext cx="10180015" cy="731520"/>
           </a:xfrm>
           <a:prstGeom prst="rect">
             <a:avLst/>
@@ -20477,7 +20133,7 @@
                 <a:ea typeface="Times New Roman" pitchFamily="34" charset="-122"/>
                 <a:cs typeface="Times New Roman" pitchFamily="34" charset="-120"/>
               </a:rPr>
-              <a:t>Evaluation 2</a:t>
+              <a:t>Remediation</a:t>
             </a:r>
             <a:endParaRPr lang="en-US" sz="3600" dirty="0"/>
           </a:p>
@@ -20491,8 +20147,8 @@
         </p:nvSpPr>
         <p:spPr>
           <a:xfrm>
-            <a:off x="5349240" y="1783080"/>
-            <a:ext cx="6522415" cy="4663440"/>
+            <a:off x="1691640" y="1783080"/>
+            <a:ext cx="10180015" cy="4663440"/>
           </a:xfrm>
           <a:prstGeom prst="rect">
             <a:avLst/>
@@ -20511,7 +20167,7 @@
               <a:buNone/>
             </a:pPr>
             <a:r>
-              <a:rPr lang="en-US" sz="4000" dirty="0">
+              <a:rPr lang="en-US" sz="4000" b="1" dirty="0">
                 <a:solidFill>
                   <a:srgbClr val="111111"/>
                 </a:solidFill>
@@ -20519,7 +20175,73 @@
                 <a:ea typeface="Times New Roman" pitchFamily="34" charset="-122"/>
                 <a:cs typeface="Times New Roman" pitchFamily="34" charset="-120"/>
               </a:rPr>
-              <a:t>State the main difference between the gravity model and Stouffer's model.</a:t>
+              <a:t>Fill in the blanks:</a:t>
+            </a:r>
+            <a:endParaRPr lang="en-US" sz="4000" dirty="0"/>
+          </a:p>
+          <a:p>
+            <a:pPr algn="l" marL="342900" indent="-342900">
+              <a:spcAft>
+                <a:spcPts val="800"/>
+              </a:spcAft>
+              <a:buSzPct val="100000"/>
+              <a:buFont typeface="+mj-lt"/>
+              <a:buAutoNum type="arabicPeriod" startAt="1"/>
+            </a:pPr>
+            <a:r>
+              <a:rPr lang="en-US" sz="4000" dirty="0">
+                <a:solidFill>
+                  <a:srgbClr val="111111"/>
+                </a:solidFill>
+                <a:latin typeface="Times New Roman" pitchFamily="34" charset="0"/>
+                <a:ea typeface="Times New Roman" pitchFamily="34" charset="-122"/>
+                <a:cs typeface="Times New Roman" pitchFamily="34" charset="-120"/>
+              </a:rPr>
+              <a:t>Zipf's law says that migration decreases with ______.</a:t>
+            </a:r>
+            <a:endParaRPr lang="en-US" sz="4000" dirty="0"/>
+          </a:p>
+          <a:p>
+            <a:pPr algn="l" marL="342900" indent="-342900">
+              <a:spcAft>
+                <a:spcPts val="800"/>
+              </a:spcAft>
+              <a:buSzPct val="100000"/>
+              <a:buFont typeface="+mj-lt"/>
+              <a:buAutoNum type="arabicPeriod" startAt="1"/>
+            </a:pPr>
+            <a:r>
+              <a:rPr lang="en-US" sz="4000" dirty="0">
+                <a:solidFill>
+                  <a:srgbClr val="111111"/>
+                </a:solidFill>
+                <a:latin typeface="Times New Roman" pitchFamily="34" charset="0"/>
+                <a:ea typeface="Times New Roman" pitchFamily="34" charset="-122"/>
+                <a:cs typeface="Times New Roman" pitchFamily="34" charset="-120"/>
+              </a:rPr>
+              <a:t>In the gravity model, distance is ______.</a:t>
+            </a:r>
+            <a:endParaRPr lang="en-US" sz="4000" dirty="0"/>
+          </a:p>
+          <a:p>
+            <a:pPr algn="l" marL="342900" indent="-342900">
+              <a:spcAft>
+                <a:spcPts val="800"/>
+              </a:spcAft>
+              <a:buSzPct val="100000"/>
+              <a:buFont typeface="+mj-lt"/>
+              <a:buAutoNum type="arabicPeriod" startAt="1"/>
+            </a:pPr>
+            <a:r>
+              <a:rPr lang="en-US" sz="4000" dirty="0">
+                <a:solidFill>
+                  <a:srgbClr val="111111"/>
+                </a:solidFill>
+                <a:latin typeface="Times New Roman" pitchFamily="34" charset="0"/>
+                <a:ea typeface="Times New Roman" pitchFamily="34" charset="-122"/>
+                <a:cs typeface="Times New Roman" pitchFamily="34" charset="-120"/>
+              </a:rPr>
+              <a:t>Stouffer speaks of ______ opportunities.</a:t>
             </a:r>
             <a:endParaRPr lang="en-US" sz="4000" dirty="0"/>
           </a:p>
@@ -20631,7 +20353,7 @@
                 <a:ea typeface="Calibri" pitchFamily="34" charset="-122"/>
                 <a:cs typeface="Calibri" pitchFamily="34" charset="-120"/>
               </a:rPr>
-              <a:t>FORMATIVE EVALUATION</a:t>
+              <a:t>HOMEWORK</a:t>
             </a:r>
             <a:endParaRPr lang="en-US" sz="1400" dirty="0"/>
           </a:p>
@@ -20696,7 +20418,7 @@
                 <a:ea typeface="Times New Roman" pitchFamily="34" charset="-122"/>
                 <a:cs typeface="Times New Roman" pitchFamily="34" charset="-120"/>
               </a:rPr>
-              <a:t>Expected Answer</a:t>
+              <a:t>Homework</a:t>
             </a:r>
             <a:endParaRPr lang="en-US" sz="3600" dirty="0"/>
           </a:p>
@@ -20738,7 +20460,7 @@
                 <a:ea typeface="Times New Roman" pitchFamily="34" charset="-122"/>
                 <a:cs typeface="Times New Roman" pitchFamily="34" charset="-120"/>
               </a:rPr>
-              <a:t>The gravity model uses population and distance; Stouffer uses the opportunities at the destination and on the way.</a:t>
+              <a:t>Define spatial interaction.</a:t>
             </a:r>
             <a:endParaRPr lang="en-US" sz="4000" dirty="0"/>
           </a:p>
@@ -20850,7 +20572,7 @@
                 <a:ea typeface="Calibri" pitchFamily="34" charset="-122"/>
                 <a:cs typeface="Calibri" pitchFamily="34" charset="-120"/>
               </a:rPr>
-              <a:t>REMEDIATION</a:t>
+              <a:t>NEXT LESSON</a:t>
             </a:r>
             <a:endParaRPr lang="en-US" sz="1400" dirty="0"/>
           </a:p>
@@ -20873,7 +20595,7 @@
         <p:spPr>
           <a:xfrm>
             <a:off x="0" y="658368"/>
-            <a:ext cx="1463040" cy="5833872"/>
+            <a:ext cx="5120640" cy="5833872"/>
           </a:xfrm>
           <a:prstGeom prst="rect">
             <a:avLst/>
@@ -20888,8 +20610,8 @@
         </p:nvSpPr>
         <p:spPr>
           <a:xfrm>
-            <a:off x="1691640" y="1005840"/>
-            <a:ext cx="10180015" cy="731520"/>
+            <a:off x="5349240" y="1005840"/>
+            <a:ext cx="6522415" cy="731520"/>
           </a:xfrm>
           <a:prstGeom prst="rect">
             <a:avLst/>
@@ -20915,7 +20637,7 @@
                 <a:ea typeface="Times New Roman" pitchFamily="34" charset="-122"/>
                 <a:cs typeface="Times New Roman" pitchFamily="34" charset="-120"/>
               </a:rPr>
-              <a:t>Remediation</a:t>
+              <a:t>Next Lesson</a:t>
             </a:r>
             <a:endParaRPr lang="en-US" sz="3600" dirty="0"/>
           </a:p>
@@ -20929,8 +20651,8 @@
         </p:nvSpPr>
         <p:spPr>
           <a:xfrm>
-            <a:off x="1691640" y="1783080"/>
-            <a:ext cx="10180015" cy="4663440"/>
+            <a:off x="5349240" y="1783080"/>
+            <a:ext cx="6522415" cy="4663440"/>
           </a:xfrm>
           <a:prstGeom prst="rect">
             <a:avLst/>
@@ -20939,10 +20661,10 @@
           <a:ln/>
         </p:spPr>
         <p:txBody>
-          <a:bodyPr wrap="square" lIns="0" tIns="0" rIns="0" bIns="0" rtlCol="0" anchor="t"/>
-          <a:lstStyle/>
-          <a:p>
-            <a:pPr algn="l" indent="0" marL="0">
+          <a:bodyPr wrap="square" lIns="0" tIns="0" rIns="0" bIns="0" rtlCol="0" anchor="ctr"/>
+          <a:lstStyle/>
+          <a:p>
+            <a:pPr algn="ctr" indent="0" marL="0">
               <a:spcAft>
                 <a:spcPts val="800"/>
               </a:spcAft>
@@ -20957,73 +20679,27 @@
                 <a:ea typeface="Times New Roman" pitchFamily="34" charset="-122"/>
                 <a:cs typeface="Times New Roman" pitchFamily="34" charset="-120"/>
               </a:rPr>
-              <a:t>Fill in the blanks:</a:t>
+              <a:t>Our next lesson will be on:</a:t>
             </a:r>
             <a:endParaRPr lang="en-US" sz="4000" dirty="0"/>
           </a:p>
           <a:p>
-            <a:pPr algn="l" marL="342900" indent="-342900">
+            <a:pPr algn="ctr" indent="0" marL="0">
               <a:spcAft>
                 <a:spcPts val="800"/>
               </a:spcAft>
-              <a:buSzPct val="100000"/>
-              <a:buFont typeface="+mj-lt"/>
-              <a:buAutoNum type="arabicPeriod" startAt="1"/>
+              <a:buNone/>
             </a:pPr>
             <a:r>
-              <a:rPr lang="en-US" sz="4000" dirty="0">
-                <a:solidFill>
-                  <a:srgbClr val="111111"/>
+              <a:rPr lang="en-US" sz="4000" b="1" dirty="0">
+                <a:solidFill>
+                  <a:srgbClr val="990011"/>
                 </a:solidFill>
                 <a:latin typeface="Times New Roman" pitchFamily="34" charset="0"/>
                 <a:ea typeface="Times New Roman" pitchFamily="34" charset="-122"/>
                 <a:cs typeface="Times New Roman" pitchFamily="34" charset="-120"/>
               </a:rPr>
-              <a:t>Zipf's law says that migration decreases with ______.</a:t>
-            </a:r>
-            <a:endParaRPr lang="en-US" sz="4000" dirty="0"/>
-          </a:p>
-          <a:p>
-            <a:pPr algn="l" marL="342900" indent="-342900">
-              <a:spcAft>
-                <a:spcPts val="800"/>
-              </a:spcAft>
-              <a:buSzPct val="100000"/>
-              <a:buFont typeface="+mj-lt"/>
-              <a:buAutoNum type="arabicPeriod" startAt="1"/>
-            </a:pPr>
-            <a:r>
-              <a:rPr lang="en-US" sz="4000" dirty="0">
-                <a:solidFill>
-                  <a:srgbClr val="111111"/>
-                </a:solidFill>
-                <a:latin typeface="Times New Roman" pitchFamily="34" charset="0"/>
-                <a:ea typeface="Times New Roman" pitchFamily="34" charset="-122"/>
-                <a:cs typeface="Times New Roman" pitchFamily="34" charset="-120"/>
-              </a:rPr>
-              <a:t>In the gravity model, distance is ______.</a:t>
-            </a:r>
-            <a:endParaRPr lang="en-US" sz="4000" dirty="0"/>
-          </a:p>
-          <a:p>
-            <a:pPr algn="l" marL="342900" indent="-342900">
-              <a:spcAft>
-                <a:spcPts val="800"/>
-              </a:spcAft>
-              <a:buSzPct val="100000"/>
-              <a:buFont typeface="+mj-lt"/>
-              <a:buAutoNum type="arabicPeriod" startAt="1"/>
-            </a:pPr>
-            <a:r>
-              <a:rPr lang="en-US" sz="4000" dirty="0">
-                <a:solidFill>
-                  <a:srgbClr val="111111"/>
-                </a:solidFill>
-                <a:latin typeface="Times New Roman" pitchFamily="34" charset="0"/>
-                <a:ea typeface="Times New Roman" pitchFamily="34" charset="-122"/>
-                <a:cs typeface="Times New Roman" pitchFamily="34" charset="-120"/>
-              </a:rPr>
-              <a:t>Stouffer speaks of ______ opportunities.</a:t>
+              <a:t>Lesson 14: Spatial Interaction</a:t>
             </a:r>
             <a:endParaRPr lang="en-US" sz="4000" dirty="0"/>
           </a:p>
@@ -21135,795 +20811,6 @@
                 <a:ea typeface="Calibri" pitchFamily="34" charset="-122"/>
                 <a:cs typeface="Calibri" pitchFamily="34" charset="-120"/>
               </a:rPr>
-              <a:t>HOMEWORK</a:t>
-            </a:r>
-            <a:endParaRPr lang="en-US" sz="1400" dirty="0"/>
-          </a:p>
-        </p:txBody>
-      </p:sp>
-      <p:pic>
-        <p:nvPicPr>
-          <p:cNvPr id="3" name="Image 0" descr="/home/claude/f4/img/minesec_sheet.png">    </p:cNvPr>
-          <p:cNvPicPr>
-            <a:picLocks noChangeAspect="1"/>
-          </p:cNvPicPr>
-          <p:nvPr/>
-        </p:nvPicPr>
-        <p:blipFill>
-          <a:blip r:embed="rId1"/>
-          <a:stretch>
-            <a:fillRect/>
-          </a:stretch>
-        </p:blipFill>
-        <p:spPr>
-          <a:xfrm>
-            <a:off x="0" y="658368"/>
-            <a:ext cx="5120640" cy="5833872"/>
-          </a:xfrm>
-          <a:prstGeom prst="rect">
-            <a:avLst/>
-          </a:prstGeom>
-        </p:spPr>
-      </p:pic>
-      <p:sp>
-        <p:nvSpPr>
-          <p:cNvPr id="4" name="Text 1"/>
-          <p:cNvSpPr/>
-          <p:nvPr/>
-        </p:nvSpPr>
-        <p:spPr>
-          <a:xfrm>
-            <a:off x="5349240" y="1005840"/>
-            <a:ext cx="6522415" cy="731520"/>
-          </a:xfrm>
-          <a:prstGeom prst="rect">
-            <a:avLst/>
-          </a:prstGeom>
-          <a:noFill/>
-          <a:ln/>
-        </p:spPr>
-        <p:txBody>
-          <a:bodyPr wrap="square" lIns="0" tIns="0" rIns="0" bIns="0" rtlCol="0" anchor="ctr">
-            <a:normAutofit/>
-          </a:bodyPr>
-          <a:lstStyle/>
-          <a:p>
-            <a:pPr algn="ctr" indent="0" marL="0">
-              <a:buNone/>
-            </a:pPr>
-            <a:r>
-              <a:rPr lang="en-US" sz="3600" b="1" dirty="0">
-                <a:solidFill>
-                  <a:srgbClr val="990011"/>
-                </a:solidFill>
-                <a:latin typeface="Times New Roman" pitchFamily="34" charset="0"/>
-                <a:ea typeface="Times New Roman" pitchFamily="34" charset="-122"/>
-                <a:cs typeface="Times New Roman" pitchFamily="34" charset="-120"/>
-              </a:rPr>
-              <a:t>Homework</a:t>
-            </a:r>
-            <a:endParaRPr lang="en-US" sz="3600" dirty="0"/>
-          </a:p>
-        </p:txBody>
-      </p:sp>
-      <p:sp>
-        <p:nvSpPr>
-          <p:cNvPr id="5" name="Text 2"/>
-          <p:cNvSpPr/>
-          <p:nvPr/>
-        </p:nvSpPr>
-        <p:spPr>
-          <a:xfrm>
-            <a:off x="5349240" y="1783080"/>
-            <a:ext cx="6522415" cy="4663440"/>
-          </a:xfrm>
-          <a:prstGeom prst="rect">
-            <a:avLst/>
-          </a:prstGeom>
-          <a:noFill/>
-          <a:ln/>
-        </p:spPr>
-        <p:txBody>
-          <a:bodyPr wrap="square" lIns="0" tIns="0" rIns="0" bIns="0" rtlCol="0" anchor="t"/>
-          <a:lstStyle/>
-          <a:p>
-            <a:pPr algn="l" indent="0" marL="0">
-              <a:spcAft>
-                <a:spcPts val="800"/>
-              </a:spcAft>
-              <a:buNone/>
-            </a:pPr>
-            <a:r>
-              <a:rPr lang="en-US" sz="4000" dirty="0">
-                <a:solidFill>
-                  <a:srgbClr val="111111"/>
-                </a:solidFill>
-                <a:latin typeface="Times New Roman" pitchFamily="34" charset="0"/>
-                <a:ea typeface="Times New Roman" pitchFamily="34" charset="-122"/>
-                <a:cs typeface="Times New Roman" pitchFamily="34" charset="-120"/>
-              </a:rPr>
-              <a:t>Define spatial interaction.</a:t>
-            </a:r>
-            <a:endParaRPr lang="en-US" sz="4000" dirty="0"/>
-          </a:p>
-        </p:txBody>
-      </p:sp>
-      <p:sp>
-        <p:nvSpPr>
-          <p:cNvPr id="25" name="Slide Number Placeholder 0"/>
-          <p:cNvSpPr>
-            <a:spLocks noGrp="1"/>
-          </p:cNvSpPr>
-          <p:nvPr>
-            <p:ph type="sldNum" sz="quarter" idx="4294967295"/>
-          </p:nvPr>
-        </p:nvSpPr>
-        <p:spPr>
-          <a:xfrm>
-            <a:off x="27432" y="91440"/>
-            <a:ext cx="585216" cy="475488"/>
-          </a:xfrm>
-          <a:prstGeom prst="rect">
-            <a:avLst/>
-          </a:prstGeom>
-          <a:extLst>
-            <a:ext uri="{C572A759-6A51-4108-AA02-DFA0A04FC94B}">
-              <ma14:wrappingTextBoxFlag xmlns:ma14="http://schemas.microsoft.com/office/mac/drawingml/2011/main" val="0"/>
-            </a:ext>
-          </a:extLst>
-        </p:spPr>
-        <p:txBody>
-          <a:bodyPr/>
-          <a:lstStyle>
-            <a:lvl1pPr>
-              <a:defRPr sz="2000">
-                <a:solidFill>
-                  <a:srgbClr val="FFFFFF"/>
-                </a:solidFill>
-                <a:latin typeface="Calibri"/>
-                <a:ea typeface="Calibri"/>
-                <a:cs typeface="Calibri"/>
-              </a:defRPr>
-            </a:lvl1pPr>
-          </a:lstStyle>
-          <a:p>
-            <a:pPr algn="ctr"/>
-            <a:fld id="{F7021451-1387-4CA6-816F-3879F97B5CBC}" type="slidenum">
-              <a:rPr b="1" lang="en-US"/>
-              <a:t>58</a:t>
-            </a:fld>
-            <a:endParaRPr lang="en-US"/>
-          </a:p>
-        </p:txBody>
-      </p:sp>
-    </p:spTree>
-  </p:cSld>
-  <p:clrMapOvr>
-    <a:masterClrMapping/>
-  </p:clrMapOvr>
-</p:sld>
-</file>
-
-<file path=ppt/slides/slide59.xml><?xml version="1.0" encoding="utf-8"?>
-<p:sld xmlns:a="http://schemas.openxmlformats.org/drawingml/2006/main" xmlns:r="http://schemas.openxmlformats.org/officeDocument/2006/relationships" xmlns:p="http://schemas.openxmlformats.org/presentationml/2006/main">
-  <p:cSld name="Slide 59">
-    <p:spTree>
-      <p:nvGrpSpPr>
-        <p:cNvPr id="1" name=""/>
-        <p:cNvGrpSpPr/>
-        <p:nvPr/>
-      </p:nvGrpSpPr>
-      <p:grpSpPr>
-        <a:xfrm>
-          <a:off x="0" y="0"/>
-          <a:ext cx="0" cy="0"/>
-          <a:chOff x="0" y="0"/>
-          <a:chExt cx="0" cy="0"/>
-        </a:xfrm>
-      </p:grpSpPr>
-      <p:sp>
-        <p:nvSpPr>
-          <p:cNvPr id="2" name="Text 0"/>
-          <p:cNvSpPr/>
-          <p:nvPr/>
-        </p:nvSpPr>
-        <p:spPr>
-          <a:xfrm>
-            <a:off x="457200" y="713232"/>
-            <a:ext cx="11368735" cy="274320"/>
-          </a:xfrm>
-          <a:prstGeom prst="rect">
-            <a:avLst/>
-          </a:prstGeom>
-          <a:noFill/>
-          <a:ln/>
-        </p:spPr>
-        <p:txBody>
-          <a:bodyPr wrap="square" lIns="0" tIns="0" rIns="0" bIns="0" rtlCol="0" anchor="ctr"/>
-          <a:lstStyle/>
-          <a:p>
-            <a:pPr algn="r" indent="0" marL="0">
-              <a:buNone/>
-            </a:pPr>
-            <a:r>
-              <a:rPr lang="en-US" sz="1400" b="1" dirty="0">
-                <a:solidFill>
-                  <a:srgbClr val="1C3F6E"/>
-                </a:solidFill>
-                <a:latin typeface="Calibri" pitchFamily="34" charset="0"/>
-                <a:ea typeface="Calibri" pitchFamily="34" charset="-122"/>
-                <a:cs typeface="Calibri" pitchFamily="34" charset="-120"/>
-              </a:rPr>
-              <a:t>NEXT LESSON</a:t>
-            </a:r>
-            <a:endParaRPr lang="en-US" sz="1400" dirty="0"/>
-          </a:p>
-        </p:txBody>
-      </p:sp>
-      <p:pic>
-        <p:nvPicPr>
-          <p:cNvPr id="3" name="Image 0" descr="/home/claude/f4/img/minesec_sheet.png">    </p:cNvPr>
-          <p:cNvPicPr>
-            <a:picLocks noChangeAspect="1"/>
-          </p:cNvPicPr>
-          <p:nvPr/>
-        </p:nvPicPr>
-        <p:blipFill>
-          <a:blip r:embed="rId1"/>
-          <a:stretch>
-            <a:fillRect/>
-          </a:stretch>
-        </p:blipFill>
-        <p:spPr>
-          <a:xfrm>
-            <a:off x="0" y="658368"/>
-            <a:ext cx="5120640" cy="5833872"/>
-          </a:xfrm>
-          <a:prstGeom prst="rect">
-            <a:avLst/>
-          </a:prstGeom>
-        </p:spPr>
-      </p:pic>
-      <p:sp>
-        <p:nvSpPr>
-          <p:cNvPr id="4" name="Text 1"/>
-          <p:cNvSpPr/>
-          <p:nvPr/>
-        </p:nvSpPr>
-        <p:spPr>
-          <a:xfrm>
-            <a:off x="5349240" y="1005840"/>
-            <a:ext cx="6522415" cy="731520"/>
-          </a:xfrm>
-          <a:prstGeom prst="rect">
-            <a:avLst/>
-          </a:prstGeom>
-          <a:noFill/>
-          <a:ln/>
-        </p:spPr>
-        <p:txBody>
-          <a:bodyPr wrap="square" lIns="0" tIns="0" rIns="0" bIns="0" rtlCol="0" anchor="ctr">
-            <a:normAutofit/>
-          </a:bodyPr>
-          <a:lstStyle/>
-          <a:p>
-            <a:pPr algn="ctr" indent="0" marL="0">
-              <a:buNone/>
-            </a:pPr>
-            <a:r>
-              <a:rPr lang="en-US" sz="3600" b="1" dirty="0">
-                <a:solidFill>
-                  <a:srgbClr val="990011"/>
-                </a:solidFill>
-                <a:latin typeface="Times New Roman" pitchFamily="34" charset="0"/>
-                <a:ea typeface="Times New Roman" pitchFamily="34" charset="-122"/>
-                <a:cs typeface="Times New Roman" pitchFamily="34" charset="-120"/>
-              </a:rPr>
-              <a:t>Next Lesson</a:t>
-            </a:r>
-            <a:endParaRPr lang="en-US" sz="3600" dirty="0"/>
-          </a:p>
-        </p:txBody>
-      </p:sp>
-      <p:sp>
-        <p:nvSpPr>
-          <p:cNvPr id="5" name="Text 2"/>
-          <p:cNvSpPr/>
-          <p:nvPr/>
-        </p:nvSpPr>
-        <p:spPr>
-          <a:xfrm>
-            <a:off x="5349240" y="1783080"/>
-            <a:ext cx="6522415" cy="4663440"/>
-          </a:xfrm>
-          <a:prstGeom prst="rect">
-            <a:avLst/>
-          </a:prstGeom>
-          <a:noFill/>
-          <a:ln/>
-        </p:spPr>
-        <p:txBody>
-          <a:bodyPr wrap="square" lIns="0" tIns="0" rIns="0" bIns="0" rtlCol="0" anchor="ctr"/>
-          <a:lstStyle/>
-          <a:p>
-            <a:pPr algn="ctr" indent="0" marL="0">
-              <a:spcAft>
-                <a:spcPts val="800"/>
-              </a:spcAft>
-              <a:buNone/>
-            </a:pPr>
-            <a:r>
-              <a:rPr lang="en-US" sz="4000" b="1" dirty="0">
-                <a:solidFill>
-                  <a:srgbClr val="111111"/>
-                </a:solidFill>
-                <a:latin typeface="Times New Roman" pitchFamily="34" charset="0"/>
-                <a:ea typeface="Times New Roman" pitchFamily="34" charset="-122"/>
-                <a:cs typeface="Times New Roman" pitchFamily="34" charset="-120"/>
-              </a:rPr>
-              <a:t>Our next lesson will be on:</a:t>
-            </a:r>
-            <a:endParaRPr lang="en-US" sz="4000" dirty="0"/>
-          </a:p>
-          <a:p>
-            <a:pPr algn="ctr" indent="0" marL="0">
-              <a:spcAft>
-                <a:spcPts val="800"/>
-              </a:spcAft>
-              <a:buNone/>
-            </a:pPr>
-            <a:r>
-              <a:rPr lang="en-US" sz="4000" b="1" dirty="0">
-                <a:solidFill>
-                  <a:srgbClr val="990011"/>
-                </a:solidFill>
-                <a:latin typeface="Times New Roman" pitchFamily="34" charset="0"/>
-                <a:ea typeface="Times New Roman" pitchFamily="34" charset="-122"/>
-                <a:cs typeface="Times New Roman" pitchFamily="34" charset="-120"/>
-              </a:rPr>
-              <a:t>Lesson 14: Spatial Interaction</a:t>
-            </a:r>
-            <a:endParaRPr lang="en-US" sz="4000" dirty="0"/>
-          </a:p>
-        </p:txBody>
-      </p:sp>
-      <p:sp>
-        <p:nvSpPr>
-          <p:cNvPr id="25" name="Slide Number Placeholder 0"/>
-          <p:cNvSpPr>
-            <a:spLocks noGrp="1"/>
-          </p:cNvSpPr>
-          <p:nvPr>
-            <p:ph type="sldNum" sz="quarter" idx="4294967295"/>
-          </p:nvPr>
-        </p:nvSpPr>
-        <p:spPr>
-          <a:xfrm>
-            <a:off x="27432" y="91440"/>
-            <a:ext cx="585216" cy="475488"/>
-          </a:xfrm>
-          <a:prstGeom prst="rect">
-            <a:avLst/>
-          </a:prstGeom>
-          <a:extLst>
-            <a:ext uri="{C572A759-6A51-4108-AA02-DFA0A04FC94B}">
-              <ma14:wrappingTextBoxFlag xmlns:ma14="http://schemas.microsoft.com/office/mac/drawingml/2011/main" val="0"/>
-            </a:ext>
-          </a:extLst>
-        </p:spPr>
-        <p:txBody>
-          <a:bodyPr/>
-          <a:lstStyle>
-            <a:lvl1pPr>
-              <a:defRPr sz="2000">
-                <a:solidFill>
-                  <a:srgbClr val="FFFFFF"/>
-                </a:solidFill>
-                <a:latin typeface="Calibri"/>
-                <a:ea typeface="Calibri"/>
-                <a:cs typeface="Calibri"/>
-              </a:defRPr>
-            </a:lvl1pPr>
-          </a:lstStyle>
-          <a:p>
-            <a:pPr algn="ctr"/>
-            <a:fld id="{F7021451-1387-4CA6-816F-3879F97B5CBC}" type="slidenum">
-              <a:rPr b="1" lang="en-US"/>
-              <a:t>59</a:t>
-            </a:fld>
-            <a:endParaRPr lang="en-US"/>
-          </a:p>
-        </p:txBody>
-      </p:sp>
-    </p:spTree>
-  </p:cSld>
-  <p:clrMapOvr>
-    <a:masterClrMapping/>
-  </p:clrMapOvr>
-</p:sld>
-</file>
-
-<file path=ppt/slides/slide6.xml><?xml version="1.0" encoding="utf-8"?>
-<p:sld xmlns:a="http://schemas.openxmlformats.org/drawingml/2006/main" xmlns:r="http://schemas.openxmlformats.org/officeDocument/2006/relationships" xmlns:p="http://schemas.openxmlformats.org/presentationml/2006/main">
-  <p:cSld name="Slide 6">
-    <p:spTree>
-      <p:nvGrpSpPr>
-        <p:cNvPr id="1" name=""/>
-        <p:cNvGrpSpPr/>
-        <p:nvPr/>
-      </p:nvGrpSpPr>
-      <p:grpSpPr>
-        <a:xfrm>
-          <a:off x="0" y="0"/>
-          <a:ext cx="0" cy="0"/>
-          <a:chOff x="0" y="0"/>
-          <a:chExt cx="0" cy="0"/>
-        </a:xfrm>
-      </p:grpSpPr>
-      <p:sp>
-        <p:nvSpPr>
-          <p:cNvPr id="2" name="Text 0"/>
-          <p:cNvSpPr/>
-          <p:nvPr/>
-        </p:nvSpPr>
-        <p:spPr>
-          <a:xfrm>
-            <a:off x="457200" y="713232"/>
-            <a:ext cx="11368735" cy="274320"/>
-          </a:xfrm>
-          <a:prstGeom prst="rect">
-            <a:avLst/>
-          </a:prstGeom>
-          <a:noFill/>
-          <a:ln/>
-        </p:spPr>
-        <p:txBody>
-          <a:bodyPr wrap="square" lIns="0" tIns="0" rIns="0" bIns="0" rtlCol="0" anchor="ctr"/>
-          <a:lstStyle/>
-          <a:p>
-            <a:pPr algn="r" indent="0" marL="0">
-              <a:buNone/>
-            </a:pPr>
-            <a:r>
-              <a:rPr lang="en-US" sz="1400" b="1" dirty="0">
-                <a:solidFill>
-                  <a:srgbClr val="1C3F6E"/>
-                </a:solidFill>
-                <a:latin typeface="Calibri" pitchFamily="34" charset="0"/>
-                <a:ea typeface="Calibri" pitchFamily="34" charset="-122"/>
-                <a:cs typeface="Calibri" pitchFamily="34" charset="-120"/>
-              </a:rPr>
-              <a:t>LESSON PLAN</a:t>
-            </a:r>
-            <a:endParaRPr lang="en-US" sz="1400" dirty="0"/>
-          </a:p>
-        </p:txBody>
-      </p:sp>
-      <p:pic>
-        <p:nvPicPr>
-          <p:cNvPr id="3" name="Image 0" descr="/home/claude/f4/img/minesec_sheet.png">    </p:cNvPr>
-          <p:cNvPicPr>
-            <a:picLocks noChangeAspect="1"/>
-          </p:cNvPicPr>
-          <p:nvPr/>
-        </p:nvPicPr>
-        <p:blipFill>
-          <a:blip r:embed="rId1"/>
-          <a:stretch>
-            <a:fillRect/>
-          </a:stretch>
-        </p:blipFill>
-        <p:spPr>
-          <a:xfrm>
-            <a:off x="0" y="658368"/>
-            <a:ext cx="2468880" cy="5833872"/>
-          </a:xfrm>
-          <a:prstGeom prst="rect">
-            <a:avLst/>
-          </a:prstGeom>
-        </p:spPr>
-      </p:pic>
-      <p:sp>
-        <p:nvSpPr>
-          <p:cNvPr id="4" name="Text 1"/>
-          <p:cNvSpPr/>
-          <p:nvPr/>
-        </p:nvSpPr>
-        <p:spPr>
-          <a:xfrm>
-            <a:off x="2697480" y="1005840"/>
-            <a:ext cx="9174175" cy="731520"/>
-          </a:xfrm>
-          <a:prstGeom prst="rect">
-            <a:avLst/>
-          </a:prstGeom>
-          <a:noFill/>
-          <a:ln/>
-        </p:spPr>
-        <p:txBody>
-          <a:bodyPr wrap="square" lIns="0" tIns="0" rIns="0" bIns="0" rtlCol="0" anchor="ctr">
-            <a:normAutofit/>
-          </a:bodyPr>
-          <a:lstStyle/>
-          <a:p>
-            <a:pPr algn="ctr" indent="0" marL="0">
-              <a:buNone/>
-            </a:pPr>
-            <a:r>
-              <a:rPr lang="en-US" sz="3600" b="1" dirty="0">
-                <a:solidFill>
-                  <a:srgbClr val="990011"/>
-                </a:solidFill>
-                <a:latin typeface="Times New Roman" pitchFamily="34" charset="0"/>
-                <a:ea typeface="Times New Roman" pitchFamily="34" charset="-122"/>
-                <a:cs typeface="Times New Roman" pitchFamily="34" charset="-120"/>
-              </a:rPr>
-              <a:t>Lesson Plan</a:t>
-            </a:r>
-            <a:endParaRPr lang="en-US" sz="3600" dirty="0"/>
-          </a:p>
-        </p:txBody>
-      </p:sp>
-      <p:sp>
-        <p:nvSpPr>
-          <p:cNvPr id="5" name="Text 2"/>
-          <p:cNvSpPr/>
-          <p:nvPr/>
-        </p:nvSpPr>
-        <p:spPr>
-          <a:xfrm>
-            <a:off x="2697480" y="1783080"/>
-            <a:ext cx="9174175" cy="4663440"/>
-          </a:xfrm>
-          <a:prstGeom prst="rect">
-            <a:avLst/>
-          </a:prstGeom>
-          <a:noFill/>
-          <a:ln/>
-        </p:spPr>
-        <p:txBody>
-          <a:bodyPr wrap="square" lIns="0" tIns="0" rIns="0" bIns="0" rtlCol="0" anchor="t"/>
-          <a:lstStyle/>
-          <a:p>
-            <a:pPr algn="l" marL="342900" indent="-342900">
-              <a:spcAft>
-                <a:spcPts val="800"/>
-              </a:spcAft>
-              <a:buSzPct val="100000"/>
-              <a:buFont typeface="+mj-lt"/>
-              <a:buAutoNum type="arabicPeriod" startAt="1"/>
-            </a:pPr>
-            <a:r>
-              <a:rPr lang="en-US" sz="4000" dirty="0">
-                <a:solidFill>
-                  <a:srgbClr val="111111"/>
-                </a:solidFill>
-                <a:latin typeface="Times New Roman" pitchFamily="34" charset="0"/>
-                <a:ea typeface="Times New Roman" pitchFamily="34" charset="-122"/>
-                <a:cs typeface="Times New Roman" pitchFamily="34" charset="-120"/>
-              </a:rPr>
-              <a:t>Correction of the homework</a:t>
-            </a:r>
-            <a:endParaRPr lang="en-US" sz="4000" dirty="0"/>
-          </a:p>
-          <a:p>
-            <a:pPr algn="l" marL="342900" indent="-342900">
-              <a:spcAft>
-                <a:spcPts val="800"/>
-              </a:spcAft>
-              <a:buSzPct val="100000"/>
-              <a:buFont typeface="+mj-lt"/>
-              <a:buAutoNum type="arabicPeriod" startAt="1"/>
-            </a:pPr>
-            <a:r>
-              <a:rPr lang="en-US" sz="4000" dirty="0">
-                <a:solidFill>
-                  <a:srgbClr val="111111"/>
-                </a:solidFill>
-                <a:latin typeface="Times New Roman" pitchFamily="34" charset="0"/>
-                <a:ea typeface="Times New Roman" pitchFamily="34" charset="-122"/>
-                <a:cs typeface="Times New Roman" pitchFamily="34" charset="-120"/>
-              </a:rPr>
-              <a:t>Objectives and recall</a:t>
-            </a:r>
-            <a:endParaRPr lang="en-US" sz="4000" dirty="0"/>
-          </a:p>
-          <a:p>
-            <a:pPr algn="l" marL="342900" indent="-342900">
-              <a:spcAft>
-                <a:spcPts val="800"/>
-              </a:spcAft>
-              <a:buSzPct val="100000"/>
-              <a:buFont typeface="+mj-lt"/>
-              <a:buAutoNum type="arabicPeriod" startAt="1"/>
-            </a:pPr>
-            <a:r>
-              <a:rPr lang="en-US" sz="4000" dirty="0">
-                <a:solidFill>
-                  <a:srgbClr val="111111"/>
-                </a:solidFill>
-                <a:latin typeface="Times New Roman" pitchFamily="34" charset="0"/>
-                <a:ea typeface="Times New Roman" pitchFamily="34" charset="-122"/>
-                <a:cs typeface="Times New Roman" pitchFamily="34" charset="-120"/>
-              </a:rPr>
-              <a:t>Real-life situation and action to take</a:t>
-            </a:r>
-            <a:endParaRPr lang="en-US" sz="4000" dirty="0"/>
-          </a:p>
-          <a:p>
-            <a:pPr algn="l" marL="342900" indent="-342900">
-              <a:spcAft>
-                <a:spcPts val="800"/>
-              </a:spcAft>
-              <a:buSzPct val="100000"/>
-              <a:buFont typeface="+mj-lt"/>
-              <a:buAutoNum type="arabicPeriod" startAt="1"/>
-            </a:pPr>
-            <a:r>
-              <a:rPr lang="en-US" sz="4000" dirty="0">
-                <a:solidFill>
-                  <a:srgbClr val="111111"/>
-                </a:solidFill>
-                <a:latin typeface="Times New Roman" pitchFamily="34" charset="0"/>
-                <a:ea typeface="Times New Roman" pitchFamily="34" charset="-122"/>
-                <a:cs typeface="Times New Roman" pitchFamily="34" charset="-120"/>
-              </a:rPr>
-              <a:t>Learning activities</a:t>
-            </a:r>
-            <a:endParaRPr lang="en-US" sz="4000" dirty="0"/>
-          </a:p>
-          <a:p>
-            <a:pPr algn="l" marL="342900" indent="-342900">
-              <a:spcAft>
-                <a:spcPts val="800"/>
-              </a:spcAft>
-              <a:buSzPct val="100000"/>
-              <a:buFont typeface="+mj-lt"/>
-              <a:buAutoNum type="arabicPeriod" startAt="1"/>
-            </a:pPr>
-            <a:r>
-              <a:rPr lang="en-US" sz="4000" dirty="0">
-                <a:solidFill>
-                  <a:srgbClr val="111111"/>
-                </a:solidFill>
-                <a:latin typeface="Times New Roman" pitchFamily="34" charset="0"/>
-                <a:ea typeface="Times New Roman" pitchFamily="34" charset="-122"/>
-                <a:cs typeface="Times New Roman" pitchFamily="34" charset="-120"/>
-              </a:rPr>
-              <a:t>Board summary</a:t>
-            </a:r>
-            <a:endParaRPr lang="en-US" sz="4000" dirty="0"/>
-          </a:p>
-          <a:p>
-            <a:pPr algn="l" marL="342900" indent="-342900">
-              <a:spcAft>
-                <a:spcPts val="800"/>
-              </a:spcAft>
-              <a:buSzPct val="100000"/>
-              <a:buFont typeface="+mj-lt"/>
-              <a:buAutoNum type="arabicPeriod" startAt="1"/>
-            </a:pPr>
-            <a:r>
-              <a:rPr lang="en-US" sz="4000" dirty="0">
-                <a:solidFill>
-                  <a:srgbClr val="111111"/>
-                </a:solidFill>
-                <a:latin typeface="Times New Roman" pitchFamily="34" charset="0"/>
-                <a:ea typeface="Times New Roman" pitchFamily="34" charset="-122"/>
-                <a:cs typeface="Times New Roman" pitchFamily="34" charset="-120"/>
-              </a:rPr>
-              <a:t>Evaluation, remediation and homework</a:t>
-            </a:r>
-            <a:endParaRPr lang="en-US" sz="4000" dirty="0"/>
-          </a:p>
-        </p:txBody>
-      </p:sp>
-      <p:sp>
-        <p:nvSpPr>
-          <p:cNvPr id="25" name="Slide Number Placeholder 0"/>
-          <p:cNvSpPr>
-            <a:spLocks noGrp="1"/>
-          </p:cNvSpPr>
-          <p:nvPr>
-            <p:ph type="sldNum" sz="quarter" idx="4294967295"/>
-          </p:nvPr>
-        </p:nvSpPr>
-        <p:spPr>
-          <a:xfrm>
-            <a:off x="27432" y="91440"/>
-            <a:ext cx="585216" cy="475488"/>
-          </a:xfrm>
-          <a:prstGeom prst="rect">
-            <a:avLst/>
-          </a:prstGeom>
-          <a:extLst>
-            <a:ext uri="{C572A759-6A51-4108-AA02-DFA0A04FC94B}">
-              <ma14:wrappingTextBoxFlag xmlns:ma14="http://schemas.microsoft.com/office/mac/drawingml/2011/main" val="0"/>
-            </a:ext>
-          </a:extLst>
-        </p:spPr>
-        <p:txBody>
-          <a:bodyPr/>
-          <a:lstStyle>
-            <a:lvl1pPr>
-              <a:defRPr sz="2000">
-                <a:solidFill>
-                  <a:srgbClr val="FFFFFF"/>
-                </a:solidFill>
-                <a:latin typeface="Calibri"/>
-                <a:ea typeface="Calibri"/>
-                <a:cs typeface="Calibri"/>
-              </a:defRPr>
-            </a:lvl1pPr>
-          </a:lstStyle>
-          <a:p>
-            <a:pPr algn="ctr"/>
-            <a:fld id="{F7021451-1387-4CA6-816F-3879F97B5CBC}" type="slidenum">
-              <a:rPr b="1" lang="en-US"/>
-              <a:t>6</a:t>
-            </a:fld>
-            <a:endParaRPr lang="en-US"/>
-          </a:p>
-        </p:txBody>
-      </p:sp>
-    </p:spTree>
-  </p:cSld>
-  <p:clrMapOvr>
-    <a:masterClrMapping/>
-  </p:clrMapOvr>
-</p:sld>
-</file>
-
-<file path=ppt/slides/slide60.xml><?xml version="1.0" encoding="utf-8"?>
-<p:sld xmlns:a="http://schemas.openxmlformats.org/drawingml/2006/main" xmlns:r="http://schemas.openxmlformats.org/officeDocument/2006/relationships" xmlns:p="http://schemas.openxmlformats.org/presentationml/2006/main">
-  <p:cSld name="Slide 60">
-    <p:spTree>
-      <p:nvGrpSpPr>
-        <p:cNvPr id="1" name=""/>
-        <p:cNvGrpSpPr/>
-        <p:nvPr/>
-      </p:nvGrpSpPr>
-      <p:grpSpPr>
-        <a:xfrm>
-          <a:off x="0" y="0"/>
-          <a:ext cx="0" cy="0"/>
-          <a:chOff x="0" y="0"/>
-          <a:chExt cx="0" cy="0"/>
-        </a:xfrm>
-      </p:grpSpPr>
-      <p:sp>
-        <p:nvSpPr>
-          <p:cNvPr id="2" name="Text 0"/>
-          <p:cNvSpPr/>
-          <p:nvPr/>
-        </p:nvSpPr>
-        <p:spPr>
-          <a:xfrm>
-            <a:off x="457200" y="713232"/>
-            <a:ext cx="11368735" cy="274320"/>
-          </a:xfrm>
-          <a:prstGeom prst="rect">
-            <a:avLst/>
-          </a:prstGeom>
-          <a:noFill/>
-          <a:ln/>
-        </p:spPr>
-        <p:txBody>
-          <a:bodyPr wrap="square" lIns="0" tIns="0" rIns="0" bIns="0" rtlCol="0" anchor="ctr"/>
-          <a:lstStyle/>
-          <a:p>
-            <a:pPr algn="r" indent="0" marL="0">
-              <a:buNone/>
-            </a:pPr>
-            <a:r>
-              <a:rPr lang="en-US" sz="1400" b="1" dirty="0">
-                <a:solidFill>
-                  <a:srgbClr val="1C3F6E"/>
-                </a:solidFill>
-                <a:latin typeface="Calibri" pitchFamily="34" charset="0"/>
-                <a:ea typeface="Calibri" pitchFamily="34" charset="-122"/>
-                <a:cs typeface="Calibri" pitchFamily="34" charset="-120"/>
-              </a:rPr>
               <a:t>BILINGUAL GAME</a:t>
             </a:r>
             <a:endParaRPr lang="en-US" sz="1400" dirty="0"/>
@@ -21971,7 +20858,7 @@
       </p:sp>
       <p:graphicFrame>
         <p:nvGraphicFramePr>
-          <p:cNvPr id="61" name="Table 0"/>
+          <p:cNvPr id="59" name="Table 0"/>
           <p:cNvGraphicFramePr>
             <a:graphicFrameLocks noGrp="1"/>
           </p:cNvGraphicFramePr>
@@ -23007,7 +21894,7 @@
             <a:pPr algn="ctr"/>
             <a:fld id="{F7021451-1387-4CA6-816F-3879F97B5CBC}" type="slidenum">
               <a:rPr b="1" lang="en-US"/>
-              <a:t>60</a:t>
+              <a:t>58</a:t>
             </a:fld>
             <a:endParaRPr lang="en-US"/>
           </a:p>
@@ -23021,9 +21908,9 @@
 </p:sld>
 </file>
 
-<file path=ppt/slides/slide61.xml><?xml version="1.0" encoding="utf-8"?>
+<file path=ppt/slides/slide59.xml><?xml version="1.0" encoding="utf-8"?>
 <p:sld xmlns:a="http://schemas.openxmlformats.org/drawingml/2006/main" xmlns:r="http://schemas.openxmlformats.org/officeDocument/2006/relationships" xmlns:p="http://schemas.openxmlformats.org/presentationml/2006/main">
-  <p:cSld name="Slide 61">
+  <p:cSld name="Slide 59">
     <p:spTree>
       <p:nvGrpSpPr>
         <p:cNvPr id="1" name=""/>
@@ -23118,7 +22005,7 @@
       </p:sp>
       <p:graphicFrame>
         <p:nvGraphicFramePr>
-          <p:cNvPr id="62" name="Table 0"/>
+          <p:cNvPr id="60" name="Table 0"/>
           <p:cNvGraphicFramePr>
             <a:graphicFrameLocks noGrp="1"/>
           </p:cNvGraphicFramePr>
@@ -23740,7 +22627,7 @@
             <a:pPr algn="ctr"/>
             <a:fld id="{F7021451-1387-4CA6-816F-3879F97B5CBC}" type="slidenum">
               <a:rPr b="1" lang="en-US"/>
-              <a:t>61</a:t>
+              <a:t>59</a:t>
             </a:fld>
             <a:endParaRPr lang="en-US"/>
           </a:p>
@@ -23754,9 +22641,9 @@
 </p:sld>
 </file>
 
-<file path=ppt/slides/slide62.xml><?xml version="1.0" encoding="utf-8"?>
+<file path=ppt/slides/slide6.xml><?xml version="1.0" encoding="utf-8"?>
 <p:sld xmlns:a="http://schemas.openxmlformats.org/drawingml/2006/main" xmlns:r="http://schemas.openxmlformats.org/officeDocument/2006/relationships" xmlns:p="http://schemas.openxmlformats.org/presentationml/2006/main">
-  <p:cSld name="Slide 62">
+  <p:cSld name="Slide 6">
     <p:spTree>
       <p:nvGrpSpPr>
         <p:cNvPr id="1" name=""/>
@@ -23804,6 +22691,337 @@
                 <a:ea typeface="Calibri" pitchFamily="34" charset="-122"/>
                 <a:cs typeface="Calibri" pitchFamily="34" charset="-120"/>
               </a:rPr>
+              <a:t>LESSON PLAN</a:t>
+            </a:r>
+            <a:endParaRPr lang="en-US" sz="1400" dirty="0"/>
+          </a:p>
+        </p:txBody>
+      </p:sp>
+      <p:pic>
+        <p:nvPicPr>
+          <p:cNvPr id="3" name="Image 0" descr="/home/claude/f4/img/minesec_sheet.png">    </p:cNvPr>
+          <p:cNvPicPr>
+            <a:picLocks noChangeAspect="1"/>
+          </p:cNvPicPr>
+          <p:nvPr/>
+        </p:nvPicPr>
+        <p:blipFill>
+          <a:blip r:embed="rId1"/>
+          <a:stretch>
+            <a:fillRect/>
+          </a:stretch>
+        </p:blipFill>
+        <p:spPr>
+          <a:xfrm>
+            <a:off x="0" y="658368"/>
+            <a:ext cx="2468880" cy="5833872"/>
+          </a:xfrm>
+          <a:prstGeom prst="rect">
+            <a:avLst/>
+          </a:prstGeom>
+        </p:spPr>
+      </p:pic>
+      <p:sp>
+        <p:nvSpPr>
+          <p:cNvPr id="4" name="Text 1"/>
+          <p:cNvSpPr/>
+          <p:nvPr/>
+        </p:nvSpPr>
+        <p:spPr>
+          <a:xfrm>
+            <a:off x="2697480" y="1005840"/>
+            <a:ext cx="9174175" cy="731520"/>
+          </a:xfrm>
+          <a:prstGeom prst="rect">
+            <a:avLst/>
+          </a:prstGeom>
+          <a:noFill/>
+          <a:ln/>
+        </p:spPr>
+        <p:txBody>
+          <a:bodyPr wrap="square" lIns="0" tIns="0" rIns="0" bIns="0" rtlCol="0" anchor="ctr">
+            <a:normAutofit/>
+          </a:bodyPr>
+          <a:lstStyle/>
+          <a:p>
+            <a:pPr algn="ctr" indent="0" marL="0">
+              <a:buNone/>
+            </a:pPr>
+            <a:r>
+              <a:rPr lang="en-US" sz="3600" b="1" dirty="0">
+                <a:solidFill>
+                  <a:srgbClr val="990011"/>
+                </a:solidFill>
+                <a:latin typeface="Times New Roman" pitchFamily="34" charset="0"/>
+                <a:ea typeface="Times New Roman" pitchFamily="34" charset="-122"/>
+                <a:cs typeface="Times New Roman" pitchFamily="34" charset="-120"/>
+              </a:rPr>
+              <a:t>Lesson Plan</a:t>
+            </a:r>
+            <a:endParaRPr lang="en-US" sz="3600" dirty="0"/>
+          </a:p>
+        </p:txBody>
+      </p:sp>
+      <p:sp>
+        <p:nvSpPr>
+          <p:cNvPr id="5" name="Text 2"/>
+          <p:cNvSpPr/>
+          <p:nvPr/>
+        </p:nvSpPr>
+        <p:spPr>
+          <a:xfrm>
+            <a:off x="2697480" y="1783080"/>
+            <a:ext cx="9174175" cy="4663440"/>
+          </a:xfrm>
+          <a:prstGeom prst="rect">
+            <a:avLst/>
+          </a:prstGeom>
+          <a:noFill/>
+          <a:ln/>
+        </p:spPr>
+        <p:txBody>
+          <a:bodyPr wrap="square" lIns="0" tIns="0" rIns="0" bIns="0" rtlCol="0" anchor="t"/>
+          <a:lstStyle/>
+          <a:p>
+            <a:pPr algn="l" marL="342900" indent="-342900">
+              <a:spcAft>
+                <a:spcPts val="800"/>
+              </a:spcAft>
+              <a:buSzPct val="100000"/>
+              <a:buFont typeface="+mj-lt"/>
+              <a:buAutoNum type="arabicPeriod" startAt="1"/>
+            </a:pPr>
+            <a:r>
+              <a:rPr lang="en-US" sz="4000" dirty="0">
+                <a:solidFill>
+                  <a:srgbClr val="111111"/>
+                </a:solidFill>
+                <a:latin typeface="Times New Roman" pitchFamily="34" charset="0"/>
+                <a:ea typeface="Times New Roman" pitchFamily="34" charset="-122"/>
+                <a:cs typeface="Times New Roman" pitchFamily="34" charset="-120"/>
+              </a:rPr>
+              <a:t>Correction of the homework</a:t>
+            </a:r>
+            <a:endParaRPr lang="en-US" sz="4000" dirty="0"/>
+          </a:p>
+          <a:p>
+            <a:pPr algn="l" marL="342900" indent="-342900">
+              <a:spcAft>
+                <a:spcPts val="800"/>
+              </a:spcAft>
+              <a:buSzPct val="100000"/>
+              <a:buFont typeface="+mj-lt"/>
+              <a:buAutoNum type="arabicPeriod" startAt="1"/>
+            </a:pPr>
+            <a:r>
+              <a:rPr lang="en-US" sz="4000" dirty="0">
+                <a:solidFill>
+                  <a:srgbClr val="111111"/>
+                </a:solidFill>
+                <a:latin typeface="Times New Roman" pitchFamily="34" charset="0"/>
+                <a:ea typeface="Times New Roman" pitchFamily="34" charset="-122"/>
+                <a:cs typeface="Times New Roman" pitchFamily="34" charset="-120"/>
+              </a:rPr>
+              <a:t>Objectives and recall</a:t>
+            </a:r>
+            <a:endParaRPr lang="en-US" sz="4000" dirty="0"/>
+          </a:p>
+          <a:p>
+            <a:pPr algn="l" marL="342900" indent="-342900">
+              <a:spcAft>
+                <a:spcPts val="800"/>
+              </a:spcAft>
+              <a:buSzPct val="100000"/>
+              <a:buFont typeface="+mj-lt"/>
+              <a:buAutoNum type="arabicPeriod" startAt="1"/>
+            </a:pPr>
+            <a:r>
+              <a:rPr lang="en-US" sz="4000" dirty="0">
+                <a:solidFill>
+                  <a:srgbClr val="111111"/>
+                </a:solidFill>
+                <a:latin typeface="Times New Roman" pitchFamily="34" charset="0"/>
+                <a:ea typeface="Times New Roman" pitchFamily="34" charset="-122"/>
+                <a:cs typeface="Times New Roman" pitchFamily="34" charset="-120"/>
+              </a:rPr>
+              <a:t>Real-life situation and action to take</a:t>
+            </a:r>
+            <a:endParaRPr lang="en-US" sz="4000" dirty="0"/>
+          </a:p>
+          <a:p>
+            <a:pPr algn="l" marL="342900" indent="-342900">
+              <a:spcAft>
+                <a:spcPts val="800"/>
+              </a:spcAft>
+              <a:buSzPct val="100000"/>
+              <a:buFont typeface="+mj-lt"/>
+              <a:buAutoNum type="arabicPeriod" startAt="1"/>
+            </a:pPr>
+            <a:r>
+              <a:rPr lang="en-US" sz="4000" dirty="0">
+                <a:solidFill>
+                  <a:srgbClr val="111111"/>
+                </a:solidFill>
+                <a:latin typeface="Times New Roman" pitchFamily="34" charset="0"/>
+                <a:ea typeface="Times New Roman" pitchFamily="34" charset="-122"/>
+                <a:cs typeface="Times New Roman" pitchFamily="34" charset="-120"/>
+              </a:rPr>
+              <a:t>Learning activities</a:t>
+            </a:r>
+            <a:endParaRPr lang="en-US" sz="4000" dirty="0"/>
+          </a:p>
+          <a:p>
+            <a:pPr algn="l" marL="342900" indent="-342900">
+              <a:spcAft>
+                <a:spcPts val="800"/>
+              </a:spcAft>
+              <a:buSzPct val="100000"/>
+              <a:buFont typeface="+mj-lt"/>
+              <a:buAutoNum type="arabicPeriod" startAt="1"/>
+            </a:pPr>
+            <a:r>
+              <a:rPr lang="en-US" sz="4000" dirty="0">
+                <a:solidFill>
+                  <a:srgbClr val="111111"/>
+                </a:solidFill>
+                <a:latin typeface="Times New Roman" pitchFamily="34" charset="0"/>
+                <a:ea typeface="Times New Roman" pitchFamily="34" charset="-122"/>
+                <a:cs typeface="Times New Roman" pitchFamily="34" charset="-120"/>
+              </a:rPr>
+              <a:t>Board summary</a:t>
+            </a:r>
+            <a:endParaRPr lang="en-US" sz="4000" dirty="0"/>
+          </a:p>
+          <a:p>
+            <a:pPr algn="l" marL="342900" indent="-342900">
+              <a:spcAft>
+                <a:spcPts val="800"/>
+              </a:spcAft>
+              <a:buSzPct val="100000"/>
+              <a:buFont typeface="+mj-lt"/>
+              <a:buAutoNum type="arabicPeriod" startAt="1"/>
+            </a:pPr>
+            <a:r>
+              <a:rPr lang="en-US" sz="4000" dirty="0">
+                <a:solidFill>
+                  <a:srgbClr val="111111"/>
+                </a:solidFill>
+                <a:latin typeface="Times New Roman" pitchFamily="34" charset="0"/>
+                <a:ea typeface="Times New Roman" pitchFamily="34" charset="-122"/>
+                <a:cs typeface="Times New Roman" pitchFamily="34" charset="-120"/>
+              </a:rPr>
+              <a:t>Evaluation, remediation and homework</a:t>
+            </a:r>
+            <a:endParaRPr lang="en-US" sz="4000" dirty="0"/>
+          </a:p>
+        </p:txBody>
+      </p:sp>
+      <p:sp>
+        <p:nvSpPr>
+          <p:cNvPr id="25" name="Slide Number Placeholder 0"/>
+          <p:cNvSpPr>
+            <a:spLocks noGrp="1"/>
+          </p:cNvSpPr>
+          <p:nvPr>
+            <p:ph type="sldNum" sz="quarter" idx="4294967295"/>
+          </p:nvPr>
+        </p:nvSpPr>
+        <p:spPr>
+          <a:xfrm>
+            <a:off x="27432" y="91440"/>
+            <a:ext cx="585216" cy="475488"/>
+          </a:xfrm>
+          <a:prstGeom prst="rect">
+            <a:avLst/>
+          </a:prstGeom>
+          <a:extLst>
+            <a:ext uri="{C572A759-6A51-4108-AA02-DFA0A04FC94B}">
+              <ma14:wrappingTextBoxFlag xmlns:ma14="http://schemas.microsoft.com/office/mac/drawingml/2011/main" val="0"/>
+            </a:ext>
+          </a:extLst>
+        </p:spPr>
+        <p:txBody>
+          <a:bodyPr/>
+          <a:lstStyle>
+            <a:lvl1pPr>
+              <a:defRPr sz="2000">
+                <a:solidFill>
+                  <a:srgbClr val="FFFFFF"/>
+                </a:solidFill>
+                <a:latin typeface="Calibri"/>
+                <a:ea typeface="Calibri"/>
+                <a:cs typeface="Calibri"/>
+              </a:defRPr>
+            </a:lvl1pPr>
+          </a:lstStyle>
+          <a:p>
+            <a:pPr algn="ctr"/>
+            <a:fld id="{F7021451-1387-4CA6-816F-3879F97B5CBC}" type="slidenum">
+              <a:rPr b="1" lang="en-US"/>
+              <a:t>6</a:t>
+            </a:fld>
+            <a:endParaRPr lang="en-US"/>
+          </a:p>
+        </p:txBody>
+      </p:sp>
+    </p:spTree>
+  </p:cSld>
+  <p:clrMapOvr>
+    <a:masterClrMapping/>
+  </p:clrMapOvr>
+</p:sld>
+</file>
+
+<file path=ppt/slides/slide60.xml><?xml version="1.0" encoding="utf-8"?>
+<p:sld xmlns:a="http://schemas.openxmlformats.org/drawingml/2006/main" xmlns:r="http://schemas.openxmlformats.org/officeDocument/2006/relationships" xmlns:p="http://schemas.openxmlformats.org/presentationml/2006/main">
+  <p:cSld name="Slide 60">
+    <p:spTree>
+      <p:nvGrpSpPr>
+        <p:cNvPr id="1" name=""/>
+        <p:cNvGrpSpPr/>
+        <p:nvPr/>
+      </p:nvGrpSpPr>
+      <p:grpSpPr>
+        <a:xfrm>
+          <a:off x="0" y="0"/>
+          <a:ext cx="0" cy="0"/>
+          <a:chOff x="0" y="0"/>
+          <a:chExt cx="0" cy="0"/>
+        </a:xfrm>
+      </p:grpSpPr>
+      <p:sp>
+        <p:nvSpPr>
+          <p:cNvPr id="2" name="Text 0"/>
+          <p:cNvSpPr/>
+          <p:nvPr/>
+        </p:nvSpPr>
+        <p:spPr>
+          <a:xfrm>
+            <a:off x="457200" y="713232"/>
+            <a:ext cx="11368735" cy="274320"/>
+          </a:xfrm>
+          <a:prstGeom prst="rect">
+            <a:avLst/>
+          </a:prstGeom>
+          <a:noFill/>
+          <a:ln/>
+        </p:spPr>
+        <p:txBody>
+          <a:bodyPr wrap="square" lIns="0" tIns="0" rIns="0" bIns="0" rtlCol="0" anchor="ctr"/>
+          <a:lstStyle/>
+          <a:p>
+            <a:pPr algn="r" indent="0" marL="0">
+              <a:buNone/>
+            </a:pPr>
+            <a:r>
+              <a:rPr lang="en-US" sz="1400" b="1" dirty="0">
+                <a:solidFill>
+                  <a:srgbClr val="1C3F6E"/>
+                </a:solidFill>
+                <a:latin typeface="Calibri" pitchFamily="34" charset="0"/>
+                <a:ea typeface="Calibri" pitchFamily="34" charset="-122"/>
+                <a:cs typeface="Calibri" pitchFamily="34" charset="-120"/>
+              </a:rPr>
               <a:t>LOGBOOK</a:t>
             </a:r>
             <a:endParaRPr lang="en-US" sz="1400" dirty="0"/>
@@ -23851,7 +23069,7 @@
       </p:sp>
       <p:graphicFrame>
         <p:nvGraphicFramePr>
-          <p:cNvPr id="63" name="Table 0"/>
+          <p:cNvPr id="61" name="Table 0"/>
           <p:cNvGraphicFramePr>
             <a:graphicFrameLocks noGrp="1"/>
           </p:cNvGraphicFramePr>
@@ -23961,7 +23179,7 @@
                           <a:ea typeface="Calibri" pitchFamily="34" charset="-122"/>
                           <a:cs typeface="Calibri" pitchFamily="34" charset="-120"/>
                         </a:rPr>
-                        <a:t>DEFINITIONS; Characteristics (Differentials) of Migration; Zipf and the Gravity Model; Stouffer's Intervening Opportunities; Calculations with the Models.</a:t>
+                        <a:t>DEFINITIONS; Meaning and Volume of Migration; Characteristics (Differentials) of Migration; Zipf's Law and the Gravity Model; Stouffer's Intervening Opportunities Model; Calculations Based on the Models.</a:t>
                       </a:r>
                       <a:endParaRPr lang="en-US" sz="1600" dirty="0">
                         <a:latin typeface="Calibri" charset="0"/>
@@ -24611,7 +23829,7 @@
             <a:pPr algn="ctr"/>
             <a:fld id="{F7021451-1387-4CA6-816F-3879F97B5CBC}" type="slidenum">
               <a:rPr b="1" lang="en-US"/>
-              <a:t>62</a:t>
+              <a:t>60</a:t>
             </a:fld>
             <a:endParaRPr lang="en-US"/>
           </a:p>
@@ -24625,9 +23843,9 @@
 </p:sld>
 </file>
 
-<file path=ppt/slides/slide63.xml><?xml version="1.0" encoding="utf-8"?>
+<file path=ppt/slides/slide61.xml><?xml version="1.0" encoding="utf-8"?>
 <p:sld xmlns:a="http://schemas.openxmlformats.org/drawingml/2006/main" xmlns:r="http://schemas.openxmlformats.org/officeDocument/2006/relationships" xmlns:p="http://schemas.openxmlformats.org/presentationml/2006/main">
-  <p:cSld name="Slide 63">
+  <p:cSld name="Slide 61">
     <p:spTree>
       <p:nvGrpSpPr>
         <p:cNvPr id="1" name=""/>
@@ -24936,7 +24154,7 @@
             <a:pPr algn="ctr"/>
             <a:fld id="{F7021451-1387-4CA6-816F-3879F97B5CBC}" type="slidenum">
               <a:rPr b="1" lang="en-US"/>
-              <a:t>63</a:t>
+              <a:t>61</a:t>
             </a:fld>
             <a:endParaRPr lang="en-US"/>
           </a:p>
@@ -24950,9 +24168,9 @@
 </p:sld>
 </file>
 
-<file path=ppt/slides/slide64.xml><?xml version="1.0" encoding="utf-8"?>
+<file path=ppt/slides/slide62.xml><?xml version="1.0" encoding="utf-8"?>
 <p:sld xmlns:a="http://schemas.openxmlformats.org/drawingml/2006/main" xmlns:r="http://schemas.openxmlformats.org/officeDocument/2006/relationships" xmlns:p="http://schemas.openxmlformats.org/presentationml/2006/main">
-  <p:cSld name="Slide 64">
+  <p:cSld name="Slide 62">
     <p:spTree>
       <p:nvGrpSpPr>
         <p:cNvPr id="1" name=""/>
@@ -25219,7 +24437,7 @@
             <a:pPr algn="ctr"/>
             <a:fld id="{F7021451-1387-4CA6-816F-3879F97B5CBC}" type="slidenum">
               <a:rPr b="1" lang="en-US"/>
-              <a:t>64</a:t>
+              <a:t>62</a:t>
             </a:fld>
             <a:endParaRPr lang="en-US"/>
           </a:p>

--- a/lecons/USA/Population Geography/17_USA_POP_L13_Migration_Characteristics_Laws_and_Models.pptx
+++ b/lecons/USA/Population Geography/17_USA_POP_L13_Migration_Characteristics_Laws_and_Models.pptx
@@ -67,9 +67,11 @@
     <p:sldId id="315" r:id="rId61"/>
     <p:sldId id="316" r:id="rId62"/>
     <p:sldId id="317" r:id="rId63"/>
+    <p:sldId id="318" r:id="rId64"/>
+    <p:sldId id="319" r:id="rId65"/>
   </p:sldIdLst>
   <p:notesMasterIdLst>
-    <p:notesMasterId r:id="rId64"/>
+    <p:notesMasterId r:id="rId66"/>
   </p:notesMasterIdLst>
   <p:sldSz cx="12192000" cy="6858000"/>
   <p:notesSz cx="6858000" cy="12192000"/>
@@ -3643,7 +3645,7 @@
           <a:p>
             <a:r>
               <a:rPr lang="en-US" dirty="0"/>
-              <a:t>Let us copy Characteristics (Differentials) of Migration. Migrants are selected by the following characteristics. Copy the point on Age on the left, then draw the diagram on the right: the selectivity of migration. Give it a title and label it clearly.</a:t>
+              <a:t>Let us copy Personal Characteristics. Migrants are selected by the following personal characteristics. Copy the point on Age on the left, then draw the diagram on the right: the selectivity of migration. Give it a title and label it clearly.</a:t>
             </a:r>
             <a:endParaRPr lang="en-US" dirty="0"/>
           </a:p>
@@ -3731,7 +3733,7 @@
           <a:p>
             <a:r>
               <a:rPr lang="en-US" dirty="0"/>
-              <a:t>We continue with Characteristics (Differentials) of Migration. Copy the point on Sex: write the key term first, then its explanation.</a:t>
+              <a:t>We continue with Personal Characteristics. Copy the point on Sex: write the key term first, then its explanation.</a:t>
             </a:r>
             <a:endParaRPr lang="en-US" dirty="0"/>
           </a:p>
@@ -3819,7 +3821,7 @@
           <a:p>
             <a:r>
               <a:rPr lang="en-US" dirty="0"/>
-              <a:t>We continue with Characteristics (Differentials) of Migration. Copy the point on Skills and education: write the key term first, then its explanation.</a:t>
+              <a:t>We continue with Personal Characteristics. Copy the point on Marital status: write the key term first, then its explanation.</a:t>
             </a:r>
             <a:endParaRPr lang="en-US" dirty="0"/>
           </a:p>
@@ -3907,7 +3909,7 @@
           <a:p>
             <a:r>
               <a:rPr lang="en-US" dirty="0"/>
-              <a:t>We continue with Characteristics (Differentials) of Migration. Copy the point on Marital status and group: write the key term first, then its explanation.</a:t>
+              <a:t>Let us copy Social and Economic Characteristics. Migrants are also selected by the following social and economic characteristics. Copy the point on Skills and education: write the key term first, then its explanation.</a:t>
             </a:r>
             <a:endParaRPr lang="en-US" dirty="0"/>
           </a:p>
@@ -3995,7 +3997,7 @@
           <a:p>
             <a:r>
               <a:rPr lang="en-US" dirty="0"/>
-              <a:t>Let us copy Zipf's Law and the Gravity Model. Distance and size explain migration in the following models. Copy the point on Zipf's inverse distance law on the left, then draw the diagram on the right: zipf's law. Give it a title and label it clearly.</a:t>
+              <a:t>We continue with Social and Economic Characteristics. Copy the point on Ethnic or community group: write the key term first, then its explanation.</a:t>
             </a:r>
             <a:endParaRPr lang="en-US" dirty="0"/>
           </a:p>
@@ -4083,7 +4085,7 @@
           <a:p>
             <a:r>
               <a:rPr lang="en-US" dirty="0"/>
-              <a:t>Copy the point on The gravity model on the left, then draw the diagram on the right: the gravity model. Give it a title and label it clearly.</a:t>
+              <a:t>Let us copy Zipf's Law and the Gravity Model. Distance and size explain migration in the following models. Copy the point on Zipf's inverse distance law on the left, then draw the diagram on the right: zipf's law. Give it a title and label it clearly.</a:t>
             </a:r>
             <a:endParaRPr lang="en-US" dirty="0"/>
           </a:p>
@@ -4171,7 +4173,7 @@
           <a:p>
             <a:r>
               <a:rPr lang="en-US" dirty="0"/>
-              <a:t>Let us copy Stouffer's Intervening Opportunities Model. Stouffer's model explains migration as follows. Copy the point on Principle on the left, then draw the diagram on the right: stouffer's model. Give it a title and label it clearly.</a:t>
+              <a:t>Copy the point on The gravity model on the left, then draw the diagram on the right: the gravity model. Give it a title and label it clearly.</a:t>
             </a:r>
             <a:endParaRPr lang="en-US" dirty="0"/>
           </a:p>
@@ -4259,7 +4261,7 @@
           <a:p>
             <a:r>
               <a:rPr lang="en-US" dirty="0"/>
-              <a:t>We continue with Stouffer's Intervening Opportunities Model. Copy the point on Formula and example: write the key term first, then its explanation.</a:t>
+              <a:t>Let us copy Stouffer's Intervening Opportunities Model. Stouffer's model explains migration as follows. Copy the point on Principle on the left, then draw the diagram on the right: intervening opportunities. Give it a title and label it clearly.</a:t>
             </a:r>
             <a:endParaRPr lang="en-US" dirty="0"/>
           </a:p>
@@ -4347,7 +4349,7 @@
           <a:p>
             <a:r>
               <a:rPr lang="en-US" dirty="0"/>
-              <a:t>Let us copy Calculations Based on the Models. The models are applied as in the following examples. Copy the point on Gravity model on the left, then draw the diagram on the right: a gravity calculation. Give it a title and label it clearly.</a:t>
+              <a:t>We continue with Stouffer's Intervening Opportunities Model. Copy the point on Formula: write the key term first, then its explanation.</a:t>
             </a:r>
             <a:endParaRPr lang="en-US" dirty="0"/>
           </a:p>
@@ -4523,7 +4525,7 @@
           <a:p>
             <a:r>
               <a:rPr lang="en-US" dirty="0"/>
-              <a:t>Copy the point on Stouffer's model on the left, then draw the diagram on the right: a Stouffer calculation. Give it a title and label it clearly.</a:t>
+              <a:t>We continue with Stouffer's Intervening Opportunities Model. Copy the point on Example: write the key term first, then its explanation.</a:t>
             </a:r>
             <a:endParaRPr lang="en-US" dirty="0"/>
           </a:p>
@@ -4611,7 +4613,7 @@
           <a:p>
             <a:r>
               <a:rPr lang="en-US" dirty="0"/>
-              <a:t>Now let us check what you have understood. Question 1: Give two characteristics of migrants. Answer in your exercise book.</a:t>
+              <a:t>Let us copy Calculations Based on the Models. The models are applied as in the following examples. Copy the point on Gravity model on the left, then draw the diagram on the right: a gravity calculation. Give it a title and label it clearly.</a:t>
             </a:r>
             <a:endParaRPr lang="en-US" dirty="0"/>
           </a:p>
@@ -4699,7 +4701,7 @@
           <a:p>
             <a:r>
               <a:rPr lang="en-US" dirty="0"/>
-              <a:t>The expected answer is: they are mostly young adults, often single, and skilled people migrate more (brain drain) (any two). If you got it right, well done.</a:t>
+              <a:t>Copy the point on Stouffer's model on the left, then draw the diagram on the right: a Stouffer calculation. Give it a title and label it clearly.</a:t>
             </a:r>
             <a:endParaRPr lang="en-US" dirty="0"/>
           </a:p>
@@ -4787,7 +4789,7 @@
           <a:p>
             <a:r>
               <a:rPr lang="en-US" dirty="0"/>
-              <a:t>Now let us check what you have understood. Question 2: State the main difference between the gravity model and Stouffer's model. Answer in your exercise book.</a:t>
+              <a:t>Now let us check what you have understood. Question 1: Give two characteristics of migrants. Answer in your exercise book.</a:t>
             </a:r>
             <a:endParaRPr lang="en-US" dirty="0"/>
           </a:p>
@@ -4875,7 +4877,7 @@
           <a:p>
             <a:r>
               <a:rPr lang="en-US" dirty="0"/>
-              <a:t>The expected answer is: the gravity model uses population and distance; Stouffer uses the opportunities at the destination and on the way. If you got it right, well done.</a:t>
+              <a:t>The expected answer is: they are mostly young adults, often single, and skilled people migrate more (brain drain) (any two). If you got it right, well done.</a:t>
             </a:r>
             <a:endParaRPr lang="en-US" dirty="0"/>
           </a:p>
@@ -4963,7 +4965,7 @@
           <a:p>
             <a:r>
               <a:rPr lang="en-US" dirty="0"/>
-              <a:t>For those who need more practice, fill in the blanks in your exercise book. The answers are: number 1, distance; number 2, squared; number 3, intervening.</a:t>
+              <a:t>Now let us check what you have understood. Question 2: State the main difference between the gravity model and Stouffer's model. Answer in your exercise book.</a:t>
             </a:r>
             <a:endParaRPr lang="en-US" dirty="0"/>
           </a:p>
@@ -5051,7 +5053,7 @@
           <a:p>
             <a:r>
               <a:rPr lang="en-US" dirty="0"/>
-              <a:t>For your homework: Define spatial interaction. We shall correct it at the beginning of our next lesson.</a:t>
+              <a:t>The expected answer is: the gravity model uses population and distance; Stouffer uses the opportunities at the destination and on the way. If you got it right, well done.</a:t>
             </a:r>
             <a:endParaRPr lang="en-US" dirty="0"/>
           </a:p>
@@ -5139,7 +5141,7 @@
           <a:p>
             <a:r>
               <a:rPr lang="en-US" dirty="0"/>
-              <a:t>Our next lesson will be on Lesson 14: Spatial Interaction. Thank you for your attention, and see you next time.</a:t>
+              <a:t>For those who need more practice, fill in the blanks in your exercise book. The answers are: number 1, distance; number 2, squared; number 3, intervening.</a:t>
             </a:r>
             <a:endParaRPr lang="en-US" dirty="0"/>
           </a:p>
@@ -5227,7 +5229,7 @@
           <a:p>
             <a:r>
               <a:rPr lang="en-US" dirty="0"/>
-              <a:t>Let us play the bilingual game. I say a word in English, and you give me the French word. Then we do the reverse.</a:t>
+              <a:t>For your homework: Define spatial interaction. We shall correct it at the beginning of our next lesson.</a:t>
             </a:r>
             <a:endParaRPr lang="en-US" dirty="0"/>
           </a:p>
@@ -5315,7 +5317,7 @@
           <a:p>
             <a:r>
               <a:rPr lang="en-US" dirty="0"/>
-              <a:t>I record this information in the official logbook of the class after the lesson.</a:t>
+              <a:t>Our next lesson will be on Lesson 14: Spatial Interaction. Thank you for your attention, and see you next time.</a:t>
             </a:r>
             <a:endParaRPr lang="en-US" dirty="0"/>
           </a:p>
@@ -5491,7 +5493,7 @@
           <a:p>
             <a:r>
               <a:rPr lang="en-US" dirty="0"/>
-              <a:t>I complete the second page of the logbook: the matter taught, the evaluation, the homework and the attendance.</a:t>
+              <a:t>Let us play the bilingual game. I say a word in English, and you give me the French word. Then we do the reverse.</a:t>
             </a:r>
             <a:endParaRPr lang="en-US" dirty="0"/>
           </a:p>
@@ -5579,7 +5581,7 @@
           <a:p>
             <a:r>
               <a:rPr lang="en-US" dirty="0"/>
-              <a:t>This slide is for me, the teacher: it gives the timing of the lesson and what to do if the projector is not available.</a:t>
+              <a:t>I record this information in the official logbook of the class after the lesson.</a:t>
             </a:r>
             <a:endParaRPr lang="en-US" dirty="0"/>
           </a:p>
@@ -5667,7 +5669,7 @@
           <a:p>
             <a:r>
               <a:rPr lang="en-US" dirty="0"/>
-              <a:t>These are the references and picture credits used to prepare this lesson.</a:t>
+              <a:t>I complete the second page of the logbook: the matter taught, the evaluation, the homework and the attendance.</a:t>
             </a:r>
             <a:endParaRPr lang="en-US" dirty="0"/>
           </a:p>
@@ -5691,6 +5693,182 @@
             <a:fld id="{F7021451-1387-4CA6-816F-3879F97B5CBC}" type="slidenum">
               <a:rPr lang="en-US"/>
               <a:t>62</a:t>
+            </a:fld>
+            <a:endParaRPr lang="en-US"/>
+          </a:p>
+        </p:txBody>
+      </p:sp>
+    </p:spTree>
+    <p:extLst>
+      <p:ext uri="{BB962C8B-B14F-4D97-AF65-F5344CB8AC3E}">
+        <p14:creationId xmlns:p14="http://schemas.microsoft.com/office/powerpoint/2010/main" val="1024086991"/>
+      </p:ext>
+    </p:extLst>
+  </p:cSld>
+  <p:clrMapOvr>
+    <a:masterClrMapping/>
+  </p:clrMapOvr>
+</p:notes>
+</file>
+
+<file path=ppt/notesSlides/notesSlide63.xml><?xml version="1.0" encoding="utf-8"?>
+<p:notes xmlns:a="http://schemas.openxmlformats.org/drawingml/2006/main" xmlns:r="http://schemas.openxmlformats.org/officeDocument/2006/relationships" xmlns:p="http://schemas.openxmlformats.org/presentationml/2006/main">
+  <p:cSld>
+    <p:spTree>
+      <p:nvGrpSpPr>
+        <p:cNvPr id="1" name=""/>
+        <p:cNvGrpSpPr/>
+        <p:nvPr/>
+      </p:nvGrpSpPr>
+      <p:grpSpPr>
+        <a:xfrm>
+          <a:off x="0" y="0"/>
+          <a:ext cx="0" cy="0"/>
+          <a:chOff x="0" y="0"/>
+          <a:chExt cx="0" cy="0"/>
+        </a:xfrm>
+      </p:grpSpPr>
+      <p:sp>
+        <p:nvSpPr>
+          <p:cNvPr id="2" name="Slide Image Placeholder 1"/>
+          <p:cNvSpPr>
+            <a:spLocks noGrp="1" noRot="1" noChangeAspect="1"/>
+          </p:cNvSpPr>
+          <p:nvPr>
+            <p:ph type="sldImg"/>
+          </p:nvPr>
+        </p:nvSpPr>
+        <p:spPr/>
+      </p:sp>
+      <p:sp>
+        <p:nvSpPr>
+          <p:cNvPr id="3" name="Notes Placeholder 2"/>
+          <p:cNvSpPr>
+            <a:spLocks noGrp="1"/>
+          </p:cNvSpPr>
+          <p:nvPr>
+            <p:ph type="body" idx="1"/>
+          </p:nvPr>
+        </p:nvSpPr>
+        <p:spPr/>
+        <p:txBody>
+          <a:bodyPr/>
+          <a:lstStyle/>
+          <a:p>
+            <a:r>
+              <a:rPr lang="en-US" dirty="0"/>
+              <a:t>This slide is for me, the teacher: it gives the timing of the lesson and what to do if the projector is not available.</a:t>
+            </a:r>
+            <a:endParaRPr lang="en-US" dirty="0"/>
+          </a:p>
+        </p:txBody>
+      </p:sp>
+      <p:sp>
+        <p:nvSpPr>
+          <p:cNvPr id="4" name="Slide Number Placeholder 3"/>
+          <p:cNvSpPr>
+            <a:spLocks noGrp="1"/>
+          </p:cNvSpPr>
+          <p:nvPr>
+            <p:ph type="sldNum" sz="quarter" idx="10"/>
+          </p:nvPr>
+        </p:nvSpPr>
+        <p:spPr/>
+        <p:txBody>
+          <a:bodyPr/>
+          <a:lstStyle/>
+          <a:p>
+            <a:fld id="{F7021451-1387-4CA6-816F-3879F97B5CBC}" type="slidenum">
+              <a:rPr lang="en-US"/>
+              <a:t>63</a:t>
+            </a:fld>
+            <a:endParaRPr lang="en-US"/>
+          </a:p>
+        </p:txBody>
+      </p:sp>
+    </p:spTree>
+    <p:extLst>
+      <p:ext uri="{BB962C8B-B14F-4D97-AF65-F5344CB8AC3E}">
+        <p14:creationId xmlns:p14="http://schemas.microsoft.com/office/powerpoint/2010/main" val="1024086991"/>
+      </p:ext>
+    </p:extLst>
+  </p:cSld>
+  <p:clrMapOvr>
+    <a:masterClrMapping/>
+  </p:clrMapOvr>
+</p:notes>
+</file>
+
+<file path=ppt/notesSlides/notesSlide64.xml><?xml version="1.0" encoding="utf-8"?>
+<p:notes xmlns:a="http://schemas.openxmlformats.org/drawingml/2006/main" xmlns:r="http://schemas.openxmlformats.org/officeDocument/2006/relationships" xmlns:p="http://schemas.openxmlformats.org/presentationml/2006/main">
+  <p:cSld>
+    <p:spTree>
+      <p:nvGrpSpPr>
+        <p:cNvPr id="1" name=""/>
+        <p:cNvGrpSpPr/>
+        <p:nvPr/>
+      </p:nvGrpSpPr>
+      <p:grpSpPr>
+        <a:xfrm>
+          <a:off x="0" y="0"/>
+          <a:ext cx="0" cy="0"/>
+          <a:chOff x="0" y="0"/>
+          <a:chExt cx="0" cy="0"/>
+        </a:xfrm>
+      </p:grpSpPr>
+      <p:sp>
+        <p:nvSpPr>
+          <p:cNvPr id="2" name="Slide Image Placeholder 1"/>
+          <p:cNvSpPr>
+            <a:spLocks noGrp="1" noRot="1" noChangeAspect="1"/>
+          </p:cNvSpPr>
+          <p:nvPr>
+            <p:ph type="sldImg"/>
+          </p:nvPr>
+        </p:nvSpPr>
+        <p:spPr/>
+      </p:sp>
+      <p:sp>
+        <p:nvSpPr>
+          <p:cNvPr id="3" name="Notes Placeholder 2"/>
+          <p:cNvSpPr>
+            <a:spLocks noGrp="1"/>
+          </p:cNvSpPr>
+          <p:nvPr>
+            <p:ph type="body" idx="1"/>
+          </p:nvPr>
+        </p:nvSpPr>
+        <p:spPr/>
+        <p:txBody>
+          <a:bodyPr/>
+          <a:lstStyle/>
+          <a:p>
+            <a:r>
+              <a:rPr lang="en-US" dirty="0"/>
+              <a:t>These are the references and picture credits used to prepare this lesson.</a:t>
+            </a:r>
+            <a:endParaRPr lang="en-US" dirty="0"/>
+          </a:p>
+        </p:txBody>
+      </p:sp>
+      <p:sp>
+        <p:nvSpPr>
+          <p:cNvPr id="4" name="Slide Number Placeholder 3"/>
+          <p:cNvSpPr>
+            <a:spLocks noGrp="1"/>
+          </p:cNvSpPr>
+          <p:nvPr>
+            <p:ph type="sldNum" sz="quarter" idx="10"/>
+          </p:nvPr>
+        </p:nvSpPr>
+        <p:spPr/>
+        <p:txBody>
+          <a:bodyPr/>
+          <a:lstStyle/>
+          <a:p>
+            <a:fld id="{F7021451-1387-4CA6-816F-3879F97B5CBC}" type="slidenum">
+              <a:rPr lang="en-US"/>
+              <a:t>64</a:t>
             </a:fld>
             <a:endParaRPr lang="en-US"/>
           </a:p>
@@ -16192,8 +16370,49 @@
         </p:nvSpPr>
         <p:spPr>
           <a:xfrm>
-            <a:off x="365760" y="1783080"/>
-            <a:ext cx="6035040" cy="4617720"/>
+            <a:off x="365760" y="1737360"/>
+            <a:ext cx="6035040" cy="457200"/>
+          </a:xfrm>
+          <a:prstGeom prst="rect">
+            <a:avLst/>
+          </a:prstGeom>
+          <a:noFill/>
+          <a:ln/>
+        </p:spPr>
+        <p:txBody>
+          <a:bodyPr wrap="square" lIns="0" tIns="0" rIns="0" bIns="0" rtlCol="0" anchor="ctr">
+            <a:normAutofit/>
+          </a:bodyPr>
+          <a:lstStyle/>
+          <a:p>
+            <a:pPr algn="l" indent="0" marL="0">
+              <a:buNone/>
+            </a:pPr>
+            <a:r>
+              <a:rPr lang="en-US" sz="3000" b="1" dirty="0">
+                <a:solidFill>
+                  <a:srgbClr val="990011"/>
+                </a:solidFill>
+                <a:latin typeface="Times New Roman" pitchFamily="34" charset="0"/>
+                <a:ea typeface="Times New Roman" pitchFamily="34" charset="-122"/>
+                <a:cs typeface="Times New Roman" pitchFamily="34" charset="-120"/>
+              </a:rPr>
+              <a:t>A) Personal Characteristics</a:t>
+            </a:r>
+            <a:endParaRPr lang="en-US" sz="3000" dirty="0"/>
+          </a:p>
+        </p:txBody>
+      </p:sp>
+      <p:sp>
+        <p:nvSpPr>
+          <p:cNvPr id="5" name="Text 3"/>
+          <p:cNvSpPr/>
+          <p:nvPr/>
+        </p:nvSpPr>
+        <p:spPr>
+          <a:xfrm>
+            <a:off x="365760" y="2240280"/>
+            <a:ext cx="6035040" cy="4160520"/>
           </a:xfrm>
           <a:prstGeom prst="rect">
             <a:avLst/>
@@ -16212,7 +16431,7 @@
               <a:buNone/>
             </a:pPr>
             <a:r>
-              <a:rPr lang="en-US" sz="3600" i="1" dirty="0">
+              <a:rPr lang="en-US" sz="3400" i="1" dirty="0">
                 <a:solidFill>
                   <a:srgbClr val="111111"/>
                 </a:solidFill>
@@ -16220,9 +16439,9 @@
                 <a:ea typeface="Times New Roman" pitchFamily="34" charset="-122"/>
                 <a:cs typeface="Times New Roman" pitchFamily="34" charset="-120"/>
               </a:rPr>
-              <a:t>Migrants are selected by the following characteristics:</a:t>
-            </a:r>
-            <a:endParaRPr lang="en-US" sz="3600" dirty="0"/>
+              <a:t>Migrants are selected by the following personal characteristics:</a:t>
+            </a:r>
+            <a:endParaRPr lang="en-US" sz="3400" dirty="0"/>
           </a:p>
           <a:p>
             <a:pPr algn="l" indent="0" marL="0">
@@ -16232,7 +16451,7 @@
               <a:buNone/>
             </a:pPr>
             <a:r>
-              <a:rPr lang="en-US" sz="3600" b="1" dirty="0">
+              <a:rPr lang="en-US" sz="3400" b="1" dirty="0">
                 <a:solidFill>
                   <a:srgbClr val="111111"/>
                 </a:solidFill>
@@ -16249,7 +16468,7 @@
               <a:buNone/>
             </a:pPr>
             <a:r>
-              <a:rPr lang="en-US" sz="3600" dirty="0">
+              <a:rPr lang="en-US" sz="3400" dirty="0">
                 <a:solidFill>
                   <a:srgbClr val="111111"/>
                 </a:solidFill>
@@ -16259,13 +16478,13 @@
               </a:rPr>
               <a:t>Young adults of 18 to 35 years migrate most, for studies and first jobs. They also have few family responsibilities.</a:t>
             </a:r>
-            <a:endParaRPr lang="en-US" sz="3600" dirty="0"/>
+            <a:endParaRPr lang="en-US" sz="3400" dirty="0"/>
           </a:p>
         </p:txBody>
       </p:sp>
       <p:pic>
         <p:nvPicPr>
-          <p:cNvPr id="5" name="Image 0" descr="/home/claude/f4/img/v2/pop2_selectivity.png">    </p:cNvPr>
+          <p:cNvPr id="6" name="Image 0" descr="/home/claude/f4/img/v2/pop2_selectivity.png">    </p:cNvPr>
           <p:cNvPicPr>
             <a:picLocks noChangeAspect="1"/>
           </p:cNvPicPr>
@@ -16289,7 +16508,7 @@
       </p:pic>
       <p:sp>
         <p:nvSpPr>
-          <p:cNvPr id="6" name="Text 3"/>
+          <p:cNvPr id="7" name="Text 4"/>
           <p:cNvSpPr/>
           <p:nvPr/>
         </p:nvSpPr>
@@ -16455,7 +16674,7 @@
         <p:spPr>
           <a:xfrm>
             <a:off x="0" y="658368"/>
-            <a:ext cx="5120640" cy="5833872"/>
+            <a:ext cx="3840480" cy="5833872"/>
           </a:xfrm>
           <a:prstGeom prst="rect">
             <a:avLst/>
@@ -16470,8 +16689,8 @@
         </p:nvSpPr>
         <p:spPr>
           <a:xfrm>
-            <a:off x="5349240" y="1005840"/>
-            <a:ext cx="6522415" cy="731520"/>
+            <a:off x="4069080" y="1005840"/>
+            <a:ext cx="7802575" cy="731520"/>
           </a:xfrm>
           <a:prstGeom prst="rect">
             <a:avLst/>
@@ -16511,8 +16730,47 @@
         </p:nvSpPr>
         <p:spPr>
           <a:xfrm>
-            <a:off x="5349240" y="1783080"/>
-            <a:ext cx="6522415" cy="4663440"/>
+            <a:off x="4069080" y="1737360"/>
+            <a:ext cx="7802575" cy="457200"/>
+          </a:xfrm>
+          <a:prstGeom prst="rect">
+            <a:avLst/>
+          </a:prstGeom>
+          <a:noFill/>
+          <a:ln/>
+        </p:spPr>
+        <p:txBody>
+          <a:bodyPr wrap="square" lIns="0" tIns="0" rIns="0" bIns="0" rtlCol="0" anchor="ctr"/>
+          <a:lstStyle/>
+          <a:p>
+            <a:pPr algn="l" indent="0" marL="0">
+              <a:buNone/>
+            </a:pPr>
+            <a:r>
+              <a:rPr lang="en-US" sz="3200" b="1" dirty="0">
+                <a:solidFill>
+                  <a:srgbClr val="990011"/>
+                </a:solidFill>
+                <a:latin typeface="Times New Roman" pitchFamily="34" charset="0"/>
+                <a:ea typeface="Times New Roman" pitchFamily="34" charset="-122"/>
+                <a:cs typeface="Times New Roman" pitchFamily="34" charset="-120"/>
+              </a:rPr>
+              <a:t>A) Personal Characteristics</a:t>
+            </a:r>
+            <a:endParaRPr lang="en-US" sz="3200" dirty="0"/>
+          </a:p>
+        </p:txBody>
+      </p:sp>
+      <p:sp>
+        <p:nvSpPr>
+          <p:cNvPr id="6" name="Text 3"/>
+          <p:cNvSpPr/>
+          <p:nvPr/>
+        </p:nvSpPr>
+        <p:spPr>
+          <a:xfrm>
+            <a:off x="4069080" y="2240280"/>
+            <a:ext cx="7802575" cy="4206240"/>
           </a:xfrm>
           <a:prstGeom prst="rect">
             <a:avLst/>
@@ -16691,7 +16949,7 @@
         <p:spPr>
           <a:xfrm>
             <a:off x="0" y="658368"/>
-            <a:ext cx="5120640" cy="5833872"/>
+            <a:ext cx="3840480" cy="5833872"/>
           </a:xfrm>
           <a:prstGeom prst="rect">
             <a:avLst/>
@@ -16706,8 +16964,8 @@
         </p:nvSpPr>
         <p:spPr>
           <a:xfrm>
-            <a:off x="5349240" y="1005840"/>
-            <a:ext cx="6522415" cy="731520"/>
+            <a:off x="4069080" y="1005840"/>
+            <a:ext cx="7802575" cy="731520"/>
           </a:xfrm>
           <a:prstGeom prst="rect">
             <a:avLst/>
@@ -16747,8 +17005,47 @@
         </p:nvSpPr>
         <p:spPr>
           <a:xfrm>
-            <a:off x="5349240" y="1783080"/>
-            <a:ext cx="6522415" cy="4663440"/>
+            <a:off x="4069080" y="1737360"/>
+            <a:ext cx="7802575" cy="457200"/>
+          </a:xfrm>
+          <a:prstGeom prst="rect">
+            <a:avLst/>
+          </a:prstGeom>
+          <a:noFill/>
+          <a:ln/>
+        </p:spPr>
+        <p:txBody>
+          <a:bodyPr wrap="square" lIns="0" tIns="0" rIns="0" bIns="0" rtlCol="0" anchor="ctr"/>
+          <a:lstStyle/>
+          <a:p>
+            <a:pPr algn="l" indent="0" marL="0">
+              <a:buNone/>
+            </a:pPr>
+            <a:r>
+              <a:rPr lang="en-US" sz="3200" b="1" dirty="0">
+                <a:solidFill>
+                  <a:srgbClr val="990011"/>
+                </a:solidFill>
+                <a:latin typeface="Times New Roman" pitchFamily="34" charset="0"/>
+                <a:ea typeface="Times New Roman" pitchFamily="34" charset="-122"/>
+                <a:cs typeface="Times New Roman" pitchFamily="34" charset="-120"/>
+              </a:rPr>
+              <a:t>A) Personal Characteristics</a:t>
+            </a:r>
+            <a:endParaRPr lang="en-US" sz="3200" dirty="0"/>
+          </a:p>
+        </p:txBody>
+      </p:sp>
+      <p:sp>
+        <p:nvSpPr>
+          <p:cNvPr id="6" name="Text 3"/>
+          <p:cNvSpPr/>
+          <p:nvPr/>
+        </p:nvSpPr>
+        <p:spPr>
+          <a:xfrm>
+            <a:off x="4069080" y="2240280"/>
+            <a:ext cx="7802575" cy="4206240"/>
           </a:xfrm>
           <a:prstGeom prst="rect">
             <a:avLst/>
@@ -16775,7 +17072,7 @@
                 <a:ea typeface="Times New Roman" pitchFamily="34" charset="-122"/>
                 <a:cs typeface="Times New Roman" pitchFamily="34" charset="-120"/>
               </a:rPr>
-              <a:t>Skills and education: </a:t>
+              <a:t>Marital status: </a:t>
             </a:r>
             <a:pPr algn="l" indent="0" marL="0">
               <a:spcAft>
@@ -16792,7 +17089,7 @@
                 <a:ea typeface="Times New Roman" pitchFamily="34" charset="-122"/>
                 <a:cs typeface="Times New Roman" pitchFamily="34" charset="-120"/>
               </a:rPr>
-              <a:t>Doctors and engineers leave poor countries for rich ones, which is called brain drain. Unskilled workers fill jobs in farming and building.</a:t>
+              <a:t>Single people move more easily than married people with children. Families move less often because they must find housing and schools for everyone.</a:t>
             </a:r>
             <a:endParaRPr lang="en-US" sz="4000" dirty="0"/>
           </a:p>
@@ -16927,7 +17224,7 @@
         <p:spPr>
           <a:xfrm>
             <a:off x="0" y="658368"/>
-            <a:ext cx="3840480" cy="5833872"/>
+            <a:ext cx="1463040" cy="5833872"/>
           </a:xfrm>
           <a:prstGeom prst="rect">
             <a:avLst/>
@@ -16942,8 +17239,8 @@
         </p:nvSpPr>
         <p:spPr>
           <a:xfrm>
-            <a:off x="4069080" y="1005840"/>
-            <a:ext cx="7802575" cy="731520"/>
+            <a:off x="1691640" y="1005840"/>
+            <a:ext cx="10180015" cy="731520"/>
           </a:xfrm>
           <a:prstGeom prst="rect">
             <a:avLst/>
@@ -16983,8 +17280,47 @@
         </p:nvSpPr>
         <p:spPr>
           <a:xfrm>
-            <a:off x="4069080" y="1783080"/>
-            <a:ext cx="7802575" cy="4663440"/>
+            <a:off x="1691640" y="1737360"/>
+            <a:ext cx="10180015" cy="457200"/>
+          </a:xfrm>
+          <a:prstGeom prst="rect">
+            <a:avLst/>
+          </a:prstGeom>
+          <a:noFill/>
+          <a:ln/>
+        </p:spPr>
+        <p:txBody>
+          <a:bodyPr wrap="square" lIns="0" tIns="0" rIns="0" bIns="0" rtlCol="0" anchor="ctr"/>
+          <a:lstStyle/>
+          <a:p>
+            <a:pPr algn="l" indent="0" marL="0">
+              <a:buNone/>
+            </a:pPr>
+            <a:r>
+              <a:rPr lang="en-US" sz="3200" b="1" dirty="0">
+                <a:solidFill>
+                  <a:srgbClr val="990011"/>
+                </a:solidFill>
+                <a:latin typeface="Times New Roman" pitchFamily="34" charset="0"/>
+                <a:ea typeface="Times New Roman" pitchFamily="34" charset="-122"/>
+                <a:cs typeface="Times New Roman" pitchFamily="34" charset="-120"/>
+              </a:rPr>
+              <a:t>B) Social and Economic Characteristics</a:t>
+            </a:r>
+            <a:endParaRPr lang="en-US" sz="3200" dirty="0"/>
+          </a:p>
+        </p:txBody>
+      </p:sp>
+      <p:sp>
+        <p:nvSpPr>
+          <p:cNvPr id="6" name="Text 3"/>
+          <p:cNvSpPr/>
+          <p:nvPr/>
+        </p:nvSpPr>
+        <p:spPr>
+          <a:xfrm>
+            <a:off x="1691640" y="2240280"/>
+            <a:ext cx="10180015" cy="4206240"/>
           </a:xfrm>
           <a:prstGeom prst="rect">
             <a:avLst/>
@@ -17003,7 +17339,7 @@
               <a:buNone/>
             </a:pPr>
             <a:r>
-              <a:rPr lang="en-US" sz="4000" b="1" dirty="0">
+              <a:rPr lang="en-US" sz="4000" i="1" dirty="0">
                 <a:solidFill>
                   <a:srgbClr val="111111"/>
                 </a:solidFill>
@@ -17011,8 +17347,11 @@
                 <a:ea typeface="Times New Roman" pitchFamily="34" charset="-122"/>
                 <a:cs typeface="Times New Roman" pitchFamily="34" charset="-120"/>
               </a:rPr>
-              <a:t>Marital status and group: </a:t>
-            </a:r>
+              <a:t>Migrants are also selected by the following social and economic characteristics:</a:t>
+            </a:r>
+            <a:endParaRPr lang="en-US" sz="4000" dirty="0"/>
+          </a:p>
+          <a:p>
             <a:pPr algn="l" indent="0" marL="0">
               <a:spcAft>
                 <a:spcPts val="800"/>
@@ -17020,7 +17359,7 @@
               <a:buNone/>
             </a:pPr>
             <a:r>
-              <a:rPr lang="en-US" sz="4000" dirty="0">
+              <a:rPr lang="en-US" sz="4000" b="1" dirty="0">
                 <a:solidFill>
                   <a:srgbClr val="111111"/>
                 </a:solidFill>
@@ -17028,7 +17367,24 @@
                 <a:ea typeface="Times New Roman" pitchFamily="34" charset="-122"/>
                 <a:cs typeface="Times New Roman" pitchFamily="34" charset="-120"/>
               </a:rPr>
-              <a:t>Single people move more easily than married people with children. People also follow members of their own community, which is called chain migration, like the Turks in Germany.</a:t>
+              <a:t>Skills and education: </a:t>
+            </a:r>
+            <a:pPr algn="l" indent="0" marL="0">
+              <a:spcAft>
+                <a:spcPts val="800"/>
+              </a:spcAft>
+              <a:buNone/>
+            </a:pPr>
+            <a:r>
+              <a:rPr lang="en-US" sz="4000" dirty="0">
+                <a:solidFill>
+                  <a:srgbClr val="111111"/>
+                </a:solidFill>
+                <a:latin typeface="Times New Roman" pitchFamily="34" charset="0"/>
+                <a:ea typeface="Times New Roman" pitchFamily="34" charset="-122"/>
+                <a:cs typeface="Times New Roman" pitchFamily="34" charset="-120"/>
+              </a:rPr>
+              <a:t>Doctors and engineers leave poor countries for rich ones, which is called brain drain. Unskilled workers fill jobs in farming and building.</a:t>
             </a:r>
             <a:endParaRPr lang="en-US" sz="4000" dirty="0"/>
           </a:p>
@@ -17146,170 +17502,9 @@
           </a:p>
         </p:txBody>
       </p:sp>
-      <p:sp>
-        <p:nvSpPr>
-          <p:cNvPr id="3" name="Text 1"/>
-          <p:cNvSpPr/>
-          <p:nvPr/>
-        </p:nvSpPr>
-        <p:spPr>
-          <a:xfrm>
-            <a:off x="365760" y="1005840"/>
-            <a:ext cx="11460175" cy="731520"/>
-          </a:xfrm>
-          <a:prstGeom prst="rect">
-            <a:avLst/>
-          </a:prstGeom>
-          <a:noFill/>
-          <a:ln/>
-        </p:spPr>
-        <p:txBody>
-          <a:bodyPr wrap="square" lIns="0" tIns="0" rIns="0" bIns="0" rtlCol="0" anchor="ctr">
-            <a:normAutofit/>
-          </a:bodyPr>
-          <a:lstStyle/>
-          <a:p>
-            <a:pPr algn="ctr" indent="0" marL="0">
-              <a:buNone/>
-            </a:pPr>
-            <a:r>
-              <a:rPr lang="en-US" sz="3600" b="1" dirty="0">
-                <a:solidFill>
-                  <a:srgbClr val="990011"/>
-                </a:solidFill>
-                <a:latin typeface="Times New Roman" pitchFamily="34" charset="0"/>
-                <a:ea typeface="Times New Roman" pitchFamily="34" charset="-122"/>
-                <a:cs typeface="Times New Roman" pitchFamily="34" charset="-120"/>
-              </a:rPr>
-              <a:t>3. Laws and Theories of Migration</a:t>
-            </a:r>
-            <a:endParaRPr lang="en-US" sz="3600" dirty="0"/>
-          </a:p>
-        </p:txBody>
-      </p:sp>
-      <p:sp>
-        <p:nvSpPr>
-          <p:cNvPr id="4" name="Text 2"/>
-          <p:cNvSpPr/>
-          <p:nvPr/>
-        </p:nvSpPr>
-        <p:spPr>
-          <a:xfrm>
-            <a:off x="365760" y="1737360"/>
-            <a:ext cx="6035040" cy="457200"/>
-          </a:xfrm>
-          <a:prstGeom prst="rect">
-            <a:avLst/>
-          </a:prstGeom>
-          <a:noFill/>
-          <a:ln/>
-        </p:spPr>
-        <p:txBody>
-          <a:bodyPr wrap="square" lIns="0" tIns="0" rIns="0" bIns="0" rtlCol="0" anchor="ctr">
-            <a:normAutofit/>
-          </a:bodyPr>
-          <a:lstStyle/>
-          <a:p>
-            <a:pPr algn="l" indent="0" marL="0">
-              <a:buNone/>
-            </a:pPr>
-            <a:r>
-              <a:rPr lang="en-US" sz="3000" b="1" dirty="0">
-                <a:solidFill>
-                  <a:srgbClr val="990011"/>
-                </a:solidFill>
-                <a:latin typeface="Times New Roman" pitchFamily="34" charset="0"/>
-                <a:ea typeface="Times New Roman" pitchFamily="34" charset="-122"/>
-                <a:cs typeface="Times New Roman" pitchFamily="34" charset="-120"/>
-              </a:rPr>
-              <a:t>A) Zipf's Law and the Gravity Model</a:t>
-            </a:r>
-            <a:endParaRPr lang="en-US" sz="3000" dirty="0"/>
-          </a:p>
-        </p:txBody>
-      </p:sp>
-      <p:sp>
-        <p:nvSpPr>
-          <p:cNvPr id="5" name="Text 3"/>
-          <p:cNvSpPr/>
-          <p:nvPr/>
-        </p:nvSpPr>
-        <p:spPr>
-          <a:xfrm>
-            <a:off x="365760" y="2240280"/>
-            <a:ext cx="6035040" cy="4160520"/>
-          </a:xfrm>
-          <a:prstGeom prst="rect">
-            <a:avLst/>
-          </a:prstGeom>
-          <a:noFill/>
-          <a:ln/>
-        </p:spPr>
-        <p:txBody>
-          <a:bodyPr wrap="square" lIns="0" tIns="0" rIns="0" bIns="0" rtlCol="0" anchor="t"/>
-          <a:lstStyle/>
-          <a:p>
-            <a:pPr algn="l" indent="0" marL="0">
-              <a:spcAft>
-                <a:spcPts val="800"/>
-              </a:spcAft>
-              <a:buNone/>
-            </a:pPr>
-            <a:r>
-              <a:rPr lang="en-US" sz="3000" i="1" dirty="0">
-                <a:solidFill>
-                  <a:srgbClr val="111111"/>
-                </a:solidFill>
-                <a:latin typeface="Times New Roman" pitchFamily="34" charset="0"/>
-                <a:ea typeface="Times New Roman" pitchFamily="34" charset="-122"/>
-                <a:cs typeface="Times New Roman" pitchFamily="34" charset="-120"/>
-              </a:rPr>
-              <a:t>Distance and size explain migration in the following models:</a:t>
-            </a:r>
-            <a:endParaRPr lang="en-US" sz="3000" dirty="0"/>
-          </a:p>
-          <a:p>
-            <a:pPr algn="l" indent="0" marL="0">
-              <a:spcAft>
-                <a:spcPts val="800"/>
-              </a:spcAft>
-              <a:buNone/>
-            </a:pPr>
-            <a:r>
-              <a:rPr lang="en-US" sz="3000" b="1" dirty="0">
-                <a:solidFill>
-                  <a:srgbClr val="111111"/>
-                </a:solidFill>
-                <a:latin typeface="Times New Roman" pitchFamily="34" charset="0"/>
-                <a:ea typeface="Times New Roman" pitchFamily="34" charset="-122"/>
-                <a:cs typeface="Times New Roman" pitchFamily="34" charset="-120"/>
-              </a:rPr>
-              <a:t>Zipf's inverse distance law: </a:t>
-            </a:r>
-            <a:pPr algn="l" indent="0" marL="0">
-              <a:spcAft>
-                <a:spcPts val="800"/>
-              </a:spcAft>
-              <a:buNone/>
-            </a:pPr>
-            <a:r>
-              <a:rPr lang="en-US" sz="3000" dirty="0">
-                <a:solidFill>
-                  <a:srgbClr val="111111"/>
-                </a:solidFill>
-                <a:latin typeface="Times New Roman" pitchFamily="34" charset="0"/>
-                <a:ea typeface="Times New Roman" pitchFamily="34" charset="-122"/>
-                <a:cs typeface="Times New Roman" pitchFamily="34" charset="-120"/>
-              </a:rPr>
-              <a:t>The number of migrants between two places is inversely proportional to the distance between them: M ∝ 1 ÷ d. Many people move short distances, and few move far.</a:t>
-            </a:r>
-            <a:endParaRPr lang="en-US" sz="3000" dirty="0"/>
-          </a:p>
-        </p:txBody>
-      </p:sp>
       <p:pic>
         <p:nvPicPr>
-          <p:cNvPr id="6" name="Image 0" descr="/home/claude/f4/img/v2/zipf_big.png">    </p:cNvPr>
+          <p:cNvPr id="3" name="Image 0" descr="/home/claude/f4/img/minesec_sheet.png">    </p:cNvPr>
           <p:cNvPicPr>
             <a:picLocks noChangeAspect="1"/>
           </p:cNvPicPr>
@@ -17323,8 +17518,8 @@
         </p:blipFill>
         <p:spPr>
           <a:xfrm>
-            <a:off x="6537960" y="2721454"/>
-            <a:ext cx="5470855" cy="2393499"/>
+            <a:off x="0" y="658368"/>
+            <a:ext cx="2468880" cy="5833872"/>
           </a:xfrm>
           <a:prstGeom prst="rect">
             <a:avLst/>
@@ -17333,14 +17528,14 @@
       </p:pic>
       <p:sp>
         <p:nvSpPr>
-          <p:cNvPr id="7" name="Text 4"/>
+          <p:cNvPr id="4" name="Text 1"/>
           <p:cNvSpPr/>
           <p:nvPr/>
         </p:nvSpPr>
         <p:spPr>
           <a:xfrm>
-            <a:off x="6537960" y="6089904"/>
-            <a:ext cx="5470855" cy="347472"/>
+            <a:off x="2697480" y="1005840"/>
+            <a:ext cx="9174175" cy="731520"/>
           </a:xfrm>
           <a:prstGeom prst="rect">
             <a:avLst/>
@@ -17349,24 +17544,124 @@
           <a:ln/>
         </p:spPr>
         <p:txBody>
-          <a:bodyPr wrap="square" lIns="0" tIns="0" rIns="0" bIns="0" rtlCol="0" anchor="ctr"/>
+          <a:bodyPr wrap="square" lIns="0" tIns="0" rIns="0" bIns="0" rtlCol="0" anchor="ctr">
+            <a:normAutofit/>
+          </a:bodyPr>
           <a:lstStyle/>
           <a:p>
             <a:pPr algn="ctr" indent="0" marL="0">
               <a:buNone/>
             </a:pPr>
             <a:r>
-              <a:rPr lang="en-US" sz="1600" i="1" dirty="0">
-                <a:solidFill>
-                  <a:srgbClr val="555555"/>
+              <a:rPr lang="en-US" sz="3600" b="1" dirty="0">
+                <a:solidFill>
+                  <a:srgbClr val="990011"/>
                 </a:solidFill>
                 <a:latin typeface="Times New Roman" pitchFamily="34" charset="0"/>
                 <a:ea typeface="Times New Roman" pitchFamily="34" charset="-122"/>
                 <a:cs typeface="Times New Roman" pitchFamily="34" charset="-120"/>
               </a:rPr>
-              <a:t>Illustration: Zipf's law</a:t>
-            </a:r>
-            <a:endParaRPr lang="en-US" sz="1600" dirty="0"/>
+              <a:t>2. Characteristics (Differentials) of Migration</a:t>
+            </a:r>
+            <a:endParaRPr lang="en-US" sz="3600" dirty="0"/>
+          </a:p>
+        </p:txBody>
+      </p:sp>
+      <p:sp>
+        <p:nvSpPr>
+          <p:cNvPr id="5" name="Text 2"/>
+          <p:cNvSpPr/>
+          <p:nvPr/>
+        </p:nvSpPr>
+        <p:spPr>
+          <a:xfrm>
+            <a:off x="2697480" y="1737360"/>
+            <a:ext cx="9174175" cy="457200"/>
+          </a:xfrm>
+          <a:prstGeom prst="rect">
+            <a:avLst/>
+          </a:prstGeom>
+          <a:noFill/>
+          <a:ln/>
+        </p:spPr>
+        <p:txBody>
+          <a:bodyPr wrap="square" lIns="0" tIns="0" rIns="0" bIns="0" rtlCol="0" anchor="ctr"/>
+          <a:lstStyle/>
+          <a:p>
+            <a:pPr algn="l" indent="0" marL="0">
+              <a:buNone/>
+            </a:pPr>
+            <a:r>
+              <a:rPr lang="en-US" sz="3200" b="1" dirty="0">
+                <a:solidFill>
+                  <a:srgbClr val="990011"/>
+                </a:solidFill>
+                <a:latin typeface="Times New Roman" pitchFamily="34" charset="0"/>
+                <a:ea typeface="Times New Roman" pitchFamily="34" charset="-122"/>
+                <a:cs typeface="Times New Roman" pitchFamily="34" charset="-120"/>
+              </a:rPr>
+              <a:t>B) Social and Economic Characteristics</a:t>
+            </a:r>
+            <a:endParaRPr lang="en-US" sz="3200" dirty="0"/>
+          </a:p>
+        </p:txBody>
+      </p:sp>
+      <p:sp>
+        <p:nvSpPr>
+          <p:cNvPr id="6" name="Text 3"/>
+          <p:cNvSpPr/>
+          <p:nvPr/>
+        </p:nvSpPr>
+        <p:spPr>
+          <a:xfrm>
+            <a:off x="2697480" y="2240280"/>
+            <a:ext cx="9174175" cy="4206240"/>
+          </a:xfrm>
+          <a:prstGeom prst="rect">
+            <a:avLst/>
+          </a:prstGeom>
+          <a:noFill/>
+          <a:ln/>
+        </p:spPr>
+        <p:txBody>
+          <a:bodyPr wrap="square" lIns="0" tIns="0" rIns="0" bIns="0" rtlCol="0" anchor="t"/>
+          <a:lstStyle/>
+          <a:p>
+            <a:pPr algn="l" indent="0" marL="0">
+              <a:spcAft>
+                <a:spcPts val="800"/>
+              </a:spcAft>
+              <a:buNone/>
+            </a:pPr>
+            <a:r>
+              <a:rPr lang="en-US" sz="4000" b="1" dirty="0">
+                <a:solidFill>
+                  <a:srgbClr val="111111"/>
+                </a:solidFill>
+                <a:latin typeface="Times New Roman" pitchFamily="34" charset="0"/>
+                <a:ea typeface="Times New Roman" pitchFamily="34" charset="-122"/>
+                <a:cs typeface="Times New Roman" pitchFamily="34" charset="-120"/>
+              </a:rPr>
+              <a:t>Ethnic or community group: </a:t>
+            </a:r>
+            <a:pPr algn="l" indent="0" marL="0">
+              <a:spcAft>
+                <a:spcPts val="800"/>
+              </a:spcAft>
+              <a:buNone/>
+            </a:pPr>
+            <a:r>
+              <a:rPr lang="en-US" sz="4000" dirty="0">
+                <a:solidFill>
+                  <a:srgbClr val="111111"/>
+                </a:solidFill>
+                <a:latin typeface="Times New Roman" pitchFamily="34" charset="0"/>
+                <a:ea typeface="Times New Roman" pitchFamily="34" charset="-122"/>
+                <a:cs typeface="Times New Roman" pitchFamily="34" charset="-120"/>
+              </a:rPr>
+              <a:t>People follow members of their own community who have already settled in a place, which is called chain migration. The Turks in Germany and the Bamileke traders in Douala are examples.</a:t>
+            </a:r>
+            <a:endParaRPr lang="en-US" sz="4000" dirty="0"/>
           </a:p>
         </p:txBody>
       </p:sp>
@@ -17592,7 +17887,7 @@
               <a:buNone/>
             </a:pPr>
             <a:r>
-              <a:rPr lang="en-US" sz="2800" b="1" dirty="0">
+              <a:rPr lang="en-US" sz="3000" i="1" dirty="0">
                 <a:solidFill>
                   <a:srgbClr val="111111"/>
                 </a:solidFill>
@@ -17600,8 +17895,11 @@
                 <a:ea typeface="Times New Roman" pitchFamily="34" charset="-122"/>
                 <a:cs typeface="Times New Roman" pitchFamily="34" charset="-120"/>
               </a:rPr>
-              <a:t>The gravity model: </a:t>
-            </a:r>
+              <a:t>Distance and size explain migration in the following models:</a:t>
+            </a:r>
+            <a:endParaRPr lang="en-US" sz="3000" dirty="0"/>
+          </a:p>
+          <a:p>
             <a:pPr algn="l" indent="0" marL="0">
               <a:spcAft>
                 <a:spcPts val="800"/>
@@ -17609,7 +17907,7 @@
               <a:buNone/>
             </a:pPr>
             <a:r>
-              <a:rPr lang="en-US" sz="2800" dirty="0">
+              <a:rPr lang="en-US" sz="3000" b="1" dirty="0">
                 <a:solidFill>
                   <a:srgbClr val="111111"/>
                 </a:solidFill>
@@ -17617,15 +17915,32 @@
                 <a:ea typeface="Times New Roman" pitchFamily="34" charset="-122"/>
                 <a:cs typeface="Times New Roman" pitchFamily="34" charset="-120"/>
               </a:rPr>
-              <a:t>Migration between two places is proportional to the product of their populations and inversely proportional to the square of the distance: M = k × Pi × Pj ÷ d². Large cities therefore exert a strong pull, even from far away, as Douala does on the whole country.</a:t>
-            </a:r>
-            <a:endParaRPr lang="en-US" sz="2800" dirty="0"/>
+              <a:t>Zipf's inverse distance law: </a:t>
+            </a:r>
+            <a:pPr algn="l" indent="0" marL="0">
+              <a:spcAft>
+                <a:spcPts val="800"/>
+              </a:spcAft>
+              <a:buNone/>
+            </a:pPr>
+            <a:r>
+              <a:rPr lang="en-US" sz="3000" dirty="0">
+                <a:solidFill>
+                  <a:srgbClr val="111111"/>
+                </a:solidFill>
+                <a:latin typeface="Times New Roman" pitchFamily="34" charset="0"/>
+                <a:ea typeface="Times New Roman" pitchFamily="34" charset="-122"/>
+                <a:cs typeface="Times New Roman" pitchFamily="34" charset="-120"/>
+              </a:rPr>
+              <a:t>The number of migrants between two places is inversely proportional to the distance between them: M ∝ 1 ÷ d. Many people move short distances, and few move far.</a:t>
+            </a:r>
+            <a:endParaRPr lang="en-US" sz="3000" dirty="0"/>
           </a:p>
         </p:txBody>
       </p:sp>
       <p:pic>
         <p:nvPicPr>
-          <p:cNvPr id="6" name="Image 0" descr="/home/claude/f4/img/v2/gravity_big.png">    </p:cNvPr>
+          <p:cNvPr id="6" name="Image 0" descr="/home/claude/f4/img/v2/zipf_big.png">    </p:cNvPr>
           <p:cNvPicPr>
             <a:picLocks noChangeAspect="1"/>
           </p:cNvPicPr>
@@ -17639,8 +17954,8 @@
         </p:blipFill>
         <p:spPr>
           <a:xfrm>
-            <a:off x="6537960" y="2849678"/>
-            <a:ext cx="5470855" cy="2137053"/>
+            <a:off x="6537960" y="2721454"/>
+            <a:ext cx="5470855" cy="2393499"/>
           </a:xfrm>
           <a:prstGeom prst="rect">
             <a:avLst/>
@@ -17680,7 +17995,7 @@
                 <a:ea typeface="Times New Roman" pitchFamily="34" charset="-122"/>
                 <a:cs typeface="Times New Roman" pitchFamily="34" charset="-120"/>
               </a:rPr>
-              <a:t>Illustration: the gravity model</a:t>
+              <a:t>Illustration: Zipf's law</a:t>
             </a:r>
             <a:endParaRPr lang="en-US" sz="1600" dirty="0"/>
           </a:p>
@@ -17874,7 +18189,7 @@
                 <a:ea typeface="Times New Roman" pitchFamily="34" charset="-122"/>
                 <a:cs typeface="Times New Roman" pitchFamily="34" charset="-120"/>
               </a:rPr>
-              <a:t>B) Stouffer's Intervening Opportunities Model</a:t>
+              <a:t>A) Zipf's Law and the Gravity Model</a:t>
             </a:r>
             <a:endParaRPr lang="en-US" sz="3000" dirty="0"/>
           </a:p>
@@ -17908,7 +18223,7 @@
               <a:buNone/>
             </a:pPr>
             <a:r>
-              <a:rPr lang="en-US" sz="3000" i="1" dirty="0">
+              <a:rPr lang="en-US" sz="2800" b="1" dirty="0">
                 <a:solidFill>
                   <a:srgbClr val="111111"/>
                 </a:solidFill>
@@ -17916,11 +18231,8 @@
                 <a:ea typeface="Times New Roman" pitchFamily="34" charset="-122"/>
                 <a:cs typeface="Times New Roman" pitchFamily="34" charset="-120"/>
               </a:rPr>
-              <a:t>Stouffer's model explains migration as follows:</a:t>
-            </a:r>
-            <a:endParaRPr lang="en-US" sz="3000" dirty="0"/>
-          </a:p>
-          <a:p>
+              <a:t>The gravity model: </a:t>
+            </a:r>
             <a:pPr algn="l" indent="0" marL="0">
               <a:spcAft>
                 <a:spcPts val="800"/>
@@ -17928,7 +18240,7 @@
               <a:buNone/>
             </a:pPr>
             <a:r>
-              <a:rPr lang="en-US" sz="3000" b="1" dirty="0">
+              <a:rPr lang="en-US" sz="2800" dirty="0">
                 <a:solidFill>
                   <a:srgbClr val="111111"/>
                 </a:solidFill>
@@ -17936,32 +18248,15 @@
                 <a:ea typeface="Times New Roman" pitchFamily="34" charset="-122"/>
                 <a:cs typeface="Times New Roman" pitchFamily="34" charset="-120"/>
               </a:rPr>
-              <a:t>Principle: </a:t>
-            </a:r>
-            <a:pPr algn="l" indent="0" marL="0">
-              <a:spcAft>
-                <a:spcPts val="800"/>
-              </a:spcAft>
-              <a:buNone/>
-            </a:pPr>
-            <a:r>
-              <a:rPr lang="en-US" sz="3000" dirty="0">
-                <a:solidFill>
-                  <a:srgbClr val="111111"/>
-                </a:solidFill>
-                <a:latin typeface="Times New Roman" pitchFamily="34" charset="0"/>
-                <a:ea typeface="Times New Roman" pitchFamily="34" charset="-122"/>
-                <a:cs typeface="Times New Roman" pitchFamily="34" charset="-120"/>
-              </a:rPr>
-              <a:t>The number of migrants depends less on distance than on the opportunities found on the way. An opportunity between the origin and the destination can stop the migrant before he arrives.</a:t>
-            </a:r>
-            <a:endParaRPr lang="en-US" sz="3000" dirty="0"/>
+              <a:t>Migration between two places is proportional to the product of their populations and inversely proportional to the square of the distance: M = k × Pi × Pj ÷ d². Large cities therefore exert a strong pull, even from far away, as Douala does on the whole country.</a:t>
+            </a:r>
+            <a:endParaRPr lang="en-US" sz="2800" dirty="0"/>
           </a:p>
         </p:txBody>
       </p:sp>
       <p:pic>
         <p:nvPicPr>
-          <p:cNvPr id="6" name="Image 0" descr="/home/claude/f4/img/v2/stouffer_big.png">    </p:cNvPr>
+          <p:cNvPr id="6" name="Image 0" descr="/home/claude/f4/img/v2/gravity_big.png">    </p:cNvPr>
           <p:cNvPicPr>
             <a:picLocks noChangeAspect="1"/>
           </p:cNvPicPr>
@@ -18016,7 +18311,7 @@
                 <a:ea typeface="Times New Roman" pitchFamily="34" charset="-122"/>
                 <a:cs typeface="Times New Roman" pitchFamily="34" charset="-120"/>
               </a:rPr>
-              <a:t>Illustration: Stouffer's model</a:t>
+              <a:t>Illustration: the gravity model</a:t>
             </a:r>
             <a:endParaRPr lang="en-US" sz="1600" dirty="0"/>
           </a:p>
@@ -18134,9 +18429,170 @@
           </a:p>
         </p:txBody>
       </p:sp>
+      <p:sp>
+        <p:nvSpPr>
+          <p:cNvPr id="3" name="Text 1"/>
+          <p:cNvSpPr/>
+          <p:nvPr/>
+        </p:nvSpPr>
+        <p:spPr>
+          <a:xfrm>
+            <a:off x="365760" y="1005840"/>
+            <a:ext cx="11460175" cy="731520"/>
+          </a:xfrm>
+          <a:prstGeom prst="rect">
+            <a:avLst/>
+          </a:prstGeom>
+          <a:noFill/>
+          <a:ln/>
+        </p:spPr>
+        <p:txBody>
+          <a:bodyPr wrap="square" lIns="0" tIns="0" rIns="0" bIns="0" rtlCol="0" anchor="ctr">
+            <a:normAutofit/>
+          </a:bodyPr>
+          <a:lstStyle/>
+          <a:p>
+            <a:pPr algn="ctr" indent="0" marL="0">
+              <a:buNone/>
+            </a:pPr>
+            <a:r>
+              <a:rPr lang="en-US" sz="3600" b="1" dirty="0">
+                <a:solidFill>
+                  <a:srgbClr val="990011"/>
+                </a:solidFill>
+                <a:latin typeface="Times New Roman" pitchFamily="34" charset="0"/>
+                <a:ea typeface="Times New Roman" pitchFamily="34" charset="-122"/>
+                <a:cs typeface="Times New Roman" pitchFamily="34" charset="-120"/>
+              </a:rPr>
+              <a:t>3. Laws and Theories of Migration</a:t>
+            </a:r>
+            <a:endParaRPr lang="en-US" sz="3600" dirty="0"/>
+          </a:p>
+        </p:txBody>
+      </p:sp>
+      <p:sp>
+        <p:nvSpPr>
+          <p:cNvPr id="4" name="Text 2"/>
+          <p:cNvSpPr/>
+          <p:nvPr/>
+        </p:nvSpPr>
+        <p:spPr>
+          <a:xfrm>
+            <a:off x="365760" y="1737360"/>
+            <a:ext cx="6035040" cy="457200"/>
+          </a:xfrm>
+          <a:prstGeom prst="rect">
+            <a:avLst/>
+          </a:prstGeom>
+          <a:noFill/>
+          <a:ln/>
+        </p:spPr>
+        <p:txBody>
+          <a:bodyPr wrap="square" lIns="0" tIns="0" rIns="0" bIns="0" rtlCol="0" anchor="ctr">
+            <a:normAutofit/>
+          </a:bodyPr>
+          <a:lstStyle/>
+          <a:p>
+            <a:pPr algn="l" indent="0" marL="0">
+              <a:buNone/>
+            </a:pPr>
+            <a:r>
+              <a:rPr lang="en-US" sz="3000" b="1" dirty="0">
+                <a:solidFill>
+                  <a:srgbClr val="990011"/>
+                </a:solidFill>
+                <a:latin typeface="Times New Roman" pitchFamily="34" charset="0"/>
+                <a:ea typeface="Times New Roman" pitchFamily="34" charset="-122"/>
+                <a:cs typeface="Times New Roman" pitchFamily="34" charset="-120"/>
+              </a:rPr>
+              <a:t>B) Stouffer's Intervening Opportunities Model</a:t>
+            </a:r>
+            <a:endParaRPr lang="en-US" sz="3000" dirty="0"/>
+          </a:p>
+        </p:txBody>
+      </p:sp>
+      <p:sp>
+        <p:nvSpPr>
+          <p:cNvPr id="5" name="Text 3"/>
+          <p:cNvSpPr/>
+          <p:nvPr/>
+        </p:nvSpPr>
+        <p:spPr>
+          <a:xfrm>
+            <a:off x="365760" y="2240280"/>
+            <a:ext cx="6035040" cy="4160520"/>
+          </a:xfrm>
+          <a:prstGeom prst="rect">
+            <a:avLst/>
+          </a:prstGeom>
+          <a:noFill/>
+          <a:ln/>
+        </p:spPr>
+        <p:txBody>
+          <a:bodyPr wrap="square" lIns="0" tIns="0" rIns="0" bIns="0" rtlCol="0" anchor="t"/>
+          <a:lstStyle/>
+          <a:p>
+            <a:pPr algn="l" indent="0" marL="0">
+              <a:spcAft>
+                <a:spcPts val="800"/>
+              </a:spcAft>
+              <a:buNone/>
+            </a:pPr>
+            <a:r>
+              <a:rPr lang="en-US" sz="2800" i="1" dirty="0">
+                <a:solidFill>
+                  <a:srgbClr val="111111"/>
+                </a:solidFill>
+                <a:latin typeface="Times New Roman" pitchFamily="34" charset="0"/>
+                <a:ea typeface="Times New Roman" pitchFamily="34" charset="-122"/>
+                <a:cs typeface="Times New Roman" pitchFamily="34" charset="-120"/>
+              </a:rPr>
+              <a:t>Stouffer's model explains migration as follows:</a:t>
+            </a:r>
+            <a:endParaRPr lang="en-US" sz="2800" dirty="0"/>
+          </a:p>
+          <a:p>
+            <a:pPr algn="l" indent="0" marL="0">
+              <a:spcAft>
+                <a:spcPts val="800"/>
+              </a:spcAft>
+              <a:buNone/>
+            </a:pPr>
+            <a:r>
+              <a:rPr lang="en-US" sz="2800" b="1" dirty="0">
+                <a:solidFill>
+                  <a:srgbClr val="111111"/>
+                </a:solidFill>
+                <a:latin typeface="Times New Roman" pitchFamily="34" charset="0"/>
+                <a:ea typeface="Times New Roman" pitchFamily="34" charset="-122"/>
+                <a:cs typeface="Times New Roman" pitchFamily="34" charset="-120"/>
+              </a:rPr>
+              <a:t>Principle: </a:t>
+            </a:r>
+            <a:pPr algn="l" indent="0" marL="0">
+              <a:spcAft>
+                <a:spcPts val="800"/>
+              </a:spcAft>
+              <a:buNone/>
+            </a:pPr>
+            <a:r>
+              <a:rPr lang="en-US" sz="2800" dirty="0">
+                <a:solidFill>
+                  <a:srgbClr val="111111"/>
+                </a:solidFill>
+                <a:latin typeface="Times New Roman" pitchFamily="34" charset="0"/>
+                <a:ea typeface="Times New Roman" pitchFamily="34" charset="-122"/>
+                <a:cs typeface="Times New Roman" pitchFamily="34" charset="-120"/>
+              </a:rPr>
+              <a:t>The number of migrants depends less on distance than on the opportunities found on the way. An opportunity between the origin and the destination can stop the migrant before reaching the destination.</a:t>
+            </a:r>
+            <a:endParaRPr lang="en-US" sz="2800" dirty="0"/>
+          </a:p>
+        </p:txBody>
+      </p:sp>
       <p:pic>
         <p:nvPicPr>
-          <p:cNvPr id="3" name="Image 0" descr="/home/claude/f4/img/minesec_sheet.png">    </p:cNvPr>
+          <p:cNvPr id="6" name="Image 0" descr="/home/claude/f4/img/v2/stouffer_big.png">    </p:cNvPr>
           <p:cNvPicPr>
             <a:picLocks noChangeAspect="1"/>
           </p:cNvPicPr>
@@ -18150,8 +18606,8 @@
         </p:blipFill>
         <p:spPr>
           <a:xfrm>
-            <a:off x="0" y="658368"/>
-            <a:ext cx="1463040" cy="5833872"/>
+            <a:off x="6537960" y="2849678"/>
+            <a:ext cx="5470855" cy="2137053"/>
           </a:xfrm>
           <a:prstGeom prst="rect">
             <a:avLst/>
@@ -18160,14 +18616,14 @@
       </p:pic>
       <p:sp>
         <p:nvSpPr>
-          <p:cNvPr id="4" name="Text 1"/>
+          <p:cNvPr id="7" name="Text 4"/>
           <p:cNvSpPr/>
           <p:nvPr/>
         </p:nvSpPr>
         <p:spPr>
           <a:xfrm>
-            <a:off x="1691640" y="1005840"/>
-            <a:ext cx="10180015" cy="731520"/>
+            <a:off x="6537960" y="6089904"/>
+            <a:ext cx="5470855" cy="347472"/>
           </a:xfrm>
           <a:prstGeom prst="rect">
             <a:avLst/>
@@ -18176,124 +18632,24 @@
           <a:ln/>
         </p:spPr>
         <p:txBody>
-          <a:bodyPr wrap="square" lIns="0" tIns="0" rIns="0" bIns="0" rtlCol="0" anchor="ctr">
-            <a:normAutofit/>
-          </a:bodyPr>
+          <a:bodyPr wrap="square" lIns="0" tIns="0" rIns="0" bIns="0" rtlCol="0" anchor="ctr"/>
           <a:lstStyle/>
           <a:p>
             <a:pPr algn="ctr" indent="0" marL="0">
               <a:buNone/>
             </a:pPr>
             <a:r>
-              <a:rPr lang="en-US" sz="3600" b="1" dirty="0">
-                <a:solidFill>
-                  <a:srgbClr val="990011"/>
+              <a:rPr lang="en-US" sz="1600" i="1" dirty="0">
+                <a:solidFill>
+                  <a:srgbClr val="555555"/>
                 </a:solidFill>
                 <a:latin typeface="Times New Roman" pitchFamily="34" charset="0"/>
                 <a:ea typeface="Times New Roman" pitchFamily="34" charset="-122"/>
                 <a:cs typeface="Times New Roman" pitchFamily="34" charset="-120"/>
               </a:rPr>
-              <a:t>3. Laws and Theories of Migration</a:t>
-            </a:r>
-            <a:endParaRPr lang="en-US" sz="3600" dirty="0"/>
-          </a:p>
-        </p:txBody>
-      </p:sp>
-      <p:sp>
-        <p:nvSpPr>
-          <p:cNvPr id="5" name="Text 2"/>
-          <p:cNvSpPr/>
-          <p:nvPr/>
-        </p:nvSpPr>
-        <p:spPr>
-          <a:xfrm>
-            <a:off x="1691640" y="1737360"/>
-            <a:ext cx="10180015" cy="457200"/>
-          </a:xfrm>
-          <a:prstGeom prst="rect">
-            <a:avLst/>
-          </a:prstGeom>
-          <a:noFill/>
-          <a:ln/>
-        </p:spPr>
-        <p:txBody>
-          <a:bodyPr wrap="square" lIns="0" tIns="0" rIns="0" bIns="0" rtlCol="0" anchor="ctr"/>
-          <a:lstStyle/>
-          <a:p>
-            <a:pPr algn="l" indent="0" marL="0">
-              <a:buNone/>
-            </a:pPr>
-            <a:r>
-              <a:rPr lang="en-US" sz="3200" b="1" dirty="0">
-                <a:solidFill>
-                  <a:srgbClr val="990011"/>
-                </a:solidFill>
-                <a:latin typeface="Times New Roman" pitchFamily="34" charset="0"/>
-                <a:ea typeface="Times New Roman" pitchFamily="34" charset="-122"/>
-                <a:cs typeface="Times New Roman" pitchFamily="34" charset="-120"/>
-              </a:rPr>
-              <a:t>B) Stouffer's Intervening Opportunities Model</a:t>
-            </a:r>
-            <a:endParaRPr lang="en-US" sz="3200" dirty="0"/>
-          </a:p>
-        </p:txBody>
-      </p:sp>
-      <p:sp>
-        <p:nvSpPr>
-          <p:cNvPr id="6" name="Text 3"/>
-          <p:cNvSpPr/>
-          <p:nvPr/>
-        </p:nvSpPr>
-        <p:spPr>
-          <a:xfrm>
-            <a:off x="1691640" y="2240280"/>
-            <a:ext cx="10180015" cy="4206240"/>
-          </a:xfrm>
-          <a:prstGeom prst="rect">
-            <a:avLst/>
-          </a:prstGeom>
-          <a:noFill/>
-          <a:ln/>
-        </p:spPr>
-        <p:txBody>
-          <a:bodyPr wrap="square" lIns="0" tIns="0" rIns="0" bIns="0" rtlCol="0" anchor="t"/>
-          <a:lstStyle/>
-          <a:p>
-            <a:pPr algn="l" indent="0" marL="0">
-              <a:spcAft>
-                <a:spcPts val="800"/>
-              </a:spcAft>
-              <a:buNone/>
-            </a:pPr>
-            <a:r>
-              <a:rPr lang="en-US" sz="4000" b="1" dirty="0">
-                <a:solidFill>
-                  <a:srgbClr val="111111"/>
-                </a:solidFill>
-                <a:latin typeface="Times New Roman" pitchFamily="34" charset="0"/>
-                <a:ea typeface="Times New Roman" pitchFamily="34" charset="-122"/>
-                <a:cs typeface="Times New Roman" pitchFamily="34" charset="-120"/>
-              </a:rPr>
-              <a:t>Formula and example: </a:t>
-            </a:r>
-            <a:pPr algn="l" indent="0" marL="0">
-              <a:spcAft>
-                <a:spcPts val="800"/>
-              </a:spcAft>
-              <a:buNone/>
-            </a:pPr>
-            <a:r>
-              <a:rPr lang="en-US" sz="4000" dirty="0">
-                <a:solidFill>
-                  <a:srgbClr val="111111"/>
-                </a:solidFill>
-                <a:latin typeface="Times New Roman" pitchFamily="34" charset="0"/>
-                <a:ea typeface="Times New Roman" pitchFamily="34" charset="-122"/>
-                <a:cs typeface="Times New Roman" pitchFamily="34" charset="-120"/>
-              </a:rPr>
-              <a:t>In a simplified form, M = k × Oj ÷ Oint, where Oj is the opportunities at the destination and Oint the opportunities on the way. For example, a migrant from Garoua may settle in Ngaoundéré or Yaoundé instead of continuing to Douala.</a:t>
-            </a:r>
-            <a:endParaRPr lang="en-US" sz="4000" dirty="0"/>
+              <a:t>Illustration: intervening opportunities</a:t>
+            </a:r>
+            <a:endParaRPr lang="en-US" sz="1600" dirty="0"/>
           </a:p>
         </p:txBody>
       </p:sp>
@@ -18409,129 +18765,9 @@
           </a:p>
         </p:txBody>
       </p:sp>
-      <p:sp>
-        <p:nvSpPr>
-          <p:cNvPr id="3" name="Text 1"/>
-          <p:cNvSpPr/>
-          <p:nvPr/>
-        </p:nvSpPr>
-        <p:spPr>
-          <a:xfrm>
-            <a:off x="365760" y="1005840"/>
-            <a:ext cx="11460175" cy="731520"/>
-          </a:xfrm>
-          <a:prstGeom prst="rect">
-            <a:avLst/>
-          </a:prstGeom>
-          <a:noFill/>
-          <a:ln/>
-        </p:spPr>
-        <p:txBody>
-          <a:bodyPr wrap="square" lIns="0" tIns="0" rIns="0" bIns="0" rtlCol="0" anchor="ctr">
-            <a:normAutofit/>
-          </a:bodyPr>
-          <a:lstStyle/>
-          <a:p>
-            <a:pPr algn="ctr" indent="0" marL="0">
-              <a:buNone/>
-            </a:pPr>
-            <a:r>
-              <a:rPr lang="en-US" sz="3600" b="1" dirty="0">
-                <a:solidFill>
-                  <a:srgbClr val="990011"/>
-                </a:solidFill>
-                <a:latin typeface="Times New Roman" pitchFamily="34" charset="0"/>
-                <a:ea typeface="Times New Roman" pitchFamily="34" charset="-122"/>
-                <a:cs typeface="Times New Roman" pitchFamily="34" charset="-120"/>
-              </a:rPr>
-              <a:t>4. Calculations Based on the Models</a:t>
-            </a:r>
-            <a:endParaRPr lang="en-US" sz="3600" dirty="0"/>
-          </a:p>
-        </p:txBody>
-      </p:sp>
-      <p:sp>
-        <p:nvSpPr>
-          <p:cNvPr id="4" name="Text 2"/>
-          <p:cNvSpPr/>
-          <p:nvPr/>
-        </p:nvSpPr>
-        <p:spPr>
-          <a:xfrm>
-            <a:off x="365760" y="1783080"/>
-            <a:ext cx="6035040" cy="4617720"/>
-          </a:xfrm>
-          <a:prstGeom prst="rect">
-            <a:avLst/>
-          </a:prstGeom>
-          <a:noFill/>
-          <a:ln/>
-        </p:spPr>
-        <p:txBody>
-          <a:bodyPr wrap="square" lIns="0" tIns="0" rIns="0" bIns="0" rtlCol="0" anchor="t"/>
-          <a:lstStyle/>
-          <a:p>
-            <a:pPr algn="l" indent="0" marL="0">
-              <a:spcAft>
-                <a:spcPts val="800"/>
-              </a:spcAft>
-              <a:buNone/>
-            </a:pPr>
-            <a:r>
-              <a:rPr lang="en-US" sz="3200" i="1" dirty="0">
-                <a:solidFill>
-                  <a:srgbClr val="111111"/>
-                </a:solidFill>
-                <a:latin typeface="Times New Roman" pitchFamily="34" charset="0"/>
-                <a:ea typeface="Times New Roman" pitchFamily="34" charset="-122"/>
-                <a:cs typeface="Times New Roman" pitchFamily="34" charset="-120"/>
-              </a:rPr>
-              <a:t>The models are applied as in the following examples:</a:t>
-            </a:r>
-            <a:endParaRPr lang="en-US" sz="3200" dirty="0"/>
-          </a:p>
-          <a:p>
-            <a:pPr algn="l" indent="0" marL="0">
-              <a:spcAft>
-                <a:spcPts val="800"/>
-              </a:spcAft>
-              <a:buNone/>
-            </a:pPr>
-            <a:r>
-              <a:rPr lang="en-US" sz="3200" b="1" dirty="0">
-                <a:solidFill>
-                  <a:srgbClr val="111111"/>
-                </a:solidFill>
-                <a:latin typeface="Times New Roman" pitchFamily="34" charset="0"/>
-                <a:ea typeface="Times New Roman" pitchFamily="34" charset="-122"/>
-                <a:cs typeface="Times New Roman" pitchFamily="34" charset="-120"/>
-              </a:rPr>
-              <a:t>Gravity model: </a:t>
-            </a:r>
-            <a:pPr algn="l" indent="0" marL="0">
-              <a:spcAft>
-                <a:spcPts val="800"/>
-              </a:spcAft>
-              <a:buNone/>
-            </a:pPr>
-            <a:r>
-              <a:rPr lang="en-US" sz="3200" dirty="0">
-                <a:solidFill>
-                  <a:srgbClr val="111111"/>
-                </a:solidFill>
-                <a:latin typeface="Times New Roman" pitchFamily="34" charset="0"/>
-                <a:ea typeface="Times New Roman" pitchFamily="34" charset="-122"/>
-                <a:cs typeface="Times New Roman" pitchFamily="34" charset="-120"/>
-              </a:rPr>
-              <a:t>City A has 500,000 people and City B 100,000, and they are 150 km apart, with k = 1. The interaction is 500,000 × 100,000 ÷ 150² ≈ 2,222,222, an index used to compare pairs of towns and not a number of people.</a:t>
-            </a:r>
-            <a:endParaRPr lang="en-US" sz="3200" dirty="0"/>
-          </a:p>
-        </p:txBody>
-      </p:sp>
       <p:pic>
         <p:nvPicPr>
-          <p:cNvPr id="5" name="Image 0" descr="/home/claude/f4/img/v2/pop2_gravity_calc.png">    </p:cNvPr>
+          <p:cNvPr id="3" name="Image 0" descr="/home/claude/f4/img/minesec_sheet.png">    </p:cNvPr>
           <p:cNvPicPr>
             <a:picLocks noChangeAspect="1"/>
           </p:cNvPicPr>
@@ -18545,8 +18781,8 @@
         </p:blipFill>
         <p:spPr>
           <a:xfrm>
-            <a:off x="6537960" y="2849678"/>
-            <a:ext cx="5470855" cy="2137053"/>
+            <a:off x="0" y="658368"/>
+            <a:ext cx="2468880" cy="5833872"/>
           </a:xfrm>
           <a:prstGeom prst="rect">
             <a:avLst/>
@@ -18555,14 +18791,14 @@
       </p:pic>
       <p:sp>
         <p:nvSpPr>
-          <p:cNvPr id="6" name="Text 3"/>
+          <p:cNvPr id="4" name="Text 1"/>
           <p:cNvSpPr/>
           <p:nvPr/>
         </p:nvSpPr>
         <p:spPr>
           <a:xfrm>
-            <a:off x="6537960" y="6089904"/>
-            <a:ext cx="5470855" cy="347472"/>
+            <a:off x="2697480" y="1005840"/>
+            <a:ext cx="9174175" cy="731520"/>
           </a:xfrm>
           <a:prstGeom prst="rect">
             <a:avLst/>
@@ -18571,24 +18807,124 @@
           <a:ln/>
         </p:spPr>
         <p:txBody>
-          <a:bodyPr wrap="square" lIns="0" tIns="0" rIns="0" bIns="0" rtlCol="0" anchor="ctr"/>
+          <a:bodyPr wrap="square" lIns="0" tIns="0" rIns="0" bIns="0" rtlCol="0" anchor="ctr">
+            <a:normAutofit/>
+          </a:bodyPr>
           <a:lstStyle/>
           <a:p>
             <a:pPr algn="ctr" indent="0" marL="0">
               <a:buNone/>
             </a:pPr>
             <a:r>
-              <a:rPr lang="en-US" sz="1600" i="1" dirty="0">
-                <a:solidFill>
-                  <a:srgbClr val="555555"/>
+              <a:rPr lang="en-US" sz="3600" b="1" dirty="0">
+                <a:solidFill>
+                  <a:srgbClr val="990011"/>
                 </a:solidFill>
                 <a:latin typeface="Times New Roman" pitchFamily="34" charset="0"/>
                 <a:ea typeface="Times New Roman" pitchFamily="34" charset="-122"/>
                 <a:cs typeface="Times New Roman" pitchFamily="34" charset="-120"/>
               </a:rPr>
-              <a:t>Illustration: a gravity calculation</a:t>
-            </a:r>
-            <a:endParaRPr lang="en-US" sz="1600" dirty="0"/>
+              <a:t>3. Laws and Theories of Migration</a:t>
+            </a:r>
+            <a:endParaRPr lang="en-US" sz="3600" dirty="0"/>
+          </a:p>
+        </p:txBody>
+      </p:sp>
+      <p:sp>
+        <p:nvSpPr>
+          <p:cNvPr id="5" name="Text 2"/>
+          <p:cNvSpPr/>
+          <p:nvPr/>
+        </p:nvSpPr>
+        <p:spPr>
+          <a:xfrm>
+            <a:off x="2697480" y="1737360"/>
+            <a:ext cx="9174175" cy="457200"/>
+          </a:xfrm>
+          <a:prstGeom prst="rect">
+            <a:avLst/>
+          </a:prstGeom>
+          <a:noFill/>
+          <a:ln/>
+        </p:spPr>
+        <p:txBody>
+          <a:bodyPr wrap="square" lIns="0" tIns="0" rIns="0" bIns="0" rtlCol="0" anchor="ctr"/>
+          <a:lstStyle/>
+          <a:p>
+            <a:pPr algn="l" indent="0" marL="0">
+              <a:buNone/>
+            </a:pPr>
+            <a:r>
+              <a:rPr lang="en-US" sz="3200" b="1" dirty="0">
+                <a:solidFill>
+                  <a:srgbClr val="990011"/>
+                </a:solidFill>
+                <a:latin typeface="Times New Roman" pitchFamily="34" charset="0"/>
+                <a:ea typeface="Times New Roman" pitchFamily="34" charset="-122"/>
+                <a:cs typeface="Times New Roman" pitchFamily="34" charset="-120"/>
+              </a:rPr>
+              <a:t>B) Stouffer's Intervening Opportunities Model</a:t>
+            </a:r>
+            <a:endParaRPr lang="en-US" sz="3200" dirty="0"/>
+          </a:p>
+        </p:txBody>
+      </p:sp>
+      <p:sp>
+        <p:nvSpPr>
+          <p:cNvPr id="6" name="Text 3"/>
+          <p:cNvSpPr/>
+          <p:nvPr/>
+        </p:nvSpPr>
+        <p:spPr>
+          <a:xfrm>
+            <a:off x="2697480" y="2240280"/>
+            <a:ext cx="9174175" cy="4206240"/>
+          </a:xfrm>
+          <a:prstGeom prst="rect">
+            <a:avLst/>
+          </a:prstGeom>
+          <a:noFill/>
+          <a:ln/>
+        </p:spPr>
+        <p:txBody>
+          <a:bodyPr wrap="square" lIns="0" tIns="0" rIns="0" bIns="0" rtlCol="0" anchor="t"/>
+          <a:lstStyle/>
+          <a:p>
+            <a:pPr algn="l" indent="0" marL="0">
+              <a:spcAft>
+                <a:spcPts val="800"/>
+              </a:spcAft>
+              <a:buNone/>
+            </a:pPr>
+            <a:r>
+              <a:rPr lang="en-US" sz="4000" b="1" dirty="0">
+                <a:solidFill>
+                  <a:srgbClr val="111111"/>
+                </a:solidFill>
+                <a:latin typeface="Times New Roman" pitchFamily="34" charset="0"/>
+                <a:ea typeface="Times New Roman" pitchFamily="34" charset="-122"/>
+                <a:cs typeface="Times New Roman" pitchFamily="34" charset="-120"/>
+              </a:rPr>
+              <a:t>Formula: </a:t>
+            </a:r>
+            <a:pPr algn="l" indent="0" marL="0">
+              <a:spcAft>
+                <a:spcPts val="800"/>
+              </a:spcAft>
+              <a:buNone/>
+            </a:pPr>
+            <a:r>
+              <a:rPr lang="en-US" sz="4000" dirty="0">
+                <a:solidFill>
+                  <a:srgbClr val="111111"/>
+                </a:solidFill>
+                <a:latin typeface="Times New Roman" pitchFamily="34" charset="0"/>
+                <a:ea typeface="Times New Roman" pitchFamily="34" charset="-122"/>
+                <a:cs typeface="Times New Roman" pitchFamily="34" charset="-120"/>
+              </a:rPr>
+              <a:t>In a simplified form, M = k × Oj ÷ Oint, where Oj is the opportunities at the destination and Oint the opportunities on the way. The more opportunities there are on the way, the fewer migrants reach the destination.</a:t>
+            </a:r>
+            <a:endParaRPr lang="en-US" sz="4000" dirty="0"/>
           </a:p>
         </p:txBody>
       </p:sp>
@@ -18923,109 +19259,9 @@
           </a:p>
         </p:txBody>
       </p:sp>
-      <p:sp>
-        <p:nvSpPr>
-          <p:cNvPr id="3" name="Text 1"/>
-          <p:cNvSpPr/>
-          <p:nvPr/>
-        </p:nvSpPr>
-        <p:spPr>
-          <a:xfrm>
-            <a:off x="365760" y="1005840"/>
-            <a:ext cx="11460175" cy="731520"/>
-          </a:xfrm>
-          <a:prstGeom prst="rect">
-            <a:avLst/>
-          </a:prstGeom>
-          <a:noFill/>
-          <a:ln/>
-        </p:spPr>
-        <p:txBody>
-          <a:bodyPr wrap="square" lIns="0" tIns="0" rIns="0" bIns="0" rtlCol="0" anchor="ctr">
-            <a:normAutofit/>
-          </a:bodyPr>
-          <a:lstStyle/>
-          <a:p>
-            <a:pPr algn="ctr" indent="0" marL="0">
-              <a:buNone/>
-            </a:pPr>
-            <a:r>
-              <a:rPr lang="en-US" sz="3600" b="1" dirty="0">
-                <a:solidFill>
-                  <a:srgbClr val="990011"/>
-                </a:solidFill>
-                <a:latin typeface="Times New Roman" pitchFamily="34" charset="0"/>
-                <a:ea typeface="Times New Roman" pitchFamily="34" charset="-122"/>
-                <a:cs typeface="Times New Roman" pitchFamily="34" charset="-120"/>
-              </a:rPr>
-              <a:t>4. Calculations Based on the Models</a:t>
-            </a:r>
-            <a:endParaRPr lang="en-US" sz="3600" dirty="0"/>
-          </a:p>
-        </p:txBody>
-      </p:sp>
-      <p:sp>
-        <p:nvSpPr>
-          <p:cNvPr id="4" name="Text 2"/>
-          <p:cNvSpPr/>
-          <p:nvPr/>
-        </p:nvSpPr>
-        <p:spPr>
-          <a:xfrm>
-            <a:off x="365760" y="1783080"/>
-            <a:ext cx="6035040" cy="4617720"/>
-          </a:xfrm>
-          <a:prstGeom prst="rect">
-            <a:avLst/>
-          </a:prstGeom>
-          <a:noFill/>
-          <a:ln/>
-        </p:spPr>
-        <p:txBody>
-          <a:bodyPr wrap="square" lIns="0" tIns="0" rIns="0" bIns="0" rtlCol="0" anchor="t"/>
-          <a:lstStyle/>
-          <a:p>
-            <a:pPr algn="l" indent="0" marL="0">
-              <a:spcAft>
-                <a:spcPts val="800"/>
-              </a:spcAft>
-              <a:buNone/>
-            </a:pPr>
-            <a:r>
-              <a:rPr lang="en-US" sz="3400" b="1" dirty="0">
-                <a:solidFill>
-                  <a:srgbClr val="111111"/>
-                </a:solidFill>
-                <a:latin typeface="Times New Roman" pitchFamily="34" charset="0"/>
-                <a:ea typeface="Times New Roman" pitchFamily="34" charset="-122"/>
-                <a:cs typeface="Times New Roman" pitchFamily="34" charset="-120"/>
-              </a:rPr>
-              <a:t>Stouffer's model: </a:t>
-            </a:r>
-            <a:pPr algn="l" indent="0" marL="0">
-              <a:spcAft>
-                <a:spcPts val="800"/>
-              </a:spcAft>
-              <a:buNone/>
-            </a:pPr>
-            <a:r>
-              <a:rPr lang="en-US" sz="3400" dirty="0">
-                <a:solidFill>
-                  <a:srgbClr val="111111"/>
-                </a:solidFill>
-                <a:latin typeface="Times New Roman" pitchFamily="34" charset="0"/>
-                <a:ea typeface="Times New Roman" pitchFamily="34" charset="-122"/>
-                <a:cs typeface="Times New Roman" pitchFamily="34" charset="-120"/>
-              </a:rPr>
-              <a:t>Douala offers 50,000 jobs and the towns on the way offer 20,000, so the ratio is 50,000 ÷ 20,000 = 2.5. A ratio above 1 shows that the final destination pulls more strongly than the towns on the way.</a:t>
-            </a:r>
-            <a:endParaRPr lang="en-US" sz="3400" dirty="0"/>
-          </a:p>
-        </p:txBody>
-      </p:sp>
       <p:pic>
         <p:nvPicPr>
-          <p:cNvPr id="5" name="Image 0" descr="/home/claude/f4/img/v2/pop2_stouffer_calc.png">    </p:cNvPr>
+          <p:cNvPr id="3" name="Image 0" descr="/home/claude/f4/img/minesec_sheet.png">    </p:cNvPr>
           <p:cNvPicPr>
             <a:picLocks noChangeAspect="1"/>
           </p:cNvPicPr>
@@ -19039,8 +19275,8 @@
         </p:blipFill>
         <p:spPr>
           <a:xfrm>
-            <a:off x="6537960" y="2849678"/>
-            <a:ext cx="5470855" cy="2137053"/>
+            <a:off x="0" y="658368"/>
+            <a:ext cx="3840480" cy="5833872"/>
           </a:xfrm>
           <a:prstGeom prst="rect">
             <a:avLst/>
@@ -19049,14 +19285,14 @@
       </p:pic>
       <p:sp>
         <p:nvSpPr>
-          <p:cNvPr id="6" name="Text 3"/>
+          <p:cNvPr id="4" name="Text 1"/>
           <p:cNvSpPr/>
           <p:nvPr/>
         </p:nvSpPr>
         <p:spPr>
           <a:xfrm>
-            <a:off x="6537960" y="6089904"/>
-            <a:ext cx="5470855" cy="347472"/>
+            <a:off x="4069080" y="1005840"/>
+            <a:ext cx="7802575" cy="731520"/>
           </a:xfrm>
           <a:prstGeom prst="rect">
             <a:avLst/>
@@ -19065,24 +19301,124 @@
           <a:ln/>
         </p:spPr>
         <p:txBody>
-          <a:bodyPr wrap="square" lIns="0" tIns="0" rIns="0" bIns="0" rtlCol="0" anchor="ctr"/>
+          <a:bodyPr wrap="square" lIns="0" tIns="0" rIns="0" bIns="0" rtlCol="0" anchor="ctr">
+            <a:normAutofit/>
+          </a:bodyPr>
           <a:lstStyle/>
           <a:p>
             <a:pPr algn="ctr" indent="0" marL="0">
               <a:buNone/>
             </a:pPr>
             <a:r>
-              <a:rPr lang="en-US" sz="1600" i="1" dirty="0">
-                <a:solidFill>
-                  <a:srgbClr val="555555"/>
+              <a:rPr lang="en-US" sz="3600" b="1" dirty="0">
+                <a:solidFill>
+                  <a:srgbClr val="990011"/>
                 </a:solidFill>
                 <a:latin typeface="Times New Roman" pitchFamily="34" charset="0"/>
                 <a:ea typeface="Times New Roman" pitchFamily="34" charset="-122"/>
                 <a:cs typeface="Times New Roman" pitchFamily="34" charset="-120"/>
               </a:rPr>
-              <a:t>Illustration: a Stouffer calculation</a:t>
-            </a:r>
-            <a:endParaRPr lang="en-US" sz="1600" dirty="0"/>
+              <a:t>3. Laws and Theories of Migration</a:t>
+            </a:r>
+            <a:endParaRPr lang="en-US" sz="3600" dirty="0"/>
+          </a:p>
+        </p:txBody>
+      </p:sp>
+      <p:sp>
+        <p:nvSpPr>
+          <p:cNvPr id="5" name="Text 2"/>
+          <p:cNvSpPr/>
+          <p:nvPr/>
+        </p:nvSpPr>
+        <p:spPr>
+          <a:xfrm>
+            <a:off x="4069080" y="1737360"/>
+            <a:ext cx="7802575" cy="457200"/>
+          </a:xfrm>
+          <a:prstGeom prst="rect">
+            <a:avLst/>
+          </a:prstGeom>
+          <a:noFill/>
+          <a:ln/>
+        </p:spPr>
+        <p:txBody>
+          <a:bodyPr wrap="square" lIns="0" tIns="0" rIns="0" bIns="0" rtlCol="0" anchor="ctr"/>
+          <a:lstStyle/>
+          <a:p>
+            <a:pPr algn="l" indent="0" marL="0">
+              <a:buNone/>
+            </a:pPr>
+            <a:r>
+              <a:rPr lang="en-US" sz="2700" b="1" dirty="0">
+                <a:solidFill>
+                  <a:srgbClr val="990011"/>
+                </a:solidFill>
+                <a:latin typeface="Times New Roman" pitchFamily="34" charset="0"/>
+                <a:ea typeface="Times New Roman" pitchFamily="34" charset="-122"/>
+                <a:cs typeface="Times New Roman" pitchFamily="34" charset="-120"/>
+              </a:rPr>
+              <a:t>B) Stouffer's Intervening Opportunities Model</a:t>
+            </a:r>
+            <a:endParaRPr lang="en-US" sz="2700" dirty="0"/>
+          </a:p>
+        </p:txBody>
+      </p:sp>
+      <p:sp>
+        <p:nvSpPr>
+          <p:cNvPr id="6" name="Text 3"/>
+          <p:cNvSpPr/>
+          <p:nvPr/>
+        </p:nvSpPr>
+        <p:spPr>
+          <a:xfrm>
+            <a:off x="4069080" y="2240280"/>
+            <a:ext cx="7802575" cy="4206240"/>
+          </a:xfrm>
+          <a:prstGeom prst="rect">
+            <a:avLst/>
+          </a:prstGeom>
+          <a:noFill/>
+          <a:ln/>
+        </p:spPr>
+        <p:txBody>
+          <a:bodyPr wrap="square" lIns="0" tIns="0" rIns="0" bIns="0" rtlCol="0" anchor="t"/>
+          <a:lstStyle/>
+          <a:p>
+            <a:pPr algn="l" indent="0" marL="0">
+              <a:spcAft>
+                <a:spcPts val="800"/>
+              </a:spcAft>
+              <a:buNone/>
+            </a:pPr>
+            <a:r>
+              <a:rPr lang="en-US" sz="4000" b="1" dirty="0">
+                <a:solidFill>
+                  <a:srgbClr val="111111"/>
+                </a:solidFill>
+                <a:latin typeface="Times New Roman" pitchFamily="34" charset="0"/>
+                <a:ea typeface="Times New Roman" pitchFamily="34" charset="-122"/>
+                <a:cs typeface="Times New Roman" pitchFamily="34" charset="-120"/>
+              </a:rPr>
+              <a:t>Example: </a:t>
+            </a:r>
+            <a:pPr algn="l" indent="0" marL="0">
+              <a:spcAft>
+                <a:spcPts val="800"/>
+              </a:spcAft>
+              <a:buNone/>
+            </a:pPr>
+            <a:r>
+              <a:rPr lang="en-US" sz="4000" dirty="0">
+                <a:solidFill>
+                  <a:srgbClr val="111111"/>
+                </a:solidFill>
+                <a:latin typeface="Times New Roman" pitchFamily="34" charset="0"/>
+                <a:ea typeface="Times New Roman" pitchFamily="34" charset="-122"/>
+                <a:cs typeface="Times New Roman" pitchFamily="34" charset="-120"/>
+              </a:rPr>
+              <a:t>A migrant from Garoua who wants to go to Douala may find a job in Ngaoundéré or Yaoundé. The migrant then settles there instead of continuing to Douala.</a:t>
+            </a:r>
+            <a:endParaRPr lang="en-US" sz="4000" dirty="0"/>
           </a:p>
         </p:txBody>
       </p:sp>
@@ -19192,15 +19528,135 @@
                 <a:ea typeface="Calibri" pitchFamily="34" charset="-122"/>
                 <a:cs typeface="Calibri" pitchFamily="34" charset="-120"/>
               </a:rPr>
-              <a:t>FORMATIVE EVALUATION</a:t>
+              <a:t>BOARD SUMMARY</a:t>
             </a:r>
             <a:endParaRPr lang="en-US" sz="1400" dirty="0"/>
+          </a:p>
+        </p:txBody>
+      </p:sp>
+      <p:sp>
+        <p:nvSpPr>
+          <p:cNvPr id="3" name="Text 1"/>
+          <p:cNvSpPr/>
+          <p:nvPr/>
+        </p:nvSpPr>
+        <p:spPr>
+          <a:xfrm>
+            <a:off x="365760" y="1005840"/>
+            <a:ext cx="11460175" cy="731520"/>
+          </a:xfrm>
+          <a:prstGeom prst="rect">
+            <a:avLst/>
+          </a:prstGeom>
+          <a:noFill/>
+          <a:ln/>
+        </p:spPr>
+        <p:txBody>
+          <a:bodyPr wrap="square" lIns="0" tIns="0" rIns="0" bIns="0" rtlCol="0" anchor="ctr">
+            <a:normAutofit/>
+          </a:bodyPr>
+          <a:lstStyle/>
+          <a:p>
+            <a:pPr algn="ctr" indent="0" marL="0">
+              <a:buNone/>
+            </a:pPr>
+            <a:r>
+              <a:rPr lang="en-US" sz="3600" b="1" dirty="0">
+                <a:solidFill>
+                  <a:srgbClr val="990011"/>
+                </a:solidFill>
+                <a:latin typeface="Times New Roman" pitchFamily="34" charset="0"/>
+                <a:ea typeface="Times New Roman" pitchFamily="34" charset="-122"/>
+                <a:cs typeface="Times New Roman" pitchFamily="34" charset="-120"/>
+              </a:rPr>
+              <a:t>4. Calculations Based on the Models</a:t>
+            </a:r>
+            <a:endParaRPr lang="en-US" sz="3600" dirty="0"/>
+          </a:p>
+        </p:txBody>
+      </p:sp>
+      <p:sp>
+        <p:nvSpPr>
+          <p:cNvPr id="4" name="Text 2"/>
+          <p:cNvSpPr/>
+          <p:nvPr/>
+        </p:nvSpPr>
+        <p:spPr>
+          <a:xfrm>
+            <a:off x="365760" y="1783080"/>
+            <a:ext cx="6035040" cy="4617720"/>
+          </a:xfrm>
+          <a:prstGeom prst="rect">
+            <a:avLst/>
+          </a:prstGeom>
+          <a:noFill/>
+          <a:ln/>
+        </p:spPr>
+        <p:txBody>
+          <a:bodyPr wrap="square" lIns="0" tIns="0" rIns="0" bIns="0" rtlCol="0" anchor="t"/>
+          <a:lstStyle/>
+          <a:p>
+            <a:pPr algn="l" indent="0" marL="0">
+              <a:spcAft>
+                <a:spcPts val="800"/>
+              </a:spcAft>
+              <a:buNone/>
+            </a:pPr>
+            <a:r>
+              <a:rPr lang="en-US" sz="3200" i="1" dirty="0">
+                <a:solidFill>
+                  <a:srgbClr val="111111"/>
+                </a:solidFill>
+                <a:latin typeface="Times New Roman" pitchFamily="34" charset="0"/>
+                <a:ea typeface="Times New Roman" pitchFamily="34" charset="-122"/>
+                <a:cs typeface="Times New Roman" pitchFamily="34" charset="-120"/>
+              </a:rPr>
+              <a:t>The models are applied as in the following examples:</a:t>
+            </a:r>
+            <a:endParaRPr lang="en-US" sz="3200" dirty="0"/>
+          </a:p>
+          <a:p>
+            <a:pPr algn="l" indent="0" marL="0">
+              <a:spcAft>
+                <a:spcPts val="800"/>
+              </a:spcAft>
+              <a:buNone/>
+            </a:pPr>
+            <a:r>
+              <a:rPr lang="en-US" sz="3200" b="1" dirty="0">
+                <a:solidFill>
+                  <a:srgbClr val="111111"/>
+                </a:solidFill>
+                <a:latin typeface="Times New Roman" pitchFamily="34" charset="0"/>
+                <a:ea typeface="Times New Roman" pitchFamily="34" charset="-122"/>
+                <a:cs typeface="Times New Roman" pitchFamily="34" charset="-120"/>
+              </a:rPr>
+              <a:t>Gravity model: </a:t>
+            </a:r>
+            <a:pPr algn="l" indent="0" marL="0">
+              <a:spcAft>
+                <a:spcPts val="800"/>
+              </a:spcAft>
+              <a:buNone/>
+            </a:pPr>
+            <a:r>
+              <a:rPr lang="en-US" sz="3200" dirty="0">
+                <a:solidFill>
+                  <a:srgbClr val="111111"/>
+                </a:solidFill>
+                <a:latin typeface="Times New Roman" pitchFamily="34" charset="0"/>
+                <a:ea typeface="Times New Roman" pitchFamily="34" charset="-122"/>
+                <a:cs typeface="Times New Roman" pitchFamily="34" charset="-120"/>
+              </a:rPr>
+              <a:t>City A has 500,000 people and City B 100,000, and they are 150 km apart, with k = 1. The interaction is 500,000 × 100,000 ÷ 150² ≈ 2,222,222, an index used to compare pairs of towns and not a number of people.</a:t>
+            </a:r>
+            <a:endParaRPr lang="en-US" sz="3200" dirty="0"/>
           </a:p>
         </p:txBody>
       </p:sp>
       <p:pic>
         <p:nvPicPr>
-          <p:cNvPr id="3" name="Image 0" descr="/home/claude/f4/img/minesec_sheet.png">    </p:cNvPr>
+          <p:cNvPr id="5" name="Image 0" descr="/home/claude/f4/img/v2/pop2_gravity_calc.png">    </p:cNvPr>
           <p:cNvPicPr>
             <a:picLocks noChangeAspect="1"/>
           </p:cNvPicPr>
@@ -19214,8 +19670,8 @@
         </p:blipFill>
         <p:spPr>
           <a:xfrm>
-            <a:off x="0" y="658368"/>
-            <a:ext cx="5120640" cy="5833872"/>
+            <a:off x="6537960" y="2849678"/>
+            <a:ext cx="5470855" cy="2137053"/>
           </a:xfrm>
           <a:prstGeom prst="rect">
             <a:avLst/>
@@ -19224,14 +19680,14 @@
       </p:pic>
       <p:sp>
         <p:nvSpPr>
-          <p:cNvPr id="4" name="Text 1"/>
+          <p:cNvPr id="6" name="Text 3"/>
           <p:cNvSpPr/>
           <p:nvPr/>
         </p:nvSpPr>
         <p:spPr>
           <a:xfrm>
-            <a:off x="5349240" y="1005840"/>
-            <a:ext cx="6522415" cy="731520"/>
+            <a:off x="6537960" y="6089904"/>
+            <a:ext cx="5470855" cy="347472"/>
           </a:xfrm>
           <a:prstGeom prst="rect">
             <a:avLst/>
@@ -19240,68 +19696,24 @@
           <a:ln/>
         </p:spPr>
         <p:txBody>
-          <a:bodyPr wrap="square" lIns="0" tIns="0" rIns="0" bIns="0" rtlCol="0" anchor="ctr">
-            <a:normAutofit/>
-          </a:bodyPr>
+          <a:bodyPr wrap="square" lIns="0" tIns="0" rIns="0" bIns="0" rtlCol="0" anchor="ctr"/>
           <a:lstStyle/>
           <a:p>
             <a:pPr algn="ctr" indent="0" marL="0">
               <a:buNone/>
             </a:pPr>
             <a:r>
-              <a:rPr lang="en-US" sz="3600" b="1" dirty="0">
-                <a:solidFill>
-                  <a:srgbClr val="990011"/>
+              <a:rPr lang="en-US" sz="1600" i="1" dirty="0">
+                <a:solidFill>
+                  <a:srgbClr val="555555"/>
                 </a:solidFill>
                 <a:latin typeface="Times New Roman" pitchFamily="34" charset="0"/>
                 <a:ea typeface="Times New Roman" pitchFamily="34" charset="-122"/>
                 <a:cs typeface="Times New Roman" pitchFamily="34" charset="-120"/>
               </a:rPr>
-              <a:t>Evaluation 1</a:t>
-            </a:r>
-            <a:endParaRPr lang="en-US" sz="3600" dirty="0"/>
-          </a:p>
-        </p:txBody>
-      </p:sp>
-      <p:sp>
-        <p:nvSpPr>
-          <p:cNvPr id="5" name="Text 2"/>
-          <p:cNvSpPr/>
-          <p:nvPr/>
-        </p:nvSpPr>
-        <p:spPr>
-          <a:xfrm>
-            <a:off x="5349240" y="1783080"/>
-            <a:ext cx="6522415" cy="4663440"/>
-          </a:xfrm>
-          <a:prstGeom prst="rect">
-            <a:avLst/>
-          </a:prstGeom>
-          <a:noFill/>
-          <a:ln/>
-        </p:spPr>
-        <p:txBody>
-          <a:bodyPr wrap="square" lIns="0" tIns="0" rIns="0" bIns="0" rtlCol="0" anchor="t"/>
-          <a:lstStyle/>
-          <a:p>
-            <a:pPr algn="l" indent="0" marL="0">
-              <a:spcAft>
-                <a:spcPts val="800"/>
-              </a:spcAft>
-              <a:buNone/>
-            </a:pPr>
-            <a:r>
-              <a:rPr lang="en-US" sz="4000" dirty="0">
-                <a:solidFill>
-                  <a:srgbClr val="111111"/>
-                </a:solidFill>
-                <a:latin typeface="Times New Roman" pitchFamily="34" charset="0"/>
-                <a:ea typeface="Times New Roman" pitchFamily="34" charset="-122"/>
-                <a:cs typeface="Times New Roman" pitchFamily="34" charset="-120"/>
-              </a:rPr>
-              <a:t>Give two characteristics of migrants.</a:t>
-            </a:r>
-            <a:endParaRPr lang="en-US" sz="4000" dirty="0"/>
+              <a:t>Illustration: a gravity calculation</a:t>
+            </a:r>
+            <a:endParaRPr lang="en-US" sz="1600" dirty="0"/>
           </a:p>
         </p:txBody>
       </p:sp>
@@ -19411,15 +19823,115 @@
                 <a:ea typeface="Calibri" pitchFamily="34" charset="-122"/>
                 <a:cs typeface="Calibri" pitchFamily="34" charset="-120"/>
               </a:rPr>
-              <a:t>FORMATIVE EVALUATION</a:t>
+              <a:t>BOARD SUMMARY</a:t>
             </a:r>
             <a:endParaRPr lang="en-US" sz="1400" dirty="0"/>
+          </a:p>
+        </p:txBody>
+      </p:sp>
+      <p:sp>
+        <p:nvSpPr>
+          <p:cNvPr id="3" name="Text 1"/>
+          <p:cNvSpPr/>
+          <p:nvPr/>
+        </p:nvSpPr>
+        <p:spPr>
+          <a:xfrm>
+            <a:off x="365760" y="1005840"/>
+            <a:ext cx="11460175" cy="731520"/>
+          </a:xfrm>
+          <a:prstGeom prst="rect">
+            <a:avLst/>
+          </a:prstGeom>
+          <a:noFill/>
+          <a:ln/>
+        </p:spPr>
+        <p:txBody>
+          <a:bodyPr wrap="square" lIns="0" tIns="0" rIns="0" bIns="0" rtlCol="0" anchor="ctr">
+            <a:normAutofit/>
+          </a:bodyPr>
+          <a:lstStyle/>
+          <a:p>
+            <a:pPr algn="ctr" indent="0" marL="0">
+              <a:buNone/>
+            </a:pPr>
+            <a:r>
+              <a:rPr lang="en-US" sz="3600" b="1" dirty="0">
+                <a:solidFill>
+                  <a:srgbClr val="990011"/>
+                </a:solidFill>
+                <a:latin typeface="Times New Roman" pitchFamily="34" charset="0"/>
+                <a:ea typeface="Times New Roman" pitchFamily="34" charset="-122"/>
+                <a:cs typeface="Times New Roman" pitchFamily="34" charset="-120"/>
+              </a:rPr>
+              <a:t>4. Calculations Based on the Models</a:t>
+            </a:r>
+            <a:endParaRPr lang="en-US" sz="3600" dirty="0"/>
+          </a:p>
+        </p:txBody>
+      </p:sp>
+      <p:sp>
+        <p:nvSpPr>
+          <p:cNvPr id="4" name="Text 2"/>
+          <p:cNvSpPr/>
+          <p:nvPr/>
+        </p:nvSpPr>
+        <p:spPr>
+          <a:xfrm>
+            <a:off x="365760" y="1783080"/>
+            <a:ext cx="6035040" cy="4617720"/>
+          </a:xfrm>
+          <a:prstGeom prst="rect">
+            <a:avLst/>
+          </a:prstGeom>
+          <a:noFill/>
+          <a:ln/>
+        </p:spPr>
+        <p:txBody>
+          <a:bodyPr wrap="square" lIns="0" tIns="0" rIns="0" bIns="0" rtlCol="0" anchor="t"/>
+          <a:lstStyle/>
+          <a:p>
+            <a:pPr algn="l" indent="0" marL="0">
+              <a:spcAft>
+                <a:spcPts val="800"/>
+              </a:spcAft>
+              <a:buNone/>
+            </a:pPr>
+            <a:r>
+              <a:rPr lang="en-US" sz="3400" b="1" dirty="0">
+                <a:solidFill>
+                  <a:srgbClr val="111111"/>
+                </a:solidFill>
+                <a:latin typeface="Times New Roman" pitchFamily="34" charset="0"/>
+                <a:ea typeface="Times New Roman" pitchFamily="34" charset="-122"/>
+                <a:cs typeface="Times New Roman" pitchFamily="34" charset="-120"/>
+              </a:rPr>
+              <a:t>Stouffer's model: </a:t>
+            </a:r>
+            <a:pPr algn="l" indent="0" marL="0">
+              <a:spcAft>
+                <a:spcPts val="800"/>
+              </a:spcAft>
+              <a:buNone/>
+            </a:pPr>
+            <a:r>
+              <a:rPr lang="en-US" sz="3400" dirty="0">
+                <a:solidFill>
+                  <a:srgbClr val="111111"/>
+                </a:solidFill>
+                <a:latin typeface="Times New Roman" pitchFamily="34" charset="0"/>
+                <a:ea typeface="Times New Roman" pitchFamily="34" charset="-122"/>
+                <a:cs typeface="Times New Roman" pitchFamily="34" charset="-120"/>
+              </a:rPr>
+              <a:t>Douala offers 50,000 jobs and the towns on the way offer 20,000, so the ratio is 50,000 ÷ 20,000 = 2.5. A ratio above 1 shows that the final destination pulls more strongly than the towns on the way.</a:t>
+            </a:r>
+            <a:endParaRPr lang="en-US" sz="3400" dirty="0"/>
           </a:p>
         </p:txBody>
       </p:sp>
       <p:pic>
         <p:nvPicPr>
-          <p:cNvPr id="3" name="Image 0" descr="/home/claude/f4/img/minesec_sheet.png">    </p:cNvPr>
+          <p:cNvPr id="5" name="Image 0" descr="/home/claude/f4/img/v2/pop2_stouffer_calc.png">    </p:cNvPr>
           <p:cNvPicPr>
             <a:picLocks noChangeAspect="1"/>
           </p:cNvPicPr>
@@ -19433,8 +19945,8 @@
         </p:blipFill>
         <p:spPr>
           <a:xfrm>
-            <a:off x="0" y="658368"/>
-            <a:ext cx="5120640" cy="5833872"/>
+            <a:off x="6537960" y="2849678"/>
+            <a:ext cx="5470855" cy="2137053"/>
           </a:xfrm>
           <a:prstGeom prst="rect">
             <a:avLst/>
@@ -19443,14 +19955,14 @@
       </p:pic>
       <p:sp>
         <p:nvSpPr>
-          <p:cNvPr id="4" name="Text 1"/>
+          <p:cNvPr id="6" name="Text 3"/>
           <p:cNvSpPr/>
           <p:nvPr/>
         </p:nvSpPr>
         <p:spPr>
           <a:xfrm>
-            <a:off x="5349240" y="1005840"/>
-            <a:ext cx="6522415" cy="731520"/>
+            <a:off x="6537960" y="6089904"/>
+            <a:ext cx="5470855" cy="347472"/>
           </a:xfrm>
           <a:prstGeom prst="rect">
             <a:avLst/>
@@ -19459,68 +19971,24 @@
           <a:ln/>
         </p:spPr>
         <p:txBody>
-          <a:bodyPr wrap="square" lIns="0" tIns="0" rIns="0" bIns="0" rtlCol="0" anchor="ctr">
-            <a:normAutofit/>
-          </a:bodyPr>
+          <a:bodyPr wrap="square" lIns="0" tIns="0" rIns="0" bIns="0" rtlCol="0" anchor="ctr"/>
           <a:lstStyle/>
           <a:p>
             <a:pPr algn="ctr" indent="0" marL="0">
               <a:buNone/>
             </a:pPr>
             <a:r>
-              <a:rPr lang="en-US" sz="3600" b="1" dirty="0">
-                <a:solidFill>
-                  <a:srgbClr val="990011"/>
+              <a:rPr lang="en-US" sz="1600" i="1" dirty="0">
+                <a:solidFill>
+                  <a:srgbClr val="555555"/>
                 </a:solidFill>
                 <a:latin typeface="Times New Roman" pitchFamily="34" charset="0"/>
                 <a:ea typeface="Times New Roman" pitchFamily="34" charset="-122"/>
                 <a:cs typeface="Times New Roman" pitchFamily="34" charset="-120"/>
               </a:rPr>
-              <a:t>Expected Answer</a:t>
-            </a:r>
-            <a:endParaRPr lang="en-US" sz="3600" dirty="0"/>
-          </a:p>
-        </p:txBody>
-      </p:sp>
-      <p:sp>
-        <p:nvSpPr>
-          <p:cNvPr id="5" name="Text 2"/>
-          <p:cNvSpPr/>
-          <p:nvPr/>
-        </p:nvSpPr>
-        <p:spPr>
-          <a:xfrm>
-            <a:off x="5349240" y="1783080"/>
-            <a:ext cx="6522415" cy="4663440"/>
-          </a:xfrm>
-          <a:prstGeom prst="rect">
-            <a:avLst/>
-          </a:prstGeom>
-          <a:noFill/>
-          <a:ln/>
-        </p:spPr>
-        <p:txBody>
-          <a:bodyPr wrap="square" lIns="0" tIns="0" rIns="0" bIns="0" rtlCol="0" anchor="t"/>
-          <a:lstStyle/>
-          <a:p>
-            <a:pPr algn="l" indent="0" marL="0">
-              <a:spcAft>
-                <a:spcPts val="800"/>
-              </a:spcAft>
-              <a:buNone/>
-            </a:pPr>
-            <a:r>
-              <a:rPr lang="en-US" sz="4000" dirty="0">
-                <a:solidFill>
-                  <a:srgbClr val="111111"/>
-                </a:solidFill>
-                <a:latin typeface="Times New Roman" pitchFamily="34" charset="0"/>
-                <a:ea typeface="Times New Roman" pitchFamily="34" charset="-122"/>
-                <a:cs typeface="Times New Roman" pitchFamily="34" charset="-120"/>
-              </a:rPr>
-              <a:t>They are mostly young adults, often single, and skilled people migrate more (brain drain) (any two).</a:t>
-            </a:r>
-            <a:endParaRPr lang="en-US" sz="4000" dirty="0"/>
+              <a:t>Illustration: a Stouffer calculation</a:t>
+            </a:r>
+            <a:endParaRPr lang="en-US" sz="1600" dirty="0"/>
           </a:p>
         </p:txBody>
       </p:sp>
@@ -19695,7 +20163,7 @@
                 <a:ea typeface="Times New Roman" pitchFamily="34" charset="-122"/>
                 <a:cs typeface="Times New Roman" pitchFamily="34" charset="-120"/>
               </a:rPr>
-              <a:t>Evaluation 2</a:t>
+              <a:t>Evaluation 1</a:t>
             </a:r>
             <a:endParaRPr lang="en-US" sz="3600" dirty="0"/>
           </a:p>
@@ -19737,7 +20205,7 @@
                 <a:ea typeface="Times New Roman" pitchFamily="34" charset="-122"/>
                 <a:cs typeface="Times New Roman" pitchFamily="34" charset="-120"/>
               </a:rPr>
-              <a:t>State the main difference between the gravity model and Stouffer's model.</a:t>
+              <a:t>Give two characteristics of migrants.</a:t>
             </a:r>
             <a:endParaRPr lang="en-US" sz="4000" dirty="0"/>
           </a:p>
@@ -19956,7 +20424,7 @@
                 <a:ea typeface="Times New Roman" pitchFamily="34" charset="-122"/>
                 <a:cs typeface="Times New Roman" pitchFamily="34" charset="-120"/>
               </a:rPr>
-              <a:t>The gravity model uses population and distance; Stouffer uses the opportunities at the destination and on the way.</a:t>
+              <a:t>They are mostly young adults, often single, and skilled people migrate more (brain drain) (any two).</a:t>
             </a:r>
             <a:endParaRPr lang="en-US" sz="4000" dirty="0"/>
           </a:p>
@@ -20068,7 +20536,7 @@
                 <a:ea typeface="Calibri" pitchFamily="34" charset="-122"/>
                 <a:cs typeface="Calibri" pitchFamily="34" charset="-120"/>
               </a:rPr>
-              <a:t>REMEDIATION</a:t>
+              <a:t>FORMATIVE EVALUATION</a:t>
             </a:r>
             <a:endParaRPr lang="en-US" sz="1400" dirty="0"/>
           </a:p>
@@ -20091,7 +20559,7 @@
         <p:spPr>
           <a:xfrm>
             <a:off x="0" y="658368"/>
-            <a:ext cx="1463040" cy="5833872"/>
+            <a:ext cx="5120640" cy="5833872"/>
           </a:xfrm>
           <a:prstGeom prst="rect">
             <a:avLst/>
@@ -20106,8 +20574,8 @@
         </p:nvSpPr>
         <p:spPr>
           <a:xfrm>
-            <a:off x="1691640" y="1005840"/>
-            <a:ext cx="10180015" cy="731520"/>
+            <a:off x="5349240" y="1005840"/>
+            <a:ext cx="6522415" cy="731520"/>
           </a:xfrm>
           <a:prstGeom prst="rect">
             <a:avLst/>
@@ -20133,7 +20601,7 @@
                 <a:ea typeface="Times New Roman" pitchFamily="34" charset="-122"/>
                 <a:cs typeface="Times New Roman" pitchFamily="34" charset="-120"/>
               </a:rPr>
-              <a:t>Remediation</a:t>
+              <a:t>Evaluation 2</a:t>
             </a:r>
             <a:endParaRPr lang="en-US" sz="3600" dirty="0"/>
           </a:p>
@@ -20147,8 +20615,8 @@
         </p:nvSpPr>
         <p:spPr>
           <a:xfrm>
-            <a:off x="1691640" y="1783080"/>
-            <a:ext cx="10180015" cy="4663440"/>
+            <a:off x="5349240" y="1783080"/>
+            <a:ext cx="6522415" cy="4663440"/>
           </a:xfrm>
           <a:prstGeom prst="rect">
             <a:avLst/>
@@ -20167,7 +20635,7 @@
               <a:buNone/>
             </a:pPr>
             <a:r>
-              <a:rPr lang="en-US" sz="4000" b="1" dirty="0">
+              <a:rPr lang="en-US" sz="4000" dirty="0">
                 <a:solidFill>
                   <a:srgbClr val="111111"/>
                 </a:solidFill>
@@ -20175,73 +20643,7 @@
                 <a:ea typeface="Times New Roman" pitchFamily="34" charset="-122"/>
                 <a:cs typeface="Times New Roman" pitchFamily="34" charset="-120"/>
               </a:rPr>
-              <a:t>Fill in the blanks:</a:t>
-            </a:r>
-            <a:endParaRPr lang="en-US" sz="4000" dirty="0"/>
-          </a:p>
-          <a:p>
-            <a:pPr algn="l" marL="342900" indent="-342900">
-              <a:spcAft>
-                <a:spcPts val="800"/>
-              </a:spcAft>
-              <a:buSzPct val="100000"/>
-              <a:buFont typeface="+mj-lt"/>
-              <a:buAutoNum type="arabicPeriod" startAt="1"/>
-            </a:pPr>
-            <a:r>
-              <a:rPr lang="en-US" sz="4000" dirty="0">
-                <a:solidFill>
-                  <a:srgbClr val="111111"/>
-                </a:solidFill>
-                <a:latin typeface="Times New Roman" pitchFamily="34" charset="0"/>
-                <a:ea typeface="Times New Roman" pitchFamily="34" charset="-122"/>
-                <a:cs typeface="Times New Roman" pitchFamily="34" charset="-120"/>
-              </a:rPr>
-              <a:t>Zipf's law says that migration decreases with ______.</a:t>
-            </a:r>
-            <a:endParaRPr lang="en-US" sz="4000" dirty="0"/>
-          </a:p>
-          <a:p>
-            <a:pPr algn="l" marL="342900" indent="-342900">
-              <a:spcAft>
-                <a:spcPts val="800"/>
-              </a:spcAft>
-              <a:buSzPct val="100000"/>
-              <a:buFont typeface="+mj-lt"/>
-              <a:buAutoNum type="arabicPeriod" startAt="1"/>
-            </a:pPr>
-            <a:r>
-              <a:rPr lang="en-US" sz="4000" dirty="0">
-                <a:solidFill>
-                  <a:srgbClr val="111111"/>
-                </a:solidFill>
-                <a:latin typeface="Times New Roman" pitchFamily="34" charset="0"/>
-                <a:ea typeface="Times New Roman" pitchFamily="34" charset="-122"/>
-                <a:cs typeface="Times New Roman" pitchFamily="34" charset="-120"/>
-              </a:rPr>
-              <a:t>In the gravity model, distance is ______.</a:t>
-            </a:r>
-            <a:endParaRPr lang="en-US" sz="4000" dirty="0"/>
-          </a:p>
-          <a:p>
-            <a:pPr algn="l" marL="342900" indent="-342900">
-              <a:spcAft>
-                <a:spcPts val="800"/>
-              </a:spcAft>
-              <a:buSzPct val="100000"/>
-              <a:buFont typeface="+mj-lt"/>
-              <a:buAutoNum type="arabicPeriod" startAt="1"/>
-            </a:pPr>
-            <a:r>
-              <a:rPr lang="en-US" sz="4000" dirty="0">
-                <a:solidFill>
-                  <a:srgbClr val="111111"/>
-                </a:solidFill>
-                <a:latin typeface="Times New Roman" pitchFamily="34" charset="0"/>
-                <a:ea typeface="Times New Roman" pitchFamily="34" charset="-122"/>
-                <a:cs typeface="Times New Roman" pitchFamily="34" charset="-120"/>
-              </a:rPr>
-              <a:t>Stouffer speaks of ______ opportunities.</a:t>
+              <a:t>State the main difference between the gravity model and Stouffer's model.</a:t>
             </a:r>
             <a:endParaRPr lang="en-US" sz="4000" dirty="0"/>
           </a:p>
@@ -20353,7 +20755,7 @@
                 <a:ea typeface="Calibri" pitchFamily="34" charset="-122"/>
                 <a:cs typeface="Calibri" pitchFamily="34" charset="-120"/>
               </a:rPr>
-              <a:t>HOMEWORK</a:t>
+              <a:t>FORMATIVE EVALUATION</a:t>
             </a:r>
             <a:endParaRPr lang="en-US" sz="1400" dirty="0"/>
           </a:p>
@@ -20418,7 +20820,7 @@
                 <a:ea typeface="Times New Roman" pitchFamily="34" charset="-122"/>
                 <a:cs typeface="Times New Roman" pitchFamily="34" charset="-120"/>
               </a:rPr>
-              <a:t>Homework</a:t>
+              <a:t>Expected Answer</a:t>
             </a:r>
             <a:endParaRPr lang="en-US" sz="3600" dirty="0"/>
           </a:p>
@@ -20460,7 +20862,7 @@
                 <a:ea typeface="Times New Roman" pitchFamily="34" charset="-122"/>
                 <a:cs typeface="Times New Roman" pitchFamily="34" charset="-120"/>
               </a:rPr>
-              <a:t>Define spatial interaction.</a:t>
+              <a:t>The gravity model uses population and distance; Stouffer uses the opportunities at the destination and on the way.</a:t>
             </a:r>
             <a:endParaRPr lang="en-US" sz="4000" dirty="0"/>
           </a:p>
@@ -20572,7 +20974,7 @@
                 <a:ea typeface="Calibri" pitchFamily="34" charset="-122"/>
                 <a:cs typeface="Calibri" pitchFamily="34" charset="-120"/>
               </a:rPr>
-              <a:t>NEXT LESSON</a:t>
+              <a:t>REMEDIATION</a:t>
             </a:r>
             <a:endParaRPr lang="en-US" sz="1400" dirty="0"/>
           </a:p>
@@ -20595,7 +20997,7 @@
         <p:spPr>
           <a:xfrm>
             <a:off x="0" y="658368"/>
-            <a:ext cx="5120640" cy="5833872"/>
+            <a:ext cx="1463040" cy="5833872"/>
           </a:xfrm>
           <a:prstGeom prst="rect">
             <a:avLst/>
@@ -20610,8 +21012,8 @@
         </p:nvSpPr>
         <p:spPr>
           <a:xfrm>
-            <a:off x="5349240" y="1005840"/>
-            <a:ext cx="6522415" cy="731520"/>
+            <a:off x="1691640" y="1005840"/>
+            <a:ext cx="10180015" cy="731520"/>
           </a:xfrm>
           <a:prstGeom prst="rect">
             <a:avLst/>
@@ -20637,7 +21039,7 @@
                 <a:ea typeface="Times New Roman" pitchFamily="34" charset="-122"/>
                 <a:cs typeface="Times New Roman" pitchFamily="34" charset="-120"/>
               </a:rPr>
-              <a:t>Next Lesson</a:t>
+              <a:t>Remediation</a:t>
             </a:r>
             <a:endParaRPr lang="en-US" sz="3600" dirty="0"/>
           </a:p>
@@ -20651,8 +21053,8 @@
         </p:nvSpPr>
         <p:spPr>
           <a:xfrm>
-            <a:off x="5349240" y="1783080"/>
-            <a:ext cx="6522415" cy="4663440"/>
+            <a:off x="1691640" y="1783080"/>
+            <a:ext cx="10180015" cy="4663440"/>
           </a:xfrm>
           <a:prstGeom prst="rect">
             <a:avLst/>
@@ -20661,10 +21063,10 @@
           <a:ln/>
         </p:spPr>
         <p:txBody>
-          <a:bodyPr wrap="square" lIns="0" tIns="0" rIns="0" bIns="0" rtlCol="0" anchor="ctr"/>
-          <a:lstStyle/>
-          <a:p>
-            <a:pPr algn="ctr" indent="0" marL="0">
+          <a:bodyPr wrap="square" lIns="0" tIns="0" rIns="0" bIns="0" rtlCol="0" anchor="t"/>
+          <a:lstStyle/>
+          <a:p>
+            <a:pPr algn="l" indent="0" marL="0">
               <a:spcAft>
                 <a:spcPts val="800"/>
               </a:spcAft>
@@ -20679,27 +21081,73 @@
                 <a:ea typeface="Times New Roman" pitchFamily="34" charset="-122"/>
                 <a:cs typeface="Times New Roman" pitchFamily="34" charset="-120"/>
               </a:rPr>
-              <a:t>Our next lesson will be on:</a:t>
+              <a:t>Fill in the blanks:</a:t>
             </a:r>
             <a:endParaRPr lang="en-US" sz="4000" dirty="0"/>
           </a:p>
           <a:p>
-            <a:pPr algn="ctr" indent="0" marL="0">
+            <a:pPr algn="l" marL="342900" indent="-342900">
               <a:spcAft>
                 <a:spcPts val="800"/>
               </a:spcAft>
-              <a:buNone/>
-            </a:pPr>
-            <a:r>
-              <a:rPr lang="en-US" sz="4000" b="1" dirty="0">
-                <a:solidFill>
-                  <a:srgbClr val="990011"/>
+              <a:buSzPct val="100000"/>
+              <a:buFont typeface="+mj-lt"/>
+              <a:buAutoNum type="arabicPeriod" startAt="1"/>
+            </a:pPr>
+            <a:r>
+              <a:rPr lang="en-US" sz="4000" dirty="0">
+                <a:solidFill>
+                  <a:srgbClr val="111111"/>
                 </a:solidFill>
                 <a:latin typeface="Times New Roman" pitchFamily="34" charset="0"/>
                 <a:ea typeface="Times New Roman" pitchFamily="34" charset="-122"/>
                 <a:cs typeface="Times New Roman" pitchFamily="34" charset="-120"/>
               </a:rPr>
-              <a:t>Lesson 14: Spatial Interaction</a:t>
+              <a:t>Zipf's law says that migration decreases with ______.</a:t>
+            </a:r>
+            <a:endParaRPr lang="en-US" sz="4000" dirty="0"/>
+          </a:p>
+          <a:p>
+            <a:pPr algn="l" marL="342900" indent="-342900">
+              <a:spcAft>
+                <a:spcPts val="800"/>
+              </a:spcAft>
+              <a:buSzPct val="100000"/>
+              <a:buFont typeface="+mj-lt"/>
+              <a:buAutoNum type="arabicPeriod" startAt="1"/>
+            </a:pPr>
+            <a:r>
+              <a:rPr lang="en-US" sz="4000" dirty="0">
+                <a:solidFill>
+                  <a:srgbClr val="111111"/>
+                </a:solidFill>
+                <a:latin typeface="Times New Roman" pitchFamily="34" charset="0"/>
+                <a:ea typeface="Times New Roman" pitchFamily="34" charset="-122"/>
+                <a:cs typeface="Times New Roman" pitchFamily="34" charset="-120"/>
+              </a:rPr>
+              <a:t>In the gravity model, distance is ______.</a:t>
+            </a:r>
+            <a:endParaRPr lang="en-US" sz="4000" dirty="0"/>
+          </a:p>
+          <a:p>
+            <a:pPr algn="l" marL="342900" indent="-342900">
+              <a:spcAft>
+                <a:spcPts val="800"/>
+              </a:spcAft>
+              <a:buSzPct val="100000"/>
+              <a:buFont typeface="+mj-lt"/>
+              <a:buAutoNum type="arabicPeriod" startAt="1"/>
+            </a:pPr>
+            <a:r>
+              <a:rPr lang="en-US" sz="4000" dirty="0">
+                <a:solidFill>
+                  <a:srgbClr val="111111"/>
+                </a:solidFill>
+                <a:latin typeface="Times New Roman" pitchFamily="34" charset="0"/>
+                <a:ea typeface="Times New Roman" pitchFamily="34" charset="-122"/>
+                <a:cs typeface="Times New Roman" pitchFamily="34" charset="-120"/>
+              </a:rPr>
+              <a:t>Stouffer speaks of ______ opportunities.</a:t>
             </a:r>
             <a:endParaRPr lang="en-US" sz="4000" dirty="0"/>
           </a:p>
@@ -20811,22 +21259,46 @@
                 <a:ea typeface="Calibri" pitchFamily="34" charset="-122"/>
                 <a:cs typeface="Calibri" pitchFamily="34" charset="-120"/>
               </a:rPr>
-              <a:t>BILINGUAL GAME</a:t>
+              <a:t>HOMEWORK</a:t>
             </a:r>
             <a:endParaRPr lang="en-US" sz="1400" dirty="0"/>
           </a:p>
         </p:txBody>
       </p:sp>
-      <p:sp>
-        <p:nvSpPr>
-          <p:cNvPr id="3" name="Text 1"/>
+      <p:pic>
+        <p:nvPicPr>
+          <p:cNvPr id="3" name="Image 0" descr="/home/claude/f4/img/minesec_sheet.png">    </p:cNvPr>
+          <p:cNvPicPr>
+            <a:picLocks noChangeAspect="1"/>
+          </p:cNvPicPr>
+          <p:nvPr/>
+        </p:nvPicPr>
+        <p:blipFill>
+          <a:blip r:embed="rId1"/>
+          <a:stretch>
+            <a:fillRect/>
+          </a:stretch>
+        </p:blipFill>
+        <p:spPr>
+          <a:xfrm>
+            <a:off x="0" y="658368"/>
+            <a:ext cx="5120640" cy="5833872"/>
+          </a:xfrm>
+          <a:prstGeom prst="rect">
+            <a:avLst/>
+          </a:prstGeom>
+        </p:spPr>
+      </p:pic>
+      <p:sp>
+        <p:nvSpPr>
+          <p:cNvPr id="4" name="Text 1"/>
           <p:cNvSpPr/>
           <p:nvPr/>
         </p:nvSpPr>
         <p:spPr>
           <a:xfrm>
-            <a:off x="457200" y="1005840"/>
-            <a:ext cx="11277295" cy="731520"/>
+            <a:off x="5349240" y="1005840"/>
+            <a:ext cx="6522415" cy="731520"/>
           </a:xfrm>
           <a:prstGeom prst="rect">
             <a:avLst/>
@@ -20835,7 +21307,9 @@
           <a:ln/>
         </p:spPr>
         <p:txBody>
-          <a:bodyPr wrap="square" lIns="0" tIns="0" rIns="0" bIns="0" rtlCol="0" anchor="ctr"/>
+          <a:bodyPr wrap="square" lIns="0" tIns="0" rIns="0" bIns="0" rtlCol="0" anchor="ctr">
+            <a:normAutofit/>
+          </a:bodyPr>
           <a:lstStyle/>
           <a:p>
             <a:pPr algn="ctr" indent="0" marL="0">
@@ -20850,6 +21324,769 @@
                 <a:ea typeface="Times New Roman" pitchFamily="34" charset="-122"/>
                 <a:cs typeface="Times New Roman" pitchFamily="34" charset="-120"/>
               </a:rPr>
+              <a:t>Homework</a:t>
+            </a:r>
+            <a:endParaRPr lang="en-US" sz="3600" dirty="0"/>
+          </a:p>
+        </p:txBody>
+      </p:sp>
+      <p:sp>
+        <p:nvSpPr>
+          <p:cNvPr id="5" name="Text 2"/>
+          <p:cNvSpPr/>
+          <p:nvPr/>
+        </p:nvSpPr>
+        <p:spPr>
+          <a:xfrm>
+            <a:off x="5349240" y="1783080"/>
+            <a:ext cx="6522415" cy="4663440"/>
+          </a:xfrm>
+          <a:prstGeom prst="rect">
+            <a:avLst/>
+          </a:prstGeom>
+          <a:noFill/>
+          <a:ln/>
+        </p:spPr>
+        <p:txBody>
+          <a:bodyPr wrap="square" lIns="0" tIns="0" rIns="0" bIns="0" rtlCol="0" anchor="t"/>
+          <a:lstStyle/>
+          <a:p>
+            <a:pPr algn="l" indent="0" marL="0">
+              <a:spcAft>
+                <a:spcPts val="800"/>
+              </a:spcAft>
+              <a:buNone/>
+            </a:pPr>
+            <a:r>
+              <a:rPr lang="en-US" sz="4000" dirty="0">
+                <a:solidFill>
+                  <a:srgbClr val="111111"/>
+                </a:solidFill>
+                <a:latin typeface="Times New Roman" pitchFamily="34" charset="0"/>
+                <a:ea typeface="Times New Roman" pitchFamily="34" charset="-122"/>
+                <a:cs typeface="Times New Roman" pitchFamily="34" charset="-120"/>
+              </a:rPr>
+              <a:t>Define spatial interaction.</a:t>
+            </a:r>
+            <a:endParaRPr lang="en-US" sz="4000" dirty="0"/>
+          </a:p>
+        </p:txBody>
+      </p:sp>
+      <p:sp>
+        <p:nvSpPr>
+          <p:cNvPr id="25" name="Slide Number Placeholder 0"/>
+          <p:cNvSpPr>
+            <a:spLocks noGrp="1"/>
+          </p:cNvSpPr>
+          <p:nvPr>
+            <p:ph type="sldNum" sz="quarter" idx="4294967295"/>
+          </p:nvPr>
+        </p:nvSpPr>
+        <p:spPr>
+          <a:xfrm>
+            <a:off x="27432" y="91440"/>
+            <a:ext cx="585216" cy="475488"/>
+          </a:xfrm>
+          <a:prstGeom prst="rect">
+            <a:avLst/>
+          </a:prstGeom>
+          <a:extLst>
+            <a:ext uri="{C572A759-6A51-4108-AA02-DFA0A04FC94B}">
+              <ma14:wrappingTextBoxFlag xmlns:ma14="http://schemas.microsoft.com/office/mac/drawingml/2011/main" val="0"/>
+            </a:ext>
+          </a:extLst>
+        </p:spPr>
+        <p:txBody>
+          <a:bodyPr/>
+          <a:lstStyle>
+            <a:lvl1pPr>
+              <a:defRPr sz="2000">
+                <a:solidFill>
+                  <a:srgbClr val="FFFFFF"/>
+                </a:solidFill>
+                <a:latin typeface="Calibri"/>
+                <a:ea typeface="Calibri"/>
+                <a:cs typeface="Calibri"/>
+              </a:defRPr>
+            </a:lvl1pPr>
+          </a:lstStyle>
+          <a:p>
+            <a:pPr algn="ctr"/>
+            <a:fld id="{F7021451-1387-4CA6-816F-3879F97B5CBC}" type="slidenum">
+              <a:rPr b="1" lang="en-US"/>
+              <a:t>58</a:t>
+            </a:fld>
+            <a:endParaRPr lang="en-US"/>
+          </a:p>
+        </p:txBody>
+      </p:sp>
+    </p:spTree>
+  </p:cSld>
+  <p:clrMapOvr>
+    <a:masterClrMapping/>
+  </p:clrMapOvr>
+</p:sld>
+</file>
+
+<file path=ppt/slides/slide59.xml><?xml version="1.0" encoding="utf-8"?>
+<p:sld xmlns:a="http://schemas.openxmlformats.org/drawingml/2006/main" xmlns:r="http://schemas.openxmlformats.org/officeDocument/2006/relationships" xmlns:p="http://schemas.openxmlformats.org/presentationml/2006/main">
+  <p:cSld name="Slide 59">
+    <p:spTree>
+      <p:nvGrpSpPr>
+        <p:cNvPr id="1" name=""/>
+        <p:cNvGrpSpPr/>
+        <p:nvPr/>
+      </p:nvGrpSpPr>
+      <p:grpSpPr>
+        <a:xfrm>
+          <a:off x="0" y="0"/>
+          <a:ext cx="0" cy="0"/>
+          <a:chOff x="0" y="0"/>
+          <a:chExt cx="0" cy="0"/>
+        </a:xfrm>
+      </p:grpSpPr>
+      <p:sp>
+        <p:nvSpPr>
+          <p:cNvPr id="2" name="Text 0"/>
+          <p:cNvSpPr/>
+          <p:nvPr/>
+        </p:nvSpPr>
+        <p:spPr>
+          <a:xfrm>
+            <a:off x="457200" y="713232"/>
+            <a:ext cx="11368735" cy="274320"/>
+          </a:xfrm>
+          <a:prstGeom prst="rect">
+            <a:avLst/>
+          </a:prstGeom>
+          <a:noFill/>
+          <a:ln/>
+        </p:spPr>
+        <p:txBody>
+          <a:bodyPr wrap="square" lIns="0" tIns="0" rIns="0" bIns="0" rtlCol="0" anchor="ctr"/>
+          <a:lstStyle/>
+          <a:p>
+            <a:pPr algn="r" indent="0" marL="0">
+              <a:buNone/>
+            </a:pPr>
+            <a:r>
+              <a:rPr lang="en-US" sz="1400" b="1" dirty="0">
+                <a:solidFill>
+                  <a:srgbClr val="1C3F6E"/>
+                </a:solidFill>
+                <a:latin typeface="Calibri" pitchFamily="34" charset="0"/>
+                <a:ea typeface="Calibri" pitchFamily="34" charset="-122"/>
+                <a:cs typeface="Calibri" pitchFamily="34" charset="-120"/>
+              </a:rPr>
+              <a:t>NEXT LESSON</a:t>
+            </a:r>
+            <a:endParaRPr lang="en-US" sz="1400" dirty="0"/>
+          </a:p>
+        </p:txBody>
+      </p:sp>
+      <p:pic>
+        <p:nvPicPr>
+          <p:cNvPr id="3" name="Image 0" descr="/home/claude/f4/img/minesec_sheet.png">    </p:cNvPr>
+          <p:cNvPicPr>
+            <a:picLocks noChangeAspect="1"/>
+          </p:cNvPicPr>
+          <p:nvPr/>
+        </p:nvPicPr>
+        <p:blipFill>
+          <a:blip r:embed="rId1"/>
+          <a:stretch>
+            <a:fillRect/>
+          </a:stretch>
+        </p:blipFill>
+        <p:spPr>
+          <a:xfrm>
+            <a:off x="0" y="658368"/>
+            <a:ext cx="5120640" cy="5833872"/>
+          </a:xfrm>
+          <a:prstGeom prst="rect">
+            <a:avLst/>
+          </a:prstGeom>
+        </p:spPr>
+      </p:pic>
+      <p:sp>
+        <p:nvSpPr>
+          <p:cNvPr id="4" name="Text 1"/>
+          <p:cNvSpPr/>
+          <p:nvPr/>
+        </p:nvSpPr>
+        <p:spPr>
+          <a:xfrm>
+            <a:off x="5349240" y="1005840"/>
+            <a:ext cx="6522415" cy="731520"/>
+          </a:xfrm>
+          <a:prstGeom prst="rect">
+            <a:avLst/>
+          </a:prstGeom>
+          <a:noFill/>
+          <a:ln/>
+        </p:spPr>
+        <p:txBody>
+          <a:bodyPr wrap="square" lIns="0" tIns="0" rIns="0" bIns="0" rtlCol="0" anchor="ctr">
+            <a:normAutofit/>
+          </a:bodyPr>
+          <a:lstStyle/>
+          <a:p>
+            <a:pPr algn="ctr" indent="0" marL="0">
+              <a:buNone/>
+            </a:pPr>
+            <a:r>
+              <a:rPr lang="en-US" sz="3600" b="1" dirty="0">
+                <a:solidFill>
+                  <a:srgbClr val="990011"/>
+                </a:solidFill>
+                <a:latin typeface="Times New Roman" pitchFamily="34" charset="0"/>
+                <a:ea typeface="Times New Roman" pitchFamily="34" charset="-122"/>
+                <a:cs typeface="Times New Roman" pitchFamily="34" charset="-120"/>
+              </a:rPr>
+              <a:t>Next Lesson</a:t>
+            </a:r>
+            <a:endParaRPr lang="en-US" sz="3600" dirty="0"/>
+          </a:p>
+        </p:txBody>
+      </p:sp>
+      <p:sp>
+        <p:nvSpPr>
+          <p:cNvPr id="5" name="Text 2"/>
+          <p:cNvSpPr/>
+          <p:nvPr/>
+        </p:nvSpPr>
+        <p:spPr>
+          <a:xfrm>
+            <a:off x="5349240" y="1783080"/>
+            <a:ext cx="6522415" cy="4663440"/>
+          </a:xfrm>
+          <a:prstGeom prst="rect">
+            <a:avLst/>
+          </a:prstGeom>
+          <a:noFill/>
+          <a:ln/>
+        </p:spPr>
+        <p:txBody>
+          <a:bodyPr wrap="square" lIns="0" tIns="0" rIns="0" bIns="0" rtlCol="0" anchor="ctr"/>
+          <a:lstStyle/>
+          <a:p>
+            <a:pPr algn="ctr" indent="0" marL="0">
+              <a:spcAft>
+                <a:spcPts val="800"/>
+              </a:spcAft>
+              <a:buNone/>
+            </a:pPr>
+            <a:r>
+              <a:rPr lang="en-US" sz="4000" b="1" dirty="0">
+                <a:solidFill>
+                  <a:srgbClr val="111111"/>
+                </a:solidFill>
+                <a:latin typeface="Times New Roman" pitchFamily="34" charset="0"/>
+                <a:ea typeface="Times New Roman" pitchFamily="34" charset="-122"/>
+                <a:cs typeface="Times New Roman" pitchFamily="34" charset="-120"/>
+              </a:rPr>
+              <a:t>Our next lesson will be on:</a:t>
+            </a:r>
+            <a:endParaRPr lang="en-US" sz="4000" dirty="0"/>
+          </a:p>
+          <a:p>
+            <a:pPr algn="ctr" indent="0" marL="0">
+              <a:spcAft>
+                <a:spcPts val="800"/>
+              </a:spcAft>
+              <a:buNone/>
+            </a:pPr>
+            <a:r>
+              <a:rPr lang="en-US" sz="4000" b="1" dirty="0">
+                <a:solidFill>
+                  <a:srgbClr val="990011"/>
+                </a:solidFill>
+                <a:latin typeface="Times New Roman" pitchFamily="34" charset="0"/>
+                <a:ea typeface="Times New Roman" pitchFamily="34" charset="-122"/>
+                <a:cs typeface="Times New Roman" pitchFamily="34" charset="-120"/>
+              </a:rPr>
+              <a:t>Lesson 14: Spatial Interaction</a:t>
+            </a:r>
+            <a:endParaRPr lang="en-US" sz="4000" dirty="0"/>
+          </a:p>
+        </p:txBody>
+      </p:sp>
+      <p:sp>
+        <p:nvSpPr>
+          <p:cNvPr id="25" name="Slide Number Placeholder 0"/>
+          <p:cNvSpPr>
+            <a:spLocks noGrp="1"/>
+          </p:cNvSpPr>
+          <p:nvPr>
+            <p:ph type="sldNum" sz="quarter" idx="4294967295"/>
+          </p:nvPr>
+        </p:nvSpPr>
+        <p:spPr>
+          <a:xfrm>
+            <a:off x="27432" y="91440"/>
+            <a:ext cx="585216" cy="475488"/>
+          </a:xfrm>
+          <a:prstGeom prst="rect">
+            <a:avLst/>
+          </a:prstGeom>
+          <a:extLst>
+            <a:ext uri="{C572A759-6A51-4108-AA02-DFA0A04FC94B}">
+              <ma14:wrappingTextBoxFlag xmlns:ma14="http://schemas.microsoft.com/office/mac/drawingml/2011/main" val="0"/>
+            </a:ext>
+          </a:extLst>
+        </p:spPr>
+        <p:txBody>
+          <a:bodyPr/>
+          <a:lstStyle>
+            <a:lvl1pPr>
+              <a:defRPr sz="2000">
+                <a:solidFill>
+                  <a:srgbClr val="FFFFFF"/>
+                </a:solidFill>
+                <a:latin typeface="Calibri"/>
+                <a:ea typeface="Calibri"/>
+                <a:cs typeface="Calibri"/>
+              </a:defRPr>
+            </a:lvl1pPr>
+          </a:lstStyle>
+          <a:p>
+            <a:pPr algn="ctr"/>
+            <a:fld id="{F7021451-1387-4CA6-816F-3879F97B5CBC}" type="slidenum">
+              <a:rPr b="1" lang="en-US"/>
+              <a:t>59</a:t>
+            </a:fld>
+            <a:endParaRPr lang="en-US"/>
+          </a:p>
+        </p:txBody>
+      </p:sp>
+    </p:spTree>
+  </p:cSld>
+  <p:clrMapOvr>
+    <a:masterClrMapping/>
+  </p:clrMapOvr>
+</p:sld>
+</file>
+
+<file path=ppt/slides/slide6.xml><?xml version="1.0" encoding="utf-8"?>
+<p:sld xmlns:a="http://schemas.openxmlformats.org/drawingml/2006/main" xmlns:r="http://schemas.openxmlformats.org/officeDocument/2006/relationships" xmlns:p="http://schemas.openxmlformats.org/presentationml/2006/main">
+  <p:cSld name="Slide 6">
+    <p:spTree>
+      <p:nvGrpSpPr>
+        <p:cNvPr id="1" name=""/>
+        <p:cNvGrpSpPr/>
+        <p:nvPr/>
+      </p:nvGrpSpPr>
+      <p:grpSpPr>
+        <a:xfrm>
+          <a:off x="0" y="0"/>
+          <a:ext cx="0" cy="0"/>
+          <a:chOff x="0" y="0"/>
+          <a:chExt cx="0" cy="0"/>
+        </a:xfrm>
+      </p:grpSpPr>
+      <p:sp>
+        <p:nvSpPr>
+          <p:cNvPr id="2" name="Text 0"/>
+          <p:cNvSpPr/>
+          <p:nvPr/>
+        </p:nvSpPr>
+        <p:spPr>
+          <a:xfrm>
+            <a:off x="457200" y="713232"/>
+            <a:ext cx="11368735" cy="274320"/>
+          </a:xfrm>
+          <a:prstGeom prst="rect">
+            <a:avLst/>
+          </a:prstGeom>
+          <a:noFill/>
+          <a:ln/>
+        </p:spPr>
+        <p:txBody>
+          <a:bodyPr wrap="square" lIns="0" tIns="0" rIns="0" bIns="0" rtlCol="0" anchor="ctr"/>
+          <a:lstStyle/>
+          <a:p>
+            <a:pPr algn="r" indent="0" marL="0">
+              <a:buNone/>
+            </a:pPr>
+            <a:r>
+              <a:rPr lang="en-US" sz="1400" b="1" dirty="0">
+                <a:solidFill>
+                  <a:srgbClr val="1C3F6E"/>
+                </a:solidFill>
+                <a:latin typeface="Calibri" pitchFamily="34" charset="0"/>
+                <a:ea typeface="Calibri" pitchFamily="34" charset="-122"/>
+                <a:cs typeface="Calibri" pitchFamily="34" charset="-120"/>
+              </a:rPr>
+              <a:t>LESSON PLAN</a:t>
+            </a:r>
+            <a:endParaRPr lang="en-US" sz="1400" dirty="0"/>
+          </a:p>
+        </p:txBody>
+      </p:sp>
+      <p:pic>
+        <p:nvPicPr>
+          <p:cNvPr id="3" name="Image 0" descr="/home/claude/f4/img/minesec_sheet.png">    </p:cNvPr>
+          <p:cNvPicPr>
+            <a:picLocks noChangeAspect="1"/>
+          </p:cNvPicPr>
+          <p:nvPr/>
+        </p:nvPicPr>
+        <p:blipFill>
+          <a:blip r:embed="rId1"/>
+          <a:stretch>
+            <a:fillRect/>
+          </a:stretch>
+        </p:blipFill>
+        <p:spPr>
+          <a:xfrm>
+            <a:off x="0" y="658368"/>
+            <a:ext cx="2468880" cy="5833872"/>
+          </a:xfrm>
+          <a:prstGeom prst="rect">
+            <a:avLst/>
+          </a:prstGeom>
+        </p:spPr>
+      </p:pic>
+      <p:sp>
+        <p:nvSpPr>
+          <p:cNvPr id="4" name="Text 1"/>
+          <p:cNvSpPr/>
+          <p:nvPr/>
+        </p:nvSpPr>
+        <p:spPr>
+          <a:xfrm>
+            <a:off x="2697480" y="1005840"/>
+            <a:ext cx="9174175" cy="731520"/>
+          </a:xfrm>
+          <a:prstGeom prst="rect">
+            <a:avLst/>
+          </a:prstGeom>
+          <a:noFill/>
+          <a:ln/>
+        </p:spPr>
+        <p:txBody>
+          <a:bodyPr wrap="square" lIns="0" tIns="0" rIns="0" bIns="0" rtlCol="0" anchor="ctr">
+            <a:normAutofit/>
+          </a:bodyPr>
+          <a:lstStyle/>
+          <a:p>
+            <a:pPr algn="ctr" indent="0" marL="0">
+              <a:buNone/>
+            </a:pPr>
+            <a:r>
+              <a:rPr lang="en-US" sz="3600" b="1" dirty="0">
+                <a:solidFill>
+                  <a:srgbClr val="990011"/>
+                </a:solidFill>
+                <a:latin typeface="Times New Roman" pitchFamily="34" charset="0"/>
+                <a:ea typeface="Times New Roman" pitchFamily="34" charset="-122"/>
+                <a:cs typeface="Times New Roman" pitchFamily="34" charset="-120"/>
+              </a:rPr>
+              <a:t>Lesson Plan</a:t>
+            </a:r>
+            <a:endParaRPr lang="en-US" sz="3600" dirty="0"/>
+          </a:p>
+        </p:txBody>
+      </p:sp>
+      <p:sp>
+        <p:nvSpPr>
+          <p:cNvPr id="5" name="Text 2"/>
+          <p:cNvSpPr/>
+          <p:nvPr/>
+        </p:nvSpPr>
+        <p:spPr>
+          <a:xfrm>
+            <a:off x="2697480" y="1783080"/>
+            <a:ext cx="9174175" cy="4663440"/>
+          </a:xfrm>
+          <a:prstGeom prst="rect">
+            <a:avLst/>
+          </a:prstGeom>
+          <a:noFill/>
+          <a:ln/>
+        </p:spPr>
+        <p:txBody>
+          <a:bodyPr wrap="square" lIns="0" tIns="0" rIns="0" bIns="0" rtlCol="0" anchor="t"/>
+          <a:lstStyle/>
+          <a:p>
+            <a:pPr algn="l" marL="342900" indent="-342900">
+              <a:spcAft>
+                <a:spcPts val="800"/>
+              </a:spcAft>
+              <a:buSzPct val="100000"/>
+              <a:buFont typeface="+mj-lt"/>
+              <a:buAutoNum type="arabicPeriod" startAt="1"/>
+            </a:pPr>
+            <a:r>
+              <a:rPr lang="en-US" sz="4000" dirty="0">
+                <a:solidFill>
+                  <a:srgbClr val="111111"/>
+                </a:solidFill>
+                <a:latin typeface="Times New Roman" pitchFamily="34" charset="0"/>
+                <a:ea typeface="Times New Roman" pitchFamily="34" charset="-122"/>
+                <a:cs typeface="Times New Roman" pitchFamily="34" charset="-120"/>
+              </a:rPr>
+              <a:t>Correction of the homework</a:t>
+            </a:r>
+            <a:endParaRPr lang="en-US" sz="4000" dirty="0"/>
+          </a:p>
+          <a:p>
+            <a:pPr algn="l" marL="342900" indent="-342900">
+              <a:spcAft>
+                <a:spcPts val="800"/>
+              </a:spcAft>
+              <a:buSzPct val="100000"/>
+              <a:buFont typeface="+mj-lt"/>
+              <a:buAutoNum type="arabicPeriod" startAt="1"/>
+            </a:pPr>
+            <a:r>
+              <a:rPr lang="en-US" sz="4000" dirty="0">
+                <a:solidFill>
+                  <a:srgbClr val="111111"/>
+                </a:solidFill>
+                <a:latin typeface="Times New Roman" pitchFamily="34" charset="0"/>
+                <a:ea typeface="Times New Roman" pitchFamily="34" charset="-122"/>
+                <a:cs typeface="Times New Roman" pitchFamily="34" charset="-120"/>
+              </a:rPr>
+              <a:t>Objectives and recall</a:t>
+            </a:r>
+            <a:endParaRPr lang="en-US" sz="4000" dirty="0"/>
+          </a:p>
+          <a:p>
+            <a:pPr algn="l" marL="342900" indent="-342900">
+              <a:spcAft>
+                <a:spcPts val="800"/>
+              </a:spcAft>
+              <a:buSzPct val="100000"/>
+              <a:buFont typeface="+mj-lt"/>
+              <a:buAutoNum type="arabicPeriod" startAt="1"/>
+            </a:pPr>
+            <a:r>
+              <a:rPr lang="en-US" sz="4000" dirty="0">
+                <a:solidFill>
+                  <a:srgbClr val="111111"/>
+                </a:solidFill>
+                <a:latin typeface="Times New Roman" pitchFamily="34" charset="0"/>
+                <a:ea typeface="Times New Roman" pitchFamily="34" charset="-122"/>
+                <a:cs typeface="Times New Roman" pitchFamily="34" charset="-120"/>
+              </a:rPr>
+              <a:t>Real-life situation and action to take</a:t>
+            </a:r>
+            <a:endParaRPr lang="en-US" sz="4000" dirty="0"/>
+          </a:p>
+          <a:p>
+            <a:pPr algn="l" marL="342900" indent="-342900">
+              <a:spcAft>
+                <a:spcPts val="800"/>
+              </a:spcAft>
+              <a:buSzPct val="100000"/>
+              <a:buFont typeface="+mj-lt"/>
+              <a:buAutoNum type="arabicPeriod" startAt="1"/>
+            </a:pPr>
+            <a:r>
+              <a:rPr lang="en-US" sz="4000" dirty="0">
+                <a:solidFill>
+                  <a:srgbClr val="111111"/>
+                </a:solidFill>
+                <a:latin typeface="Times New Roman" pitchFamily="34" charset="0"/>
+                <a:ea typeface="Times New Roman" pitchFamily="34" charset="-122"/>
+                <a:cs typeface="Times New Roman" pitchFamily="34" charset="-120"/>
+              </a:rPr>
+              <a:t>Learning activities</a:t>
+            </a:r>
+            <a:endParaRPr lang="en-US" sz="4000" dirty="0"/>
+          </a:p>
+          <a:p>
+            <a:pPr algn="l" marL="342900" indent="-342900">
+              <a:spcAft>
+                <a:spcPts val="800"/>
+              </a:spcAft>
+              <a:buSzPct val="100000"/>
+              <a:buFont typeface="+mj-lt"/>
+              <a:buAutoNum type="arabicPeriod" startAt="1"/>
+            </a:pPr>
+            <a:r>
+              <a:rPr lang="en-US" sz="4000" dirty="0">
+                <a:solidFill>
+                  <a:srgbClr val="111111"/>
+                </a:solidFill>
+                <a:latin typeface="Times New Roman" pitchFamily="34" charset="0"/>
+                <a:ea typeface="Times New Roman" pitchFamily="34" charset="-122"/>
+                <a:cs typeface="Times New Roman" pitchFamily="34" charset="-120"/>
+              </a:rPr>
+              <a:t>Board summary</a:t>
+            </a:r>
+            <a:endParaRPr lang="en-US" sz="4000" dirty="0"/>
+          </a:p>
+          <a:p>
+            <a:pPr algn="l" marL="342900" indent="-342900">
+              <a:spcAft>
+                <a:spcPts val="800"/>
+              </a:spcAft>
+              <a:buSzPct val="100000"/>
+              <a:buFont typeface="+mj-lt"/>
+              <a:buAutoNum type="arabicPeriod" startAt="1"/>
+            </a:pPr>
+            <a:r>
+              <a:rPr lang="en-US" sz="4000" dirty="0">
+                <a:solidFill>
+                  <a:srgbClr val="111111"/>
+                </a:solidFill>
+                <a:latin typeface="Times New Roman" pitchFamily="34" charset="0"/>
+                <a:ea typeface="Times New Roman" pitchFamily="34" charset="-122"/>
+                <a:cs typeface="Times New Roman" pitchFamily="34" charset="-120"/>
+              </a:rPr>
+              <a:t>Evaluation, remediation and homework</a:t>
+            </a:r>
+            <a:endParaRPr lang="en-US" sz="4000" dirty="0"/>
+          </a:p>
+        </p:txBody>
+      </p:sp>
+      <p:sp>
+        <p:nvSpPr>
+          <p:cNvPr id="25" name="Slide Number Placeholder 0"/>
+          <p:cNvSpPr>
+            <a:spLocks noGrp="1"/>
+          </p:cNvSpPr>
+          <p:nvPr>
+            <p:ph type="sldNum" sz="quarter" idx="4294967295"/>
+          </p:nvPr>
+        </p:nvSpPr>
+        <p:spPr>
+          <a:xfrm>
+            <a:off x="27432" y="91440"/>
+            <a:ext cx="585216" cy="475488"/>
+          </a:xfrm>
+          <a:prstGeom prst="rect">
+            <a:avLst/>
+          </a:prstGeom>
+          <a:extLst>
+            <a:ext uri="{C572A759-6A51-4108-AA02-DFA0A04FC94B}">
+              <ma14:wrappingTextBoxFlag xmlns:ma14="http://schemas.microsoft.com/office/mac/drawingml/2011/main" val="0"/>
+            </a:ext>
+          </a:extLst>
+        </p:spPr>
+        <p:txBody>
+          <a:bodyPr/>
+          <a:lstStyle>
+            <a:lvl1pPr>
+              <a:defRPr sz="2000">
+                <a:solidFill>
+                  <a:srgbClr val="FFFFFF"/>
+                </a:solidFill>
+                <a:latin typeface="Calibri"/>
+                <a:ea typeface="Calibri"/>
+                <a:cs typeface="Calibri"/>
+              </a:defRPr>
+            </a:lvl1pPr>
+          </a:lstStyle>
+          <a:p>
+            <a:pPr algn="ctr"/>
+            <a:fld id="{F7021451-1387-4CA6-816F-3879F97B5CBC}" type="slidenum">
+              <a:rPr b="1" lang="en-US"/>
+              <a:t>6</a:t>
+            </a:fld>
+            <a:endParaRPr lang="en-US"/>
+          </a:p>
+        </p:txBody>
+      </p:sp>
+    </p:spTree>
+  </p:cSld>
+  <p:clrMapOvr>
+    <a:masterClrMapping/>
+  </p:clrMapOvr>
+</p:sld>
+</file>
+
+<file path=ppt/slides/slide60.xml><?xml version="1.0" encoding="utf-8"?>
+<p:sld xmlns:a="http://schemas.openxmlformats.org/drawingml/2006/main" xmlns:r="http://schemas.openxmlformats.org/officeDocument/2006/relationships" xmlns:p="http://schemas.openxmlformats.org/presentationml/2006/main">
+  <p:cSld name="Slide 60">
+    <p:spTree>
+      <p:nvGrpSpPr>
+        <p:cNvPr id="1" name=""/>
+        <p:cNvGrpSpPr/>
+        <p:nvPr/>
+      </p:nvGrpSpPr>
+      <p:grpSpPr>
+        <a:xfrm>
+          <a:off x="0" y="0"/>
+          <a:ext cx="0" cy="0"/>
+          <a:chOff x="0" y="0"/>
+          <a:chExt cx="0" cy="0"/>
+        </a:xfrm>
+      </p:grpSpPr>
+      <p:sp>
+        <p:nvSpPr>
+          <p:cNvPr id="2" name="Text 0"/>
+          <p:cNvSpPr/>
+          <p:nvPr/>
+        </p:nvSpPr>
+        <p:spPr>
+          <a:xfrm>
+            <a:off x="457200" y="713232"/>
+            <a:ext cx="11368735" cy="274320"/>
+          </a:xfrm>
+          <a:prstGeom prst="rect">
+            <a:avLst/>
+          </a:prstGeom>
+          <a:noFill/>
+          <a:ln/>
+        </p:spPr>
+        <p:txBody>
+          <a:bodyPr wrap="square" lIns="0" tIns="0" rIns="0" bIns="0" rtlCol="0" anchor="ctr"/>
+          <a:lstStyle/>
+          <a:p>
+            <a:pPr algn="r" indent="0" marL="0">
+              <a:buNone/>
+            </a:pPr>
+            <a:r>
+              <a:rPr lang="en-US" sz="1400" b="1" dirty="0">
+                <a:solidFill>
+                  <a:srgbClr val="1C3F6E"/>
+                </a:solidFill>
+                <a:latin typeface="Calibri" pitchFamily="34" charset="0"/>
+                <a:ea typeface="Calibri" pitchFamily="34" charset="-122"/>
+                <a:cs typeface="Calibri" pitchFamily="34" charset="-120"/>
+              </a:rPr>
+              <a:t>BILINGUAL GAME</a:t>
+            </a:r>
+            <a:endParaRPr lang="en-US" sz="1400" dirty="0"/>
+          </a:p>
+        </p:txBody>
+      </p:sp>
+      <p:sp>
+        <p:nvSpPr>
+          <p:cNvPr id="3" name="Text 1"/>
+          <p:cNvSpPr/>
+          <p:nvPr/>
+        </p:nvSpPr>
+        <p:spPr>
+          <a:xfrm>
+            <a:off x="457200" y="1005840"/>
+            <a:ext cx="11277295" cy="731520"/>
+          </a:xfrm>
+          <a:prstGeom prst="rect">
+            <a:avLst/>
+          </a:prstGeom>
+          <a:noFill/>
+          <a:ln/>
+        </p:spPr>
+        <p:txBody>
+          <a:bodyPr wrap="square" lIns="0" tIns="0" rIns="0" bIns="0" rtlCol="0" anchor="ctr"/>
+          <a:lstStyle/>
+          <a:p>
+            <a:pPr algn="ctr" indent="0" marL="0">
+              <a:buNone/>
+            </a:pPr>
+            <a:r>
+              <a:rPr lang="en-US" sz="3600" b="1" dirty="0">
+                <a:solidFill>
+                  <a:srgbClr val="990011"/>
+                </a:solidFill>
+                <a:latin typeface="Times New Roman" pitchFamily="34" charset="0"/>
+                <a:ea typeface="Times New Roman" pitchFamily="34" charset="-122"/>
+                <a:cs typeface="Times New Roman" pitchFamily="34" charset="-120"/>
+              </a:rPr>
               <a:t>Bilingual Game (Jeu Bilingue)</a:t>
             </a:r>
             <a:endParaRPr lang="en-US" sz="3600" dirty="0"/>
@@ -20858,7 +22095,7 @@
       </p:sp>
       <p:graphicFrame>
         <p:nvGraphicFramePr>
-          <p:cNvPr id="59" name="Table 0"/>
+          <p:cNvPr id="61" name="Table 0"/>
           <p:cNvGraphicFramePr>
             <a:graphicFrameLocks noGrp="1"/>
           </p:cNvGraphicFramePr>
@@ -21894,7 +23131,7 @@
             <a:pPr algn="ctr"/>
             <a:fld id="{F7021451-1387-4CA6-816F-3879F97B5CBC}" type="slidenum">
               <a:rPr b="1" lang="en-US"/>
-              <a:t>58</a:t>
+              <a:t>60</a:t>
             </a:fld>
             <a:endParaRPr lang="en-US"/>
           </a:p>
@@ -21908,9 +23145,9 @@
 </p:sld>
 </file>
 
-<file path=ppt/slides/slide59.xml><?xml version="1.0" encoding="utf-8"?>
+<file path=ppt/slides/slide61.xml><?xml version="1.0" encoding="utf-8"?>
 <p:sld xmlns:a="http://schemas.openxmlformats.org/drawingml/2006/main" xmlns:r="http://schemas.openxmlformats.org/officeDocument/2006/relationships" xmlns:p="http://schemas.openxmlformats.org/presentationml/2006/main">
-  <p:cSld name="Slide 59">
+  <p:cSld name="Slide 61">
     <p:spTree>
       <p:nvGrpSpPr>
         <p:cNvPr id="1" name=""/>
@@ -22005,7 +23242,7 @@
       </p:sp>
       <p:graphicFrame>
         <p:nvGraphicFramePr>
-          <p:cNvPr id="60" name="Table 0"/>
+          <p:cNvPr id="62" name="Table 0"/>
           <p:cNvGraphicFramePr>
             <a:graphicFrameLocks noGrp="1"/>
           </p:cNvGraphicFramePr>
@@ -22627,7 +23864,7 @@
             <a:pPr algn="ctr"/>
             <a:fld id="{F7021451-1387-4CA6-816F-3879F97B5CBC}" type="slidenum">
               <a:rPr b="1" lang="en-US"/>
-              <a:t>59</a:t>
+              <a:t>61</a:t>
             </a:fld>
             <a:endParaRPr lang="en-US"/>
           </a:p>
@@ -22641,9 +23878,9 @@
 </p:sld>
 </file>
 
-<file path=ppt/slides/slide6.xml><?xml version="1.0" encoding="utf-8"?>
+<file path=ppt/slides/slide62.xml><?xml version="1.0" encoding="utf-8"?>
 <p:sld xmlns:a="http://schemas.openxmlformats.org/drawingml/2006/main" xmlns:r="http://schemas.openxmlformats.org/officeDocument/2006/relationships" xmlns:p="http://schemas.openxmlformats.org/presentationml/2006/main">
-  <p:cSld name="Slide 6">
+  <p:cSld name="Slide 62">
     <p:spTree>
       <p:nvGrpSpPr>
         <p:cNvPr id="1" name=""/>
@@ -22691,46 +23928,22 @@
                 <a:ea typeface="Calibri" pitchFamily="34" charset="-122"/>
                 <a:cs typeface="Calibri" pitchFamily="34" charset="-120"/>
               </a:rPr>
-              <a:t>LESSON PLAN</a:t>
+              <a:t>LOGBOOK</a:t>
             </a:r>
             <a:endParaRPr lang="en-US" sz="1400" dirty="0"/>
           </a:p>
         </p:txBody>
       </p:sp>
-      <p:pic>
-        <p:nvPicPr>
-          <p:cNvPr id="3" name="Image 0" descr="/home/claude/f4/img/minesec_sheet.png">    </p:cNvPr>
-          <p:cNvPicPr>
-            <a:picLocks noChangeAspect="1"/>
-          </p:cNvPicPr>
-          <p:nvPr/>
-        </p:nvPicPr>
-        <p:blipFill>
-          <a:blip r:embed="rId1"/>
-          <a:stretch>
-            <a:fillRect/>
-          </a:stretch>
-        </p:blipFill>
-        <p:spPr>
-          <a:xfrm>
-            <a:off x="0" y="658368"/>
-            <a:ext cx="2468880" cy="5833872"/>
-          </a:xfrm>
-          <a:prstGeom prst="rect">
-            <a:avLst/>
-          </a:prstGeom>
-        </p:spPr>
-      </p:pic>
-      <p:sp>
-        <p:nvSpPr>
-          <p:cNvPr id="4" name="Text 1"/>
+      <p:sp>
+        <p:nvSpPr>
+          <p:cNvPr id="3" name="Text 1"/>
           <p:cNvSpPr/>
           <p:nvPr/>
         </p:nvSpPr>
         <p:spPr>
           <a:xfrm>
-            <a:off x="2697480" y="1005840"/>
-            <a:ext cx="9174175" cy="731520"/>
+            <a:off x="457200" y="1005840"/>
+            <a:ext cx="11277295" cy="731520"/>
           </a:xfrm>
           <a:prstGeom prst="rect">
             <a:avLst/>
@@ -22739,9 +23952,7 @@
           <a:ln/>
         </p:spPr>
         <p:txBody>
-          <a:bodyPr wrap="square" lIns="0" tIns="0" rIns="0" bIns="0" rtlCol="0" anchor="ctr">
-            <a:normAutofit/>
-          </a:bodyPr>
+          <a:bodyPr wrap="square" lIns="0" tIns="0" rIns="0" bIns="0" rtlCol="0" anchor="ctr"/>
           <a:lstStyle/>
           <a:p>
             <a:pPr algn="ctr" indent="0" marL="0">
@@ -22756,311 +23967,6 @@
                 <a:ea typeface="Times New Roman" pitchFamily="34" charset="-122"/>
                 <a:cs typeface="Times New Roman" pitchFamily="34" charset="-120"/>
               </a:rPr>
-              <a:t>Lesson Plan</a:t>
-            </a:r>
-            <a:endParaRPr lang="en-US" sz="3600" dirty="0"/>
-          </a:p>
-        </p:txBody>
-      </p:sp>
-      <p:sp>
-        <p:nvSpPr>
-          <p:cNvPr id="5" name="Text 2"/>
-          <p:cNvSpPr/>
-          <p:nvPr/>
-        </p:nvSpPr>
-        <p:spPr>
-          <a:xfrm>
-            <a:off x="2697480" y="1783080"/>
-            <a:ext cx="9174175" cy="4663440"/>
-          </a:xfrm>
-          <a:prstGeom prst="rect">
-            <a:avLst/>
-          </a:prstGeom>
-          <a:noFill/>
-          <a:ln/>
-        </p:spPr>
-        <p:txBody>
-          <a:bodyPr wrap="square" lIns="0" tIns="0" rIns="0" bIns="0" rtlCol="0" anchor="t"/>
-          <a:lstStyle/>
-          <a:p>
-            <a:pPr algn="l" marL="342900" indent="-342900">
-              <a:spcAft>
-                <a:spcPts val="800"/>
-              </a:spcAft>
-              <a:buSzPct val="100000"/>
-              <a:buFont typeface="+mj-lt"/>
-              <a:buAutoNum type="arabicPeriod" startAt="1"/>
-            </a:pPr>
-            <a:r>
-              <a:rPr lang="en-US" sz="4000" dirty="0">
-                <a:solidFill>
-                  <a:srgbClr val="111111"/>
-                </a:solidFill>
-                <a:latin typeface="Times New Roman" pitchFamily="34" charset="0"/>
-                <a:ea typeface="Times New Roman" pitchFamily="34" charset="-122"/>
-                <a:cs typeface="Times New Roman" pitchFamily="34" charset="-120"/>
-              </a:rPr>
-              <a:t>Correction of the homework</a:t>
-            </a:r>
-            <a:endParaRPr lang="en-US" sz="4000" dirty="0"/>
-          </a:p>
-          <a:p>
-            <a:pPr algn="l" marL="342900" indent="-342900">
-              <a:spcAft>
-                <a:spcPts val="800"/>
-              </a:spcAft>
-              <a:buSzPct val="100000"/>
-              <a:buFont typeface="+mj-lt"/>
-              <a:buAutoNum type="arabicPeriod" startAt="1"/>
-            </a:pPr>
-            <a:r>
-              <a:rPr lang="en-US" sz="4000" dirty="0">
-                <a:solidFill>
-                  <a:srgbClr val="111111"/>
-                </a:solidFill>
-                <a:latin typeface="Times New Roman" pitchFamily="34" charset="0"/>
-                <a:ea typeface="Times New Roman" pitchFamily="34" charset="-122"/>
-                <a:cs typeface="Times New Roman" pitchFamily="34" charset="-120"/>
-              </a:rPr>
-              <a:t>Objectives and recall</a:t>
-            </a:r>
-            <a:endParaRPr lang="en-US" sz="4000" dirty="0"/>
-          </a:p>
-          <a:p>
-            <a:pPr algn="l" marL="342900" indent="-342900">
-              <a:spcAft>
-                <a:spcPts val="800"/>
-              </a:spcAft>
-              <a:buSzPct val="100000"/>
-              <a:buFont typeface="+mj-lt"/>
-              <a:buAutoNum type="arabicPeriod" startAt="1"/>
-            </a:pPr>
-            <a:r>
-              <a:rPr lang="en-US" sz="4000" dirty="0">
-                <a:solidFill>
-                  <a:srgbClr val="111111"/>
-                </a:solidFill>
-                <a:latin typeface="Times New Roman" pitchFamily="34" charset="0"/>
-                <a:ea typeface="Times New Roman" pitchFamily="34" charset="-122"/>
-                <a:cs typeface="Times New Roman" pitchFamily="34" charset="-120"/>
-              </a:rPr>
-              <a:t>Real-life situation and action to take</a:t>
-            </a:r>
-            <a:endParaRPr lang="en-US" sz="4000" dirty="0"/>
-          </a:p>
-          <a:p>
-            <a:pPr algn="l" marL="342900" indent="-342900">
-              <a:spcAft>
-                <a:spcPts val="800"/>
-              </a:spcAft>
-              <a:buSzPct val="100000"/>
-              <a:buFont typeface="+mj-lt"/>
-              <a:buAutoNum type="arabicPeriod" startAt="1"/>
-            </a:pPr>
-            <a:r>
-              <a:rPr lang="en-US" sz="4000" dirty="0">
-                <a:solidFill>
-                  <a:srgbClr val="111111"/>
-                </a:solidFill>
-                <a:latin typeface="Times New Roman" pitchFamily="34" charset="0"/>
-                <a:ea typeface="Times New Roman" pitchFamily="34" charset="-122"/>
-                <a:cs typeface="Times New Roman" pitchFamily="34" charset="-120"/>
-              </a:rPr>
-              <a:t>Learning activities</a:t>
-            </a:r>
-            <a:endParaRPr lang="en-US" sz="4000" dirty="0"/>
-          </a:p>
-          <a:p>
-            <a:pPr algn="l" marL="342900" indent="-342900">
-              <a:spcAft>
-                <a:spcPts val="800"/>
-              </a:spcAft>
-              <a:buSzPct val="100000"/>
-              <a:buFont typeface="+mj-lt"/>
-              <a:buAutoNum type="arabicPeriod" startAt="1"/>
-            </a:pPr>
-            <a:r>
-              <a:rPr lang="en-US" sz="4000" dirty="0">
-                <a:solidFill>
-                  <a:srgbClr val="111111"/>
-                </a:solidFill>
-                <a:latin typeface="Times New Roman" pitchFamily="34" charset="0"/>
-                <a:ea typeface="Times New Roman" pitchFamily="34" charset="-122"/>
-                <a:cs typeface="Times New Roman" pitchFamily="34" charset="-120"/>
-              </a:rPr>
-              <a:t>Board summary</a:t>
-            </a:r>
-            <a:endParaRPr lang="en-US" sz="4000" dirty="0"/>
-          </a:p>
-          <a:p>
-            <a:pPr algn="l" marL="342900" indent="-342900">
-              <a:spcAft>
-                <a:spcPts val="800"/>
-              </a:spcAft>
-              <a:buSzPct val="100000"/>
-              <a:buFont typeface="+mj-lt"/>
-              <a:buAutoNum type="arabicPeriod" startAt="1"/>
-            </a:pPr>
-            <a:r>
-              <a:rPr lang="en-US" sz="4000" dirty="0">
-                <a:solidFill>
-                  <a:srgbClr val="111111"/>
-                </a:solidFill>
-                <a:latin typeface="Times New Roman" pitchFamily="34" charset="0"/>
-                <a:ea typeface="Times New Roman" pitchFamily="34" charset="-122"/>
-                <a:cs typeface="Times New Roman" pitchFamily="34" charset="-120"/>
-              </a:rPr>
-              <a:t>Evaluation, remediation and homework</a:t>
-            </a:r>
-            <a:endParaRPr lang="en-US" sz="4000" dirty="0"/>
-          </a:p>
-        </p:txBody>
-      </p:sp>
-      <p:sp>
-        <p:nvSpPr>
-          <p:cNvPr id="25" name="Slide Number Placeholder 0"/>
-          <p:cNvSpPr>
-            <a:spLocks noGrp="1"/>
-          </p:cNvSpPr>
-          <p:nvPr>
-            <p:ph type="sldNum" sz="quarter" idx="4294967295"/>
-          </p:nvPr>
-        </p:nvSpPr>
-        <p:spPr>
-          <a:xfrm>
-            <a:off x="27432" y="91440"/>
-            <a:ext cx="585216" cy="475488"/>
-          </a:xfrm>
-          <a:prstGeom prst="rect">
-            <a:avLst/>
-          </a:prstGeom>
-          <a:extLst>
-            <a:ext uri="{C572A759-6A51-4108-AA02-DFA0A04FC94B}">
-              <ma14:wrappingTextBoxFlag xmlns:ma14="http://schemas.microsoft.com/office/mac/drawingml/2011/main" val="0"/>
-            </a:ext>
-          </a:extLst>
-        </p:spPr>
-        <p:txBody>
-          <a:bodyPr/>
-          <a:lstStyle>
-            <a:lvl1pPr>
-              <a:defRPr sz="2000">
-                <a:solidFill>
-                  <a:srgbClr val="FFFFFF"/>
-                </a:solidFill>
-                <a:latin typeface="Calibri"/>
-                <a:ea typeface="Calibri"/>
-                <a:cs typeface="Calibri"/>
-              </a:defRPr>
-            </a:lvl1pPr>
-          </a:lstStyle>
-          <a:p>
-            <a:pPr algn="ctr"/>
-            <a:fld id="{F7021451-1387-4CA6-816F-3879F97B5CBC}" type="slidenum">
-              <a:rPr b="1" lang="en-US"/>
-              <a:t>6</a:t>
-            </a:fld>
-            <a:endParaRPr lang="en-US"/>
-          </a:p>
-        </p:txBody>
-      </p:sp>
-    </p:spTree>
-  </p:cSld>
-  <p:clrMapOvr>
-    <a:masterClrMapping/>
-  </p:clrMapOvr>
-</p:sld>
-</file>
-
-<file path=ppt/slides/slide60.xml><?xml version="1.0" encoding="utf-8"?>
-<p:sld xmlns:a="http://schemas.openxmlformats.org/drawingml/2006/main" xmlns:r="http://schemas.openxmlformats.org/officeDocument/2006/relationships" xmlns:p="http://schemas.openxmlformats.org/presentationml/2006/main">
-  <p:cSld name="Slide 60">
-    <p:spTree>
-      <p:nvGrpSpPr>
-        <p:cNvPr id="1" name=""/>
-        <p:cNvGrpSpPr/>
-        <p:nvPr/>
-      </p:nvGrpSpPr>
-      <p:grpSpPr>
-        <a:xfrm>
-          <a:off x="0" y="0"/>
-          <a:ext cx="0" cy="0"/>
-          <a:chOff x="0" y="0"/>
-          <a:chExt cx="0" cy="0"/>
-        </a:xfrm>
-      </p:grpSpPr>
-      <p:sp>
-        <p:nvSpPr>
-          <p:cNvPr id="2" name="Text 0"/>
-          <p:cNvSpPr/>
-          <p:nvPr/>
-        </p:nvSpPr>
-        <p:spPr>
-          <a:xfrm>
-            <a:off x="457200" y="713232"/>
-            <a:ext cx="11368735" cy="274320"/>
-          </a:xfrm>
-          <a:prstGeom prst="rect">
-            <a:avLst/>
-          </a:prstGeom>
-          <a:noFill/>
-          <a:ln/>
-        </p:spPr>
-        <p:txBody>
-          <a:bodyPr wrap="square" lIns="0" tIns="0" rIns="0" bIns="0" rtlCol="0" anchor="ctr"/>
-          <a:lstStyle/>
-          <a:p>
-            <a:pPr algn="r" indent="0" marL="0">
-              <a:buNone/>
-            </a:pPr>
-            <a:r>
-              <a:rPr lang="en-US" sz="1400" b="1" dirty="0">
-                <a:solidFill>
-                  <a:srgbClr val="1C3F6E"/>
-                </a:solidFill>
-                <a:latin typeface="Calibri" pitchFamily="34" charset="0"/>
-                <a:ea typeface="Calibri" pitchFamily="34" charset="-122"/>
-                <a:cs typeface="Calibri" pitchFamily="34" charset="-120"/>
-              </a:rPr>
-              <a:t>LOGBOOK</a:t>
-            </a:r>
-            <a:endParaRPr lang="en-US" sz="1400" dirty="0"/>
-          </a:p>
-        </p:txBody>
-      </p:sp>
-      <p:sp>
-        <p:nvSpPr>
-          <p:cNvPr id="3" name="Text 1"/>
-          <p:cNvSpPr/>
-          <p:nvPr/>
-        </p:nvSpPr>
-        <p:spPr>
-          <a:xfrm>
-            <a:off x="457200" y="1005840"/>
-            <a:ext cx="11277295" cy="731520"/>
-          </a:xfrm>
-          <a:prstGeom prst="rect">
-            <a:avLst/>
-          </a:prstGeom>
-          <a:noFill/>
-          <a:ln/>
-        </p:spPr>
-        <p:txBody>
-          <a:bodyPr wrap="square" lIns="0" tIns="0" rIns="0" bIns="0" rtlCol="0" anchor="ctr"/>
-          <a:lstStyle/>
-          <a:p>
-            <a:pPr algn="ctr" indent="0" marL="0">
-              <a:buNone/>
-            </a:pPr>
-            <a:r>
-              <a:rPr lang="en-US" sz="3600" b="1" dirty="0">
-                <a:solidFill>
-                  <a:srgbClr val="990011"/>
-                </a:solidFill>
-                <a:latin typeface="Times New Roman" pitchFamily="34" charset="0"/>
-                <a:ea typeface="Times New Roman" pitchFamily="34" charset="-122"/>
-                <a:cs typeface="Times New Roman" pitchFamily="34" charset="-120"/>
-              </a:rPr>
               <a:t>Official Logbook (2/2)</a:t>
             </a:r>
             <a:endParaRPr lang="en-US" sz="3600" dirty="0"/>
@@ -23069,7 +23975,7 @@
       </p:sp>
       <p:graphicFrame>
         <p:nvGraphicFramePr>
-          <p:cNvPr id="61" name="Table 0"/>
+          <p:cNvPr id="63" name="Table 0"/>
           <p:cNvGraphicFramePr>
             <a:graphicFrameLocks noGrp="1"/>
           </p:cNvGraphicFramePr>
@@ -23179,7 +24085,7 @@
                           <a:ea typeface="Calibri" pitchFamily="34" charset="-122"/>
                           <a:cs typeface="Calibri" pitchFamily="34" charset="-120"/>
                         </a:rPr>
-                        <a:t>DEFINITIONS; Meaning and Volume of Migration; Characteristics (Differentials) of Migration; Zipf's Law and the Gravity Model; Stouffer's Intervening Opportunities Model; Calculations Based on the Models.</a:t>
+                        <a:t>DEFINITIONS; Meaning and Volume of Migration; Personal Characteristics; Social and Economic Characteristics; Zipf's Law and the Gravity Model; Stouffer's Intervening Opportunities Model; Calculations Based on the Models.</a:t>
                       </a:r>
                       <a:endParaRPr lang="en-US" sz="1600" dirty="0">
                         <a:latin typeface="Calibri" charset="0"/>
@@ -23829,7 +24735,7 @@
             <a:pPr algn="ctr"/>
             <a:fld id="{F7021451-1387-4CA6-816F-3879F97B5CBC}" type="slidenum">
               <a:rPr b="1" lang="en-US"/>
-              <a:t>60</a:t>
+              <a:t>62</a:t>
             </a:fld>
             <a:endParaRPr lang="en-US"/>
           </a:p>
@@ -23843,9 +24749,9 @@
 </p:sld>
 </file>
 
-<file path=ppt/slides/slide61.xml><?xml version="1.0" encoding="utf-8"?>
+<file path=ppt/slides/slide63.xml><?xml version="1.0" encoding="utf-8"?>
 <p:sld xmlns:a="http://schemas.openxmlformats.org/drawingml/2006/main" xmlns:r="http://schemas.openxmlformats.org/officeDocument/2006/relationships" xmlns:p="http://schemas.openxmlformats.org/presentationml/2006/main">
-  <p:cSld name="Slide 61">
+  <p:cSld name="Slide 63">
     <p:spTree>
       <p:nvGrpSpPr>
         <p:cNvPr id="1" name=""/>
@@ -24154,7 +25060,7 @@
             <a:pPr algn="ctr"/>
             <a:fld id="{F7021451-1387-4CA6-816F-3879F97B5CBC}" type="slidenum">
               <a:rPr b="1" lang="en-US"/>
-              <a:t>61</a:t>
+              <a:t>63</a:t>
             </a:fld>
             <a:endParaRPr lang="en-US"/>
           </a:p>
@@ -24168,9 +25074,9 @@
 </p:sld>
 </file>
 
-<file path=ppt/slides/slide62.xml><?xml version="1.0" encoding="utf-8"?>
+<file path=ppt/slides/slide64.xml><?xml version="1.0" encoding="utf-8"?>
 <p:sld xmlns:a="http://schemas.openxmlformats.org/drawingml/2006/main" xmlns:r="http://schemas.openxmlformats.org/officeDocument/2006/relationships" xmlns:p="http://schemas.openxmlformats.org/presentationml/2006/main">
-  <p:cSld name="Slide 62">
+  <p:cSld name="Slide 64">
     <p:spTree>
       <p:nvGrpSpPr>
         <p:cNvPr id="1" name=""/>
@@ -24437,7 +25343,7 @@
             <a:pPr algn="ctr"/>
             <a:fld id="{F7021451-1387-4CA6-816F-3879F97B5CBC}" type="slidenum">
               <a:rPr b="1" lang="en-US"/>
-              <a:t>62</a:t>
+              <a:t>64</a:t>
             </a:fld>
             <a:endParaRPr lang="en-US"/>
           </a:p>
